--- a/1 am/2 نظام التشغيل/cours 5/عرض الدرس.pptx
+++ b/1 am/2 نظام التشغيل/cours 5/عرض الدرس.pptx
@@ -308,7 +308,7 @@
             <a:fld id="{1C1C05D9-AF43-423E-A535-1456FBFB6486}" type="datetimeFigureOut">
               <a:rPr lang="fr-FR" smtClean="0"/>
               <a:pPr/>
-              <a:t>07/01/2025</a:t>
+              <a:t>12/01/2025</a:t>
             </a:fld>
             <a:endParaRPr lang="fr-FR"/>
           </a:p>
@@ -475,7 +475,7 @@
             <a:fld id="{1C1C05D9-AF43-423E-A535-1456FBFB6486}" type="datetimeFigureOut">
               <a:rPr lang="fr-FR" smtClean="0"/>
               <a:pPr/>
-              <a:t>07/01/2025</a:t>
+              <a:t>12/01/2025</a:t>
             </a:fld>
             <a:endParaRPr lang="fr-FR"/>
           </a:p>
@@ -652,7 +652,7 @@
             <a:fld id="{1C1C05D9-AF43-423E-A535-1456FBFB6486}" type="datetimeFigureOut">
               <a:rPr lang="fr-FR" smtClean="0"/>
               <a:pPr/>
-              <a:t>07/01/2025</a:t>
+              <a:t>12/01/2025</a:t>
             </a:fld>
             <a:endParaRPr lang="fr-FR"/>
           </a:p>
@@ -819,7 +819,7 @@
             <a:fld id="{1C1C05D9-AF43-423E-A535-1456FBFB6486}" type="datetimeFigureOut">
               <a:rPr lang="fr-FR" smtClean="0"/>
               <a:pPr/>
-              <a:t>07/01/2025</a:t>
+              <a:t>12/01/2025</a:t>
             </a:fld>
             <a:endParaRPr lang="fr-FR"/>
           </a:p>
@@ -1062,7 +1062,7 @@
             <a:fld id="{1C1C05D9-AF43-423E-A535-1456FBFB6486}" type="datetimeFigureOut">
               <a:rPr lang="fr-FR" smtClean="0"/>
               <a:pPr/>
-              <a:t>07/01/2025</a:t>
+              <a:t>12/01/2025</a:t>
             </a:fld>
             <a:endParaRPr lang="fr-FR"/>
           </a:p>
@@ -1347,7 +1347,7 @@
             <a:fld id="{1C1C05D9-AF43-423E-A535-1456FBFB6486}" type="datetimeFigureOut">
               <a:rPr lang="fr-FR" smtClean="0"/>
               <a:pPr/>
-              <a:t>07/01/2025</a:t>
+              <a:t>12/01/2025</a:t>
             </a:fld>
             <a:endParaRPr lang="fr-FR"/>
           </a:p>
@@ -1766,7 +1766,7 @@
             <a:fld id="{1C1C05D9-AF43-423E-A535-1456FBFB6486}" type="datetimeFigureOut">
               <a:rPr lang="fr-FR" smtClean="0"/>
               <a:pPr/>
-              <a:t>07/01/2025</a:t>
+              <a:t>12/01/2025</a:t>
             </a:fld>
             <a:endParaRPr lang="fr-FR"/>
           </a:p>
@@ -1881,7 +1881,7 @@
             <a:fld id="{1C1C05D9-AF43-423E-A535-1456FBFB6486}" type="datetimeFigureOut">
               <a:rPr lang="fr-FR" smtClean="0"/>
               <a:pPr/>
-              <a:t>07/01/2025</a:t>
+              <a:t>12/01/2025</a:t>
             </a:fld>
             <a:endParaRPr lang="fr-FR"/>
           </a:p>
@@ -1973,7 +1973,7 @@
             <a:fld id="{1C1C05D9-AF43-423E-A535-1456FBFB6486}" type="datetimeFigureOut">
               <a:rPr lang="fr-FR" smtClean="0"/>
               <a:pPr/>
-              <a:t>07/01/2025</a:t>
+              <a:t>12/01/2025</a:t>
             </a:fld>
             <a:endParaRPr lang="fr-FR"/>
           </a:p>
@@ -2247,7 +2247,7 @@
             <a:fld id="{1C1C05D9-AF43-423E-A535-1456FBFB6486}" type="datetimeFigureOut">
               <a:rPr lang="fr-FR" smtClean="0"/>
               <a:pPr/>
-              <a:t>07/01/2025</a:t>
+              <a:t>12/01/2025</a:t>
             </a:fld>
             <a:endParaRPr lang="fr-FR"/>
           </a:p>
@@ -2497,7 +2497,7 @@
             <a:fld id="{1C1C05D9-AF43-423E-A535-1456FBFB6486}" type="datetimeFigureOut">
               <a:rPr lang="fr-FR" smtClean="0"/>
               <a:pPr/>
-              <a:t>07/01/2025</a:t>
+              <a:t>12/01/2025</a:t>
             </a:fld>
             <a:endParaRPr lang="fr-FR"/>
           </a:p>
@@ -2707,7 +2707,7 @@
             <a:fld id="{1C1C05D9-AF43-423E-A535-1456FBFB6486}" type="datetimeFigureOut">
               <a:rPr lang="fr-FR" smtClean="0"/>
               <a:pPr/>
-              <a:t>07/01/2025</a:t>
+              <a:t>12/01/2025</a:t>
             </a:fld>
             <a:endParaRPr lang="fr-FR"/>
           </a:p>
@@ -3447,6 +3447,9 @@
   <p:clrMapOvr>
     <a:masterClrMapping/>
   </p:clrMapOvr>
+  <p:transition spd="slow">
+    <p:push dir="u"/>
+  </p:transition>
   <p:timing>
     <p:tnLst>
       <p:par>
@@ -3871,6 +3874,9 @@
   <p:clrMapOvr>
     <a:masterClrMapping/>
   </p:clrMapOvr>
+  <p:transition spd="slow">
+    <p:push dir="u"/>
+  </p:transition>
   <p:timing>
     <p:tnLst>
       <p:par>
@@ -3926,15 +3932,7 @@
                   <a:srgbClr val="FF0000"/>
                 </a:solidFill>
               </a:rPr>
-              <a:t>تدريب </a:t>
-            </a:r>
-            <a:r>
-              <a:rPr lang="ar-DZ" b="1" u="sng" dirty="0" smtClean="0">
-                <a:solidFill>
-                  <a:srgbClr val="FF0000"/>
-                </a:solidFill>
-              </a:rPr>
-              <a:t>:</a:t>
+              <a:t>تدريب :</a:t>
             </a:r>
             <a:endParaRPr lang="fr-FR" b="1" dirty="0"/>
           </a:p>
@@ -4055,6 +4053,9 @@
   <p:clrMapOvr>
     <a:masterClrMapping/>
   </p:clrMapOvr>
+  <p:transition spd="slow">
+    <p:push dir="u"/>
+  </p:transition>
   <p:timing>
     <p:tnLst>
       <p:par>

--- a/1 am/2 نظام التشغيل/cours 5/عرض الدرس.pptx
+++ b/1 am/2 نظام التشغيل/cours 5/عرض الدرس.pptx
@@ -6,11 +6,14 @@
   </p:sldMasterIdLst>
   <p:sldIdLst>
     <p:sldId id="256" r:id="rId2"/>
-    <p:sldId id="263" r:id="rId3"/>
-    <p:sldId id="257" r:id="rId4"/>
-    <p:sldId id="258" r:id="rId5"/>
+    <p:sldId id="264" r:id="rId3"/>
+    <p:sldId id="262" r:id="rId4"/>
+    <p:sldId id="261" r:id="rId5"/>
+    <p:sldId id="260" r:id="rId6"/>
+    <p:sldId id="259" r:id="rId7"/>
+    <p:sldId id="265" r:id="rId8"/>
   </p:sldIdLst>
-  <p:sldSz cx="9144000" cy="6858000" type="screen4x3"/>
+  <p:sldSz cx="12192000" cy="6858000"/>
   <p:notesSz cx="6858000" cy="9144000"/>
   <p:defaultTextStyle>
     <a:defPPr>
@@ -109,18 +112,7 @@
   </p:defaultTextStyle>
   <p:extLst>
     <p:ext uri="{EFAFB233-063F-42B5-8137-9DF3F51BA10A}">
-      <p15:sldGuideLst xmlns:p15="http://schemas.microsoft.com/office/powerpoint/2012/main">
-        <p15:guide id="1" orient="horz" pos="2160">
-          <p15:clr>
-            <a:srgbClr val="A4A3A4"/>
-          </p15:clr>
-        </p15:guide>
-        <p15:guide id="2" pos="2880">
-          <p15:clr>
-            <a:srgbClr val="A4A3A4"/>
-          </p15:clr>
-        </p15:guide>
-      </p15:sldGuideLst>
+      <p15:sldGuideLst xmlns:p15="http://schemas.microsoft.com/office/powerpoint/2012/main"/>
     </p:ext>
   </p:extLst>
 </p:presentation>
@@ -155,17 +147,21 @@
         </p:nvSpPr>
         <p:spPr>
           <a:xfrm>
-            <a:off x="685800" y="2130425"/>
-            <a:ext cx="7772400" cy="1470025"/>
+            <a:off x="1524000" y="1122363"/>
+            <a:ext cx="9144000" cy="2387600"/>
           </a:xfrm>
         </p:spPr>
         <p:txBody>
-          <a:bodyPr/>
-          <a:lstStyle/>
-          <a:p>
-            <a:r>
-              <a:rPr lang="fr-FR" smtClean="0"/>
-              <a:t>Cliquez pour modifier le style du titre</a:t>
+          <a:bodyPr anchor="b"/>
+          <a:lstStyle>
+            <a:lvl1pPr algn="ctr">
+              <a:defRPr sz="6000"/>
+            </a:lvl1pPr>
+          </a:lstStyle>
+          <a:p>
+            <a:r>
+              <a:rPr lang="fr-FR" smtClean="0"/>
+              <a:t>Modifiez le style du titre</a:t>
             </a:r>
             <a:endParaRPr lang="fr-FR"/>
           </a:p>
@@ -183,8 +179,8 @@
         </p:nvSpPr>
         <p:spPr>
           <a:xfrm>
-            <a:off x="1371600" y="3886200"/>
-            <a:ext cx="6400800" cy="1752600"/>
+            <a:off x="1524000" y="3602038"/>
+            <a:ext cx="9144000" cy="1655762"/>
           </a:xfrm>
         </p:spPr>
         <p:txBody>
@@ -192,99 +188,45 @@
           <a:lstStyle>
             <a:lvl1pPr marL="0" indent="0" algn="ctr">
               <a:buNone/>
-              <a:defRPr>
-                <a:solidFill>
-                  <a:schemeClr val="tx1">
-                    <a:tint val="75000"/>
-                  </a:schemeClr>
-                </a:solidFill>
-              </a:defRPr>
+              <a:defRPr sz="2400"/>
             </a:lvl1pPr>
             <a:lvl2pPr marL="457200" indent="0" algn="ctr">
               <a:buNone/>
-              <a:defRPr>
-                <a:solidFill>
-                  <a:schemeClr val="tx1">
-                    <a:tint val="75000"/>
-                  </a:schemeClr>
-                </a:solidFill>
-              </a:defRPr>
+              <a:defRPr sz="2000"/>
             </a:lvl2pPr>
             <a:lvl3pPr marL="914400" indent="0" algn="ctr">
               <a:buNone/>
-              <a:defRPr>
-                <a:solidFill>
-                  <a:schemeClr val="tx1">
-                    <a:tint val="75000"/>
-                  </a:schemeClr>
-                </a:solidFill>
-              </a:defRPr>
+              <a:defRPr sz="1800"/>
             </a:lvl3pPr>
             <a:lvl4pPr marL="1371600" indent="0" algn="ctr">
               <a:buNone/>
-              <a:defRPr>
-                <a:solidFill>
-                  <a:schemeClr val="tx1">
-                    <a:tint val="75000"/>
-                  </a:schemeClr>
-                </a:solidFill>
-              </a:defRPr>
+              <a:defRPr sz="1600"/>
             </a:lvl4pPr>
             <a:lvl5pPr marL="1828800" indent="0" algn="ctr">
               <a:buNone/>
-              <a:defRPr>
-                <a:solidFill>
-                  <a:schemeClr val="tx1">
-                    <a:tint val="75000"/>
-                  </a:schemeClr>
-                </a:solidFill>
-              </a:defRPr>
+              <a:defRPr sz="1600"/>
             </a:lvl5pPr>
             <a:lvl6pPr marL="2286000" indent="0" algn="ctr">
               <a:buNone/>
-              <a:defRPr>
-                <a:solidFill>
-                  <a:schemeClr val="tx1">
-                    <a:tint val="75000"/>
-                  </a:schemeClr>
-                </a:solidFill>
-              </a:defRPr>
+              <a:defRPr sz="1600"/>
             </a:lvl6pPr>
             <a:lvl7pPr marL="2743200" indent="0" algn="ctr">
               <a:buNone/>
-              <a:defRPr>
-                <a:solidFill>
-                  <a:schemeClr val="tx1">
-                    <a:tint val="75000"/>
-                  </a:schemeClr>
-                </a:solidFill>
-              </a:defRPr>
+              <a:defRPr sz="1600"/>
             </a:lvl7pPr>
             <a:lvl8pPr marL="3200400" indent="0" algn="ctr">
               <a:buNone/>
-              <a:defRPr>
-                <a:solidFill>
-                  <a:schemeClr val="tx1">
-                    <a:tint val="75000"/>
-                  </a:schemeClr>
-                </a:solidFill>
-              </a:defRPr>
+              <a:defRPr sz="1600"/>
             </a:lvl8pPr>
             <a:lvl9pPr marL="3657600" indent="0" algn="ctr">
               <a:buNone/>
-              <a:defRPr>
-                <a:solidFill>
-                  <a:schemeClr val="tx1">
-                    <a:tint val="75000"/>
-                  </a:schemeClr>
-                </a:solidFill>
-              </a:defRPr>
+              <a:defRPr sz="1600"/>
             </a:lvl9pPr>
           </a:lstStyle>
           <a:p>
             <a:r>
               <a:rPr lang="fr-FR" smtClean="0"/>
-              <a:t>Cliquez pour modifier le style des sous-titres du masque</a:t>
+              <a:t>Modifiez le style des sous-titres du masque</a:t>
             </a:r>
             <a:endParaRPr lang="fr-FR"/>
           </a:p>
@@ -305,10 +247,9 @@
           <a:bodyPr/>
           <a:lstStyle/>
           <a:p>
-            <a:fld id="{1C1C05D9-AF43-423E-A535-1456FBFB6486}" type="datetimeFigureOut">
-              <a:rPr lang="fr-FR" smtClean="0"/>
-              <a:pPr/>
-              <a:t>12/01/2025</a:t>
+            <a:fld id="{33E46DBA-FA3B-4C5F-B700-4671668DAB72}" type="datetimeFigureOut">
+              <a:rPr lang="fr-FR" smtClean="0"/>
+              <a:t>15/01/2025</a:t>
             </a:fld>
             <a:endParaRPr lang="fr-FR"/>
           </a:p>
@@ -348,9 +289,8 @@
           <a:bodyPr/>
           <a:lstStyle/>
           <a:p>
-            <a:fld id="{1C6B4844-727D-467B-8934-26551CF16DC6}" type="slidenum">
-              <a:rPr lang="fr-FR" smtClean="0"/>
-              <a:pPr/>
+            <a:fld id="{BB9FB400-9542-4209-8750-C58872F72AA0}" type="slidenum">
+              <a:rPr lang="fr-FR" smtClean="0"/>
               <a:t>‹N°›</a:t>
             </a:fld>
             <a:endParaRPr lang="fr-FR"/>
@@ -358,6 +298,11 @@
         </p:txBody>
       </p:sp>
     </p:spTree>
+    <p:extLst>
+      <p:ext uri="{BB962C8B-B14F-4D97-AF65-F5344CB8AC3E}">
+        <p14:creationId xmlns:p14="http://schemas.microsoft.com/office/powerpoint/2010/main" val="792417892"/>
+      </p:ext>
+    </p:extLst>
   </p:cSld>
   <p:clrMapOvr>
     <a:masterClrMapping/>
@@ -399,7 +344,7 @@
           <a:p>
             <a:r>
               <a:rPr lang="fr-FR" smtClean="0"/>
-              <a:t>Cliquez pour modifier le style du titre</a:t>
+              <a:t>Modifiez le style du titre</a:t>
             </a:r>
             <a:endParaRPr lang="fr-FR"/>
           </a:p>
@@ -423,7 +368,7 @@
             <a:pPr lvl="0"/>
             <a:r>
               <a:rPr lang="fr-FR" smtClean="0"/>
-              <a:t>Cliquez pour modifier les styles du texte du masque</a:t>
+              <a:t>Modifiez les styles du texte du masque</a:t>
             </a:r>
           </a:p>
           <a:p>
@@ -472,10 +417,9 @@
           <a:bodyPr/>
           <a:lstStyle/>
           <a:p>
-            <a:fld id="{1C1C05D9-AF43-423E-A535-1456FBFB6486}" type="datetimeFigureOut">
-              <a:rPr lang="fr-FR" smtClean="0"/>
-              <a:pPr/>
-              <a:t>12/01/2025</a:t>
+            <a:fld id="{33E46DBA-FA3B-4C5F-B700-4671668DAB72}" type="datetimeFigureOut">
+              <a:rPr lang="fr-FR" smtClean="0"/>
+              <a:t>15/01/2025</a:t>
             </a:fld>
             <a:endParaRPr lang="fr-FR"/>
           </a:p>
@@ -515,9 +459,8 @@
           <a:bodyPr/>
           <a:lstStyle/>
           <a:p>
-            <a:fld id="{1C6B4844-727D-467B-8934-26551CF16DC6}" type="slidenum">
-              <a:rPr lang="fr-FR" smtClean="0"/>
-              <a:pPr/>
+            <a:fld id="{BB9FB400-9542-4209-8750-C58872F72AA0}" type="slidenum">
+              <a:rPr lang="fr-FR" smtClean="0"/>
               <a:t>‹N°›</a:t>
             </a:fld>
             <a:endParaRPr lang="fr-FR"/>
@@ -525,6 +468,11 @@
         </p:txBody>
       </p:sp>
     </p:spTree>
+    <p:extLst>
+      <p:ext uri="{BB962C8B-B14F-4D97-AF65-F5344CB8AC3E}">
+        <p14:creationId xmlns:p14="http://schemas.microsoft.com/office/powerpoint/2010/main" val="1569656535"/>
+      </p:ext>
+    </p:extLst>
   </p:cSld>
   <p:clrMapOvr>
     <a:masterClrMapping/>
@@ -561,8 +509,8 @@
         </p:nvSpPr>
         <p:spPr>
           <a:xfrm>
-            <a:off x="6629400" y="274638"/>
-            <a:ext cx="2057400" cy="5851525"/>
+            <a:off x="8724900" y="365125"/>
+            <a:ext cx="2628900" cy="5811838"/>
           </a:xfrm>
         </p:spPr>
         <p:txBody>
@@ -571,7 +519,7 @@
           <a:p>
             <a:r>
               <a:rPr lang="fr-FR" smtClean="0"/>
-              <a:t>Cliquez pour modifier le style du titre</a:t>
+              <a:t>Modifiez le style du titre</a:t>
             </a:r>
             <a:endParaRPr lang="fr-FR"/>
           </a:p>
@@ -589,8 +537,8 @@
         </p:nvSpPr>
         <p:spPr>
           <a:xfrm>
-            <a:off x="457200" y="274638"/>
-            <a:ext cx="6019800" cy="5851525"/>
+            <a:off x="838200" y="365125"/>
+            <a:ext cx="7734300" cy="5811838"/>
           </a:xfrm>
         </p:spPr>
         <p:txBody>
@@ -600,7 +548,7 @@
             <a:pPr lvl="0"/>
             <a:r>
               <a:rPr lang="fr-FR" smtClean="0"/>
-              <a:t>Cliquez pour modifier les styles du texte du masque</a:t>
+              <a:t>Modifiez les styles du texte du masque</a:t>
             </a:r>
           </a:p>
           <a:p>
@@ -649,10 +597,9 @@
           <a:bodyPr/>
           <a:lstStyle/>
           <a:p>
-            <a:fld id="{1C1C05D9-AF43-423E-A535-1456FBFB6486}" type="datetimeFigureOut">
-              <a:rPr lang="fr-FR" smtClean="0"/>
-              <a:pPr/>
-              <a:t>12/01/2025</a:t>
+            <a:fld id="{33E46DBA-FA3B-4C5F-B700-4671668DAB72}" type="datetimeFigureOut">
+              <a:rPr lang="fr-FR" smtClean="0"/>
+              <a:t>15/01/2025</a:t>
             </a:fld>
             <a:endParaRPr lang="fr-FR"/>
           </a:p>
@@ -692,9 +639,8 @@
           <a:bodyPr/>
           <a:lstStyle/>
           <a:p>
-            <a:fld id="{1C6B4844-727D-467B-8934-26551CF16DC6}" type="slidenum">
-              <a:rPr lang="fr-FR" smtClean="0"/>
-              <a:pPr/>
+            <a:fld id="{BB9FB400-9542-4209-8750-C58872F72AA0}" type="slidenum">
+              <a:rPr lang="fr-FR" smtClean="0"/>
               <a:t>‹N°›</a:t>
             </a:fld>
             <a:endParaRPr lang="fr-FR"/>
@@ -702,6 +648,11 @@
         </p:txBody>
       </p:sp>
     </p:spTree>
+    <p:extLst>
+      <p:ext uri="{BB962C8B-B14F-4D97-AF65-F5344CB8AC3E}">
+        <p14:creationId xmlns:p14="http://schemas.microsoft.com/office/powerpoint/2010/main" val="2521495347"/>
+      </p:ext>
+    </p:extLst>
   </p:cSld>
   <p:clrMapOvr>
     <a:masterClrMapping/>
@@ -743,7 +694,7 @@
           <a:p>
             <a:r>
               <a:rPr lang="fr-FR" smtClean="0"/>
-              <a:t>Cliquez pour modifier le style du titre</a:t>
+              <a:t>Modifiez le style du titre</a:t>
             </a:r>
             <a:endParaRPr lang="fr-FR"/>
           </a:p>
@@ -767,7 +718,7 @@
             <a:pPr lvl="0"/>
             <a:r>
               <a:rPr lang="fr-FR" smtClean="0"/>
-              <a:t>Cliquez pour modifier les styles du texte du masque</a:t>
+              <a:t>Modifiez les styles du texte du masque</a:t>
             </a:r>
           </a:p>
           <a:p>
@@ -816,10 +767,9 @@
           <a:bodyPr/>
           <a:lstStyle/>
           <a:p>
-            <a:fld id="{1C1C05D9-AF43-423E-A535-1456FBFB6486}" type="datetimeFigureOut">
-              <a:rPr lang="fr-FR" smtClean="0"/>
-              <a:pPr/>
-              <a:t>12/01/2025</a:t>
+            <a:fld id="{33E46DBA-FA3B-4C5F-B700-4671668DAB72}" type="datetimeFigureOut">
+              <a:rPr lang="fr-FR" smtClean="0"/>
+              <a:t>15/01/2025</a:t>
             </a:fld>
             <a:endParaRPr lang="fr-FR"/>
           </a:p>
@@ -859,9 +809,8 @@
           <a:bodyPr/>
           <a:lstStyle/>
           <a:p>
-            <a:fld id="{1C6B4844-727D-467B-8934-26551CF16DC6}" type="slidenum">
-              <a:rPr lang="fr-FR" smtClean="0"/>
-              <a:pPr/>
+            <a:fld id="{BB9FB400-9542-4209-8750-C58872F72AA0}" type="slidenum">
+              <a:rPr lang="fr-FR" smtClean="0"/>
               <a:t>‹N°›</a:t>
             </a:fld>
             <a:endParaRPr lang="fr-FR"/>
@@ -869,6 +818,11 @@
         </p:txBody>
       </p:sp>
     </p:spTree>
+    <p:extLst>
+      <p:ext uri="{BB962C8B-B14F-4D97-AF65-F5344CB8AC3E}">
+        <p14:creationId xmlns:p14="http://schemas.microsoft.com/office/powerpoint/2010/main" val="3437388842"/>
+      </p:ext>
+    </p:extLst>
   </p:cSld>
   <p:clrMapOvr>
     <a:masterClrMapping/>
@@ -905,21 +859,21 @@
         </p:nvSpPr>
         <p:spPr>
           <a:xfrm>
-            <a:off x="722313" y="4406900"/>
-            <a:ext cx="7772400" cy="1362075"/>
+            <a:off x="831850" y="1709738"/>
+            <a:ext cx="10515600" cy="2852737"/>
           </a:xfrm>
         </p:spPr>
         <p:txBody>
-          <a:bodyPr anchor="t"/>
+          <a:bodyPr anchor="b"/>
           <a:lstStyle>
-            <a:lvl1pPr algn="l">
-              <a:defRPr sz="4000" b="1" cap="all"/>
+            <a:lvl1pPr>
+              <a:defRPr sz="6000"/>
             </a:lvl1pPr>
           </a:lstStyle>
           <a:p>
             <a:r>
               <a:rPr lang="fr-FR" smtClean="0"/>
-              <a:t>Cliquez pour modifier le style du titre</a:t>
+              <a:t>Modifiez le style du titre</a:t>
             </a:r>
             <a:endParaRPr lang="fr-FR"/>
           </a:p>
@@ -937,16 +891,16 @@
         </p:nvSpPr>
         <p:spPr>
           <a:xfrm>
-            <a:off x="722313" y="2906713"/>
-            <a:ext cx="7772400" cy="1500187"/>
+            <a:off x="831850" y="4589463"/>
+            <a:ext cx="10515600" cy="1500187"/>
           </a:xfrm>
         </p:spPr>
         <p:txBody>
-          <a:bodyPr anchor="b"/>
+          <a:bodyPr/>
           <a:lstStyle>
             <a:lvl1pPr marL="0" indent="0">
               <a:buNone/>
-              <a:defRPr sz="2000">
+              <a:defRPr sz="2400">
                 <a:solidFill>
                   <a:schemeClr val="tx1">
                     <a:tint val="75000"/>
@@ -956,7 +910,7 @@
             </a:lvl1pPr>
             <a:lvl2pPr marL="457200" indent="0">
               <a:buNone/>
-              <a:defRPr sz="1800">
+              <a:defRPr sz="2000">
                 <a:solidFill>
                   <a:schemeClr val="tx1">
                     <a:tint val="75000"/>
@@ -966,7 +920,7 @@
             </a:lvl2pPr>
             <a:lvl3pPr marL="914400" indent="0">
               <a:buNone/>
-              <a:defRPr sz="1600">
+              <a:defRPr sz="1800">
                 <a:solidFill>
                   <a:schemeClr val="tx1">
                     <a:tint val="75000"/>
@@ -976,7 +930,7 @@
             </a:lvl3pPr>
             <a:lvl4pPr marL="1371600" indent="0">
               <a:buNone/>
-              <a:defRPr sz="1400">
+              <a:defRPr sz="1600">
                 <a:solidFill>
                   <a:schemeClr val="tx1">
                     <a:tint val="75000"/>
@@ -986,7 +940,7 @@
             </a:lvl4pPr>
             <a:lvl5pPr marL="1828800" indent="0">
               <a:buNone/>
-              <a:defRPr sz="1400">
+              <a:defRPr sz="1600">
                 <a:solidFill>
                   <a:schemeClr val="tx1">
                     <a:tint val="75000"/>
@@ -996,7 +950,7 @@
             </a:lvl5pPr>
             <a:lvl6pPr marL="2286000" indent="0">
               <a:buNone/>
-              <a:defRPr sz="1400">
+              <a:defRPr sz="1600">
                 <a:solidFill>
                   <a:schemeClr val="tx1">
                     <a:tint val="75000"/>
@@ -1006,7 +960,7 @@
             </a:lvl6pPr>
             <a:lvl7pPr marL="2743200" indent="0">
               <a:buNone/>
-              <a:defRPr sz="1400">
+              <a:defRPr sz="1600">
                 <a:solidFill>
                   <a:schemeClr val="tx1">
                     <a:tint val="75000"/>
@@ -1016,7 +970,7 @@
             </a:lvl7pPr>
             <a:lvl8pPr marL="3200400" indent="0">
               <a:buNone/>
-              <a:defRPr sz="1400">
+              <a:defRPr sz="1600">
                 <a:solidFill>
                   <a:schemeClr val="tx1">
                     <a:tint val="75000"/>
@@ -1026,7 +980,7 @@
             </a:lvl8pPr>
             <a:lvl9pPr marL="3657600" indent="0">
               <a:buNone/>
-              <a:defRPr sz="1400">
+              <a:defRPr sz="1600">
                 <a:solidFill>
                   <a:schemeClr val="tx1">
                     <a:tint val="75000"/>
@@ -1039,7 +993,7 @@
             <a:pPr lvl="0"/>
             <a:r>
               <a:rPr lang="fr-FR" smtClean="0"/>
-              <a:t>Cliquez pour modifier les styles du texte du masque</a:t>
+              <a:t>Modifiez les styles du texte du masque</a:t>
             </a:r>
           </a:p>
         </p:txBody>
@@ -1059,10 +1013,9 @@
           <a:bodyPr/>
           <a:lstStyle/>
           <a:p>
-            <a:fld id="{1C1C05D9-AF43-423E-A535-1456FBFB6486}" type="datetimeFigureOut">
-              <a:rPr lang="fr-FR" smtClean="0"/>
-              <a:pPr/>
-              <a:t>12/01/2025</a:t>
+            <a:fld id="{33E46DBA-FA3B-4C5F-B700-4671668DAB72}" type="datetimeFigureOut">
+              <a:rPr lang="fr-FR" smtClean="0"/>
+              <a:t>15/01/2025</a:t>
             </a:fld>
             <a:endParaRPr lang="fr-FR"/>
           </a:p>
@@ -1102,9 +1055,8 @@
           <a:bodyPr/>
           <a:lstStyle/>
           <a:p>
-            <a:fld id="{1C6B4844-727D-467B-8934-26551CF16DC6}" type="slidenum">
-              <a:rPr lang="fr-FR" smtClean="0"/>
-              <a:pPr/>
+            <a:fld id="{BB9FB400-9542-4209-8750-C58872F72AA0}" type="slidenum">
+              <a:rPr lang="fr-FR" smtClean="0"/>
               <a:t>‹N°›</a:t>
             </a:fld>
             <a:endParaRPr lang="fr-FR"/>
@@ -1112,6 +1064,11 @@
         </p:txBody>
       </p:sp>
     </p:spTree>
+    <p:extLst>
+      <p:ext uri="{BB962C8B-B14F-4D97-AF65-F5344CB8AC3E}">
+        <p14:creationId xmlns:p14="http://schemas.microsoft.com/office/powerpoint/2010/main" val="434069786"/>
+      </p:ext>
+    </p:extLst>
   </p:cSld>
   <p:clrMapOvr>
     <a:masterClrMapping/>
@@ -1153,7 +1110,7 @@
           <a:p>
             <a:r>
               <a:rPr lang="fr-FR" smtClean="0"/>
-              <a:t>Cliquez pour modifier le style du titre</a:t>
+              <a:t>Modifiez le style du titre</a:t>
             </a:r>
             <a:endParaRPr lang="fr-FR"/>
           </a:p>
@@ -1171,46 +1128,18 @@
         </p:nvSpPr>
         <p:spPr>
           <a:xfrm>
-            <a:off x="457200" y="1600200"/>
-            <a:ext cx="4038600" cy="4525963"/>
+            <a:off x="838200" y="1825625"/>
+            <a:ext cx="5181600" cy="4351338"/>
           </a:xfrm>
         </p:spPr>
         <p:txBody>
           <a:bodyPr/>
-          <a:lstStyle>
-            <a:lvl1pPr>
-              <a:defRPr sz="2800"/>
-            </a:lvl1pPr>
-            <a:lvl2pPr>
-              <a:defRPr sz="2400"/>
-            </a:lvl2pPr>
-            <a:lvl3pPr>
-              <a:defRPr sz="2000"/>
-            </a:lvl3pPr>
-            <a:lvl4pPr>
-              <a:defRPr sz="1800"/>
-            </a:lvl4pPr>
-            <a:lvl5pPr>
-              <a:defRPr sz="1800"/>
-            </a:lvl5pPr>
-            <a:lvl6pPr>
-              <a:defRPr sz="1800"/>
-            </a:lvl6pPr>
-            <a:lvl7pPr>
-              <a:defRPr sz="1800"/>
-            </a:lvl7pPr>
-            <a:lvl8pPr>
-              <a:defRPr sz="1800"/>
-            </a:lvl8pPr>
-            <a:lvl9pPr>
-              <a:defRPr sz="1800"/>
-            </a:lvl9pPr>
-          </a:lstStyle>
+          <a:lstStyle/>
           <a:p>
             <a:pPr lvl="0"/>
             <a:r>
               <a:rPr lang="fr-FR" smtClean="0"/>
-              <a:t>Cliquez pour modifier les styles du texte du masque</a:t>
+              <a:t>Modifiez les styles du texte du masque</a:t>
             </a:r>
           </a:p>
           <a:p>
@@ -1256,46 +1185,18 @@
         </p:nvSpPr>
         <p:spPr>
           <a:xfrm>
-            <a:off x="4648200" y="1600200"/>
-            <a:ext cx="4038600" cy="4525963"/>
+            <a:off x="6172200" y="1825625"/>
+            <a:ext cx="5181600" cy="4351338"/>
           </a:xfrm>
         </p:spPr>
         <p:txBody>
           <a:bodyPr/>
-          <a:lstStyle>
-            <a:lvl1pPr>
-              <a:defRPr sz="2800"/>
-            </a:lvl1pPr>
-            <a:lvl2pPr>
-              <a:defRPr sz="2400"/>
-            </a:lvl2pPr>
-            <a:lvl3pPr>
-              <a:defRPr sz="2000"/>
-            </a:lvl3pPr>
-            <a:lvl4pPr>
-              <a:defRPr sz="1800"/>
-            </a:lvl4pPr>
-            <a:lvl5pPr>
-              <a:defRPr sz="1800"/>
-            </a:lvl5pPr>
-            <a:lvl6pPr>
-              <a:defRPr sz="1800"/>
-            </a:lvl6pPr>
-            <a:lvl7pPr>
-              <a:defRPr sz="1800"/>
-            </a:lvl7pPr>
-            <a:lvl8pPr>
-              <a:defRPr sz="1800"/>
-            </a:lvl8pPr>
-            <a:lvl9pPr>
-              <a:defRPr sz="1800"/>
-            </a:lvl9pPr>
-          </a:lstStyle>
+          <a:lstStyle/>
           <a:p>
             <a:pPr lvl="0"/>
             <a:r>
               <a:rPr lang="fr-FR" smtClean="0"/>
-              <a:t>Cliquez pour modifier les styles du texte du masque</a:t>
+              <a:t>Modifiez les styles du texte du masque</a:t>
             </a:r>
           </a:p>
           <a:p>
@@ -1344,10 +1245,9 @@
           <a:bodyPr/>
           <a:lstStyle/>
           <a:p>
-            <a:fld id="{1C1C05D9-AF43-423E-A535-1456FBFB6486}" type="datetimeFigureOut">
-              <a:rPr lang="fr-FR" smtClean="0"/>
-              <a:pPr/>
-              <a:t>12/01/2025</a:t>
+            <a:fld id="{33E46DBA-FA3B-4C5F-B700-4671668DAB72}" type="datetimeFigureOut">
+              <a:rPr lang="fr-FR" smtClean="0"/>
+              <a:t>15/01/2025</a:t>
             </a:fld>
             <a:endParaRPr lang="fr-FR"/>
           </a:p>
@@ -1387,9 +1287,8 @@
           <a:bodyPr/>
           <a:lstStyle/>
           <a:p>
-            <a:fld id="{1C6B4844-727D-467B-8934-26551CF16DC6}" type="slidenum">
-              <a:rPr lang="fr-FR" smtClean="0"/>
-              <a:pPr/>
+            <a:fld id="{BB9FB400-9542-4209-8750-C58872F72AA0}" type="slidenum">
+              <a:rPr lang="fr-FR" smtClean="0"/>
               <a:t>‹N°›</a:t>
             </a:fld>
             <a:endParaRPr lang="fr-FR"/>
@@ -1397,6 +1296,11 @@
         </p:txBody>
       </p:sp>
     </p:spTree>
+    <p:extLst>
+      <p:ext uri="{BB962C8B-B14F-4D97-AF65-F5344CB8AC3E}">
+        <p14:creationId xmlns:p14="http://schemas.microsoft.com/office/powerpoint/2010/main" val="3538557043"/>
+      </p:ext>
+    </p:extLst>
   </p:cSld>
   <p:clrMapOvr>
     <a:masterClrMapping/>
@@ -1431,37 +1335,38 @@
             <p:ph type="title"/>
           </p:nvPr>
         </p:nvSpPr>
-        <p:spPr/>
-        <p:txBody>
-          <a:bodyPr/>
-          <a:lstStyle>
-            <a:lvl1pPr>
-              <a:defRPr/>
-            </a:lvl1pPr>
-          </a:lstStyle>
-          <a:p>
-            <a:r>
-              <a:rPr lang="fr-FR" smtClean="0"/>
-              <a:t>Cliquez pour modifier le style du titre</a:t>
-            </a:r>
-            <a:endParaRPr lang="fr-FR"/>
-          </a:p>
-        </p:txBody>
-      </p:sp>
-      <p:sp>
-        <p:nvSpPr>
-          <p:cNvPr id="3" name="Espace réservé du texte 2"/>
-          <p:cNvSpPr>
-            <a:spLocks noGrp="1"/>
-          </p:cNvSpPr>
-          <p:nvPr>
-            <p:ph type="body" idx="1"/>
-          </p:nvPr>
-        </p:nvSpPr>
         <p:spPr>
           <a:xfrm>
-            <a:off x="457200" y="1535113"/>
-            <a:ext cx="4040188" cy="639762"/>
+            <a:off x="839788" y="365125"/>
+            <a:ext cx="10515600" cy="1325563"/>
+          </a:xfrm>
+        </p:spPr>
+        <p:txBody>
+          <a:bodyPr/>
+          <a:lstStyle/>
+          <a:p>
+            <a:r>
+              <a:rPr lang="fr-FR" smtClean="0"/>
+              <a:t>Modifiez le style du titre</a:t>
+            </a:r>
+            <a:endParaRPr lang="fr-FR"/>
+          </a:p>
+        </p:txBody>
+      </p:sp>
+      <p:sp>
+        <p:nvSpPr>
+          <p:cNvPr id="3" name="Espace réservé du texte 2"/>
+          <p:cNvSpPr>
+            <a:spLocks noGrp="1"/>
+          </p:cNvSpPr>
+          <p:nvPr>
+            <p:ph type="body" idx="1"/>
+          </p:nvPr>
+        </p:nvSpPr>
+        <p:spPr>
+          <a:xfrm>
+            <a:off x="839788" y="1681163"/>
+            <a:ext cx="5157787" cy="823912"/>
           </a:xfrm>
         </p:spPr>
         <p:txBody>
@@ -1508,7 +1413,7 @@
             <a:pPr lvl="0"/>
             <a:r>
               <a:rPr lang="fr-FR" smtClean="0"/>
-              <a:t>Cliquez pour modifier les styles du texte du masque</a:t>
+              <a:t>Modifiez les styles du texte du masque</a:t>
             </a:r>
           </a:p>
         </p:txBody>
@@ -1525,46 +1430,18 @@
         </p:nvSpPr>
         <p:spPr>
           <a:xfrm>
-            <a:off x="457200" y="2174875"/>
-            <a:ext cx="4040188" cy="3951288"/>
+            <a:off x="839788" y="2505075"/>
+            <a:ext cx="5157787" cy="3684588"/>
           </a:xfrm>
         </p:spPr>
         <p:txBody>
           <a:bodyPr/>
-          <a:lstStyle>
-            <a:lvl1pPr>
-              <a:defRPr sz="2400"/>
-            </a:lvl1pPr>
-            <a:lvl2pPr>
-              <a:defRPr sz="2000"/>
-            </a:lvl2pPr>
-            <a:lvl3pPr>
-              <a:defRPr sz="1800"/>
-            </a:lvl3pPr>
-            <a:lvl4pPr>
-              <a:defRPr sz="1600"/>
-            </a:lvl4pPr>
-            <a:lvl5pPr>
-              <a:defRPr sz="1600"/>
-            </a:lvl5pPr>
-            <a:lvl6pPr>
-              <a:defRPr sz="1600"/>
-            </a:lvl6pPr>
-            <a:lvl7pPr>
-              <a:defRPr sz="1600"/>
-            </a:lvl7pPr>
-            <a:lvl8pPr>
-              <a:defRPr sz="1600"/>
-            </a:lvl8pPr>
-            <a:lvl9pPr>
-              <a:defRPr sz="1600"/>
-            </a:lvl9pPr>
-          </a:lstStyle>
+          <a:lstStyle/>
           <a:p>
             <a:pPr lvl="0"/>
             <a:r>
               <a:rPr lang="fr-FR" smtClean="0"/>
-              <a:t>Cliquez pour modifier les styles du texte du masque</a:t>
+              <a:t>Modifiez les styles du texte du masque</a:t>
             </a:r>
           </a:p>
           <a:p>
@@ -1610,8 +1487,8 @@
         </p:nvSpPr>
         <p:spPr>
           <a:xfrm>
-            <a:off x="4645025" y="1535113"/>
-            <a:ext cx="4041775" cy="639762"/>
+            <a:off x="6172200" y="1681163"/>
+            <a:ext cx="5183188" cy="823912"/>
           </a:xfrm>
         </p:spPr>
         <p:txBody>
@@ -1658,7 +1535,7 @@
             <a:pPr lvl="0"/>
             <a:r>
               <a:rPr lang="fr-FR" smtClean="0"/>
-              <a:t>Cliquez pour modifier les styles du texte du masque</a:t>
+              <a:t>Modifiez les styles du texte du masque</a:t>
             </a:r>
           </a:p>
         </p:txBody>
@@ -1675,46 +1552,18 @@
         </p:nvSpPr>
         <p:spPr>
           <a:xfrm>
-            <a:off x="4645025" y="2174875"/>
-            <a:ext cx="4041775" cy="3951288"/>
+            <a:off x="6172200" y="2505075"/>
+            <a:ext cx="5183188" cy="3684588"/>
           </a:xfrm>
         </p:spPr>
         <p:txBody>
           <a:bodyPr/>
-          <a:lstStyle>
-            <a:lvl1pPr>
-              <a:defRPr sz="2400"/>
-            </a:lvl1pPr>
-            <a:lvl2pPr>
-              <a:defRPr sz="2000"/>
-            </a:lvl2pPr>
-            <a:lvl3pPr>
-              <a:defRPr sz="1800"/>
-            </a:lvl3pPr>
-            <a:lvl4pPr>
-              <a:defRPr sz="1600"/>
-            </a:lvl4pPr>
-            <a:lvl5pPr>
-              <a:defRPr sz="1600"/>
-            </a:lvl5pPr>
-            <a:lvl6pPr>
-              <a:defRPr sz="1600"/>
-            </a:lvl6pPr>
-            <a:lvl7pPr>
-              <a:defRPr sz="1600"/>
-            </a:lvl7pPr>
-            <a:lvl8pPr>
-              <a:defRPr sz="1600"/>
-            </a:lvl8pPr>
-            <a:lvl9pPr>
-              <a:defRPr sz="1600"/>
-            </a:lvl9pPr>
-          </a:lstStyle>
+          <a:lstStyle/>
           <a:p>
             <a:pPr lvl="0"/>
             <a:r>
               <a:rPr lang="fr-FR" smtClean="0"/>
-              <a:t>Cliquez pour modifier les styles du texte du masque</a:t>
+              <a:t>Modifiez les styles du texte du masque</a:t>
             </a:r>
           </a:p>
           <a:p>
@@ -1763,10 +1612,9 @@
           <a:bodyPr/>
           <a:lstStyle/>
           <a:p>
-            <a:fld id="{1C1C05D9-AF43-423E-A535-1456FBFB6486}" type="datetimeFigureOut">
-              <a:rPr lang="fr-FR" smtClean="0"/>
-              <a:pPr/>
-              <a:t>12/01/2025</a:t>
+            <a:fld id="{33E46DBA-FA3B-4C5F-B700-4671668DAB72}" type="datetimeFigureOut">
+              <a:rPr lang="fr-FR" smtClean="0"/>
+              <a:t>15/01/2025</a:t>
             </a:fld>
             <a:endParaRPr lang="fr-FR"/>
           </a:p>
@@ -1806,9 +1654,8 @@
           <a:bodyPr/>
           <a:lstStyle/>
           <a:p>
-            <a:fld id="{1C6B4844-727D-467B-8934-26551CF16DC6}" type="slidenum">
-              <a:rPr lang="fr-FR" smtClean="0"/>
-              <a:pPr/>
+            <a:fld id="{BB9FB400-9542-4209-8750-C58872F72AA0}" type="slidenum">
+              <a:rPr lang="fr-FR" smtClean="0"/>
               <a:t>‹N°›</a:t>
             </a:fld>
             <a:endParaRPr lang="fr-FR"/>
@@ -1816,6 +1663,11 @@
         </p:txBody>
       </p:sp>
     </p:spTree>
+    <p:extLst>
+      <p:ext uri="{BB962C8B-B14F-4D97-AF65-F5344CB8AC3E}">
+        <p14:creationId xmlns:p14="http://schemas.microsoft.com/office/powerpoint/2010/main" val="3290088959"/>
+      </p:ext>
+    </p:extLst>
   </p:cSld>
   <p:clrMapOvr>
     <a:masterClrMapping/>
@@ -1857,7 +1709,7 @@
           <a:p>
             <a:r>
               <a:rPr lang="fr-FR" smtClean="0"/>
-              <a:t>Cliquez pour modifier le style du titre</a:t>
+              <a:t>Modifiez le style du titre</a:t>
             </a:r>
             <a:endParaRPr lang="fr-FR"/>
           </a:p>
@@ -1878,10 +1730,9 @@
           <a:bodyPr/>
           <a:lstStyle/>
           <a:p>
-            <a:fld id="{1C1C05D9-AF43-423E-A535-1456FBFB6486}" type="datetimeFigureOut">
-              <a:rPr lang="fr-FR" smtClean="0"/>
-              <a:pPr/>
-              <a:t>12/01/2025</a:t>
+            <a:fld id="{33E46DBA-FA3B-4C5F-B700-4671668DAB72}" type="datetimeFigureOut">
+              <a:rPr lang="fr-FR" smtClean="0"/>
+              <a:t>15/01/2025</a:t>
             </a:fld>
             <a:endParaRPr lang="fr-FR"/>
           </a:p>
@@ -1921,9 +1772,8 @@
           <a:bodyPr/>
           <a:lstStyle/>
           <a:p>
-            <a:fld id="{1C6B4844-727D-467B-8934-26551CF16DC6}" type="slidenum">
-              <a:rPr lang="fr-FR" smtClean="0"/>
-              <a:pPr/>
+            <a:fld id="{BB9FB400-9542-4209-8750-C58872F72AA0}" type="slidenum">
+              <a:rPr lang="fr-FR" smtClean="0"/>
               <a:t>‹N°›</a:t>
             </a:fld>
             <a:endParaRPr lang="fr-FR"/>
@@ -1931,6 +1781,11 @@
         </p:txBody>
       </p:sp>
     </p:spTree>
+    <p:extLst>
+      <p:ext uri="{BB962C8B-B14F-4D97-AF65-F5344CB8AC3E}">
+        <p14:creationId xmlns:p14="http://schemas.microsoft.com/office/powerpoint/2010/main" val="1514612728"/>
+      </p:ext>
+    </p:extLst>
   </p:cSld>
   <p:clrMapOvr>
     <a:masterClrMapping/>
@@ -1970,10 +1825,9 @@
           <a:bodyPr/>
           <a:lstStyle/>
           <a:p>
-            <a:fld id="{1C1C05D9-AF43-423E-A535-1456FBFB6486}" type="datetimeFigureOut">
-              <a:rPr lang="fr-FR" smtClean="0"/>
-              <a:pPr/>
-              <a:t>12/01/2025</a:t>
+            <a:fld id="{33E46DBA-FA3B-4C5F-B700-4671668DAB72}" type="datetimeFigureOut">
+              <a:rPr lang="fr-FR" smtClean="0"/>
+              <a:t>15/01/2025</a:t>
             </a:fld>
             <a:endParaRPr lang="fr-FR"/>
           </a:p>
@@ -2013,9 +1867,8 @@
           <a:bodyPr/>
           <a:lstStyle/>
           <a:p>
-            <a:fld id="{1C6B4844-727D-467B-8934-26551CF16DC6}" type="slidenum">
-              <a:rPr lang="fr-FR" smtClean="0"/>
-              <a:pPr/>
+            <a:fld id="{BB9FB400-9542-4209-8750-C58872F72AA0}" type="slidenum">
+              <a:rPr lang="fr-FR" smtClean="0"/>
               <a:t>‹N°›</a:t>
             </a:fld>
             <a:endParaRPr lang="fr-FR"/>
@@ -2023,6 +1876,11 @@
         </p:txBody>
       </p:sp>
     </p:spTree>
+    <p:extLst>
+      <p:ext uri="{BB962C8B-B14F-4D97-AF65-F5344CB8AC3E}">
+        <p14:creationId xmlns:p14="http://schemas.microsoft.com/office/powerpoint/2010/main" val="2011213339"/>
+      </p:ext>
+    </p:extLst>
   </p:cSld>
   <p:clrMapOvr>
     <a:masterClrMapping/>
@@ -2059,21 +1917,21 @@
         </p:nvSpPr>
         <p:spPr>
           <a:xfrm>
-            <a:off x="457200" y="273050"/>
-            <a:ext cx="3008313" cy="1162050"/>
+            <a:off x="839788" y="457200"/>
+            <a:ext cx="3932237" cy="1600200"/>
           </a:xfrm>
         </p:spPr>
         <p:txBody>
           <a:bodyPr anchor="b"/>
           <a:lstStyle>
-            <a:lvl1pPr algn="l">
-              <a:defRPr sz="2000" b="1"/>
+            <a:lvl1pPr>
+              <a:defRPr sz="3200"/>
             </a:lvl1pPr>
           </a:lstStyle>
           <a:p>
             <a:r>
               <a:rPr lang="fr-FR" smtClean="0"/>
-              <a:t>Cliquez pour modifier le style du titre</a:t>
+              <a:t>Modifiez le style du titre</a:t>
             </a:r>
             <a:endParaRPr lang="fr-FR"/>
           </a:p>
@@ -2091,8 +1949,8 @@
         </p:nvSpPr>
         <p:spPr>
           <a:xfrm>
-            <a:off x="3575050" y="273050"/>
-            <a:ext cx="5111750" cy="5853113"/>
+            <a:off x="5183188" y="987425"/>
+            <a:ext cx="6172200" cy="4873625"/>
           </a:xfrm>
         </p:spPr>
         <p:txBody>
@@ -2130,7 +1988,7 @@
             <a:pPr lvl="0"/>
             <a:r>
               <a:rPr lang="fr-FR" smtClean="0"/>
-              <a:t>Cliquez pour modifier les styles du texte du masque</a:t>
+              <a:t>Modifiez les styles du texte du masque</a:t>
             </a:r>
           </a:p>
           <a:p>
@@ -2176,8 +2034,8 @@
         </p:nvSpPr>
         <p:spPr>
           <a:xfrm>
-            <a:off x="457200" y="1435100"/>
-            <a:ext cx="3008313" cy="4691063"/>
+            <a:off x="839788" y="2057400"/>
+            <a:ext cx="3932237" cy="3811588"/>
           </a:xfrm>
         </p:spPr>
         <p:txBody>
@@ -2185,46 +2043,46 @@
           <a:lstStyle>
             <a:lvl1pPr marL="0" indent="0">
               <a:buNone/>
-              <a:defRPr sz="1400"/>
+              <a:defRPr sz="1600"/>
             </a:lvl1pPr>
             <a:lvl2pPr marL="457200" indent="0">
               <a:buNone/>
-              <a:defRPr sz="1200"/>
+              <a:defRPr sz="1400"/>
             </a:lvl2pPr>
             <a:lvl3pPr marL="914400" indent="0">
               <a:buNone/>
-              <a:defRPr sz="1000"/>
+              <a:defRPr sz="1200"/>
             </a:lvl3pPr>
             <a:lvl4pPr marL="1371600" indent="0">
               <a:buNone/>
-              <a:defRPr sz="900"/>
+              <a:defRPr sz="1000"/>
             </a:lvl4pPr>
             <a:lvl5pPr marL="1828800" indent="0">
               <a:buNone/>
-              <a:defRPr sz="900"/>
+              <a:defRPr sz="1000"/>
             </a:lvl5pPr>
             <a:lvl6pPr marL="2286000" indent="0">
               <a:buNone/>
-              <a:defRPr sz="900"/>
+              <a:defRPr sz="1000"/>
             </a:lvl6pPr>
             <a:lvl7pPr marL="2743200" indent="0">
               <a:buNone/>
-              <a:defRPr sz="900"/>
+              <a:defRPr sz="1000"/>
             </a:lvl7pPr>
             <a:lvl8pPr marL="3200400" indent="0">
               <a:buNone/>
-              <a:defRPr sz="900"/>
+              <a:defRPr sz="1000"/>
             </a:lvl8pPr>
             <a:lvl9pPr marL="3657600" indent="0">
               <a:buNone/>
-              <a:defRPr sz="900"/>
+              <a:defRPr sz="1000"/>
             </a:lvl9pPr>
           </a:lstStyle>
           <a:p>
             <a:pPr lvl="0"/>
             <a:r>
               <a:rPr lang="fr-FR" smtClean="0"/>
-              <a:t>Cliquez pour modifier les styles du texte du masque</a:t>
+              <a:t>Modifiez les styles du texte du masque</a:t>
             </a:r>
           </a:p>
         </p:txBody>
@@ -2244,10 +2102,9 @@
           <a:bodyPr/>
           <a:lstStyle/>
           <a:p>
-            <a:fld id="{1C1C05D9-AF43-423E-A535-1456FBFB6486}" type="datetimeFigureOut">
-              <a:rPr lang="fr-FR" smtClean="0"/>
-              <a:pPr/>
-              <a:t>12/01/2025</a:t>
+            <a:fld id="{33E46DBA-FA3B-4C5F-B700-4671668DAB72}" type="datetimeFigureOut">
+              <a:rPr lang="fr-FR" smtClean="0"/>
+              <a:t>15/01/2025</a:t>
             </a:fld>
             <a:endParaRPr lang="fr-FR"/>
           </a:p>
@@ -2287,9 +2144,8 @@
           <a:bodyPr/>
           <a:lstStyle/>
           <a:p>
-            <a:fld id="{1C6B4844-727D-467B-8934-26551CF16DC6}" type="slidenum">
-              <a:rPr lang="fr-FR" smtClean="0"/>
-              <a:pPr/>
+            <a:fld id="{BB9FB400-9542-4209-8750-C58872F72AA0}" type="slidenum">
+              <a:rPr lang="fr-FR" smtClean="0"/>
               <a:t>‹N°›</a:t>
             </a:fld>
             <a:endParaRPr lang="fr-FR"/>
@@ -2297,6 +2153,11 @@
         </p:txBody>
       </p:sp>
     </p:spTree>
+    <p:extLst>
+      <p:ext uri="{BB962C8B-B14F-4D97-AF65-F5344CB8AC3E}">
+        <p14:creationId xmlns:p14="http://schemas.microsoft.com/office/powerpoint/2010/main" val="3682540021"/>
+      </p:ext>
+    </p:extLst>
   </p:cSld>
   <p:clrMapOvr>
     <a:masterClrMapping/>
@@ -2333,21 +2194,21 @@
         </p:nvSpPr>
         <p:spPr>
           <a:xfrm>
-            <a:off x="1792288" y="4800600"/>
-            <a:ext cx="5486400" cy="566738"/>
+            <a:off x="839788" y="457200"/>
+            <a:ext cx="3932237" cy="1600200"/>
           </a:xfrm>
         </p:spPr>
         <p:txBody>
           <a:bodyPr anchor="b"/>
           <a:lstStyle>
-            <a:lvl1pPr algn="l">
-              <a:defRPr sz="2000" b="1"/>
+            <a:lvl1pPr>
+              <a:defRPr sz="3200"/>
             </a:lvl1pPr>
           </a:lstStyle>
           <a:p>
             <a:r>
               <a:rPr lang="fr-FR" smtClean="0"/>
-              <a:t>Cliquez pour modifier le style du titre</a:t>
+              <a:t>Modifiez le style du titre</a:t>
             </a:r>
             <a:endParaRPr lang="fr-FR"/>
           </a:p>
@@ -2365,8 +2226,8 @@
         </p:nvSpPr>
         <p:spPr>
           <a:xfrm>
-            <a:off x="1792288" y="612775"/>
-            <a:ext cx="5486400" cy="4114800"/>
+            <a:off x="5183188" y="987425"/>
+            <a:ext cx="6172200" cy="4873625"/>
           </a:xfrm>
         </p:spPr>
         <p:txBody>
@@ -2426,8 +2287,8 @@
         </p:nvSpPr>
         <p:spPr>
           <a:xfrm>
-            <a:off x="1792288" y="5367338"/>
-            <a:ext cx="5486400" cy="804862"/>
+            <a:off x="839788" y="2057400"/>
+            <a:ext cx="3932237" cy="3811588"/>
           </a:xfrm>
         </p:spPr>
         <p:txBody>
@@ -2435,46 +2296,46 @@
           <a:lstStyle>
             <a:lvl1pPr marL="0" indent="0">
               <a:buNone/>
-              <a:defRPr sz="1400"/>
+              <a:defRPr sz="1600"/>
             </a:lvl1pPr>
             <a:lvl2pPr marL="457200" indent="0">
               <a:buNone/>
-              <a:defRPr sz="1200"/>
+              <a:defRPr sz="1400"/>
             </a:lvl2pPr>
             <a:lvl3pPr marL="914400" indent="0">
               <a:buNone/>
-              <a:defRPr sz="1000"/>
+              <a:defRPr sz="1200"/>
             </a:lvl3pPr>
             <a:lvl4pPr marL="1371600" indent="0">
               <a:buNone/>
-              <a:defRPr sz="900"/>
+              <a:defRPr sz="1000"/>
             </a:lvl4pPr>
             <a:lvl5pPr marL="1828800" indent="0">
               <a:buNone/>
-              <a:defRPr sz="900"/>
+              <a:defRPr sz="1000"/>
             </a:lvl5pPr>
             <a:lvl6pPr marL="2286000" indent="0">
               <a:buNone/>
-              <a:defRPr sz="900"/>
+              <a:defRPr sz="1000"/>
             </a:lvl6pPr>
             <a:lvl7pPr marL="2743200" indent="0">
               <a:buNone/>
-              <a:defRPr sz="900"/>
+              <a:defRPr sz="1000"/>
             </a:lvl7pPr>
             <a:lvl8pPr marL="3200400" indent="0">
               <a:buNone/>
-              <a:defRPr sz="900"/>
+              <a:defRPr sz="1000"/>
             </a:lvl8pPr>
             <a:lvl9pPr marL="3657600" indent="0">
               <a:buNone/>
-              <a:defRPr sz="900"/>
+              <a:defRPr sz="1000"/>
             </a:lvl9pPr>
           </a:lstStyle>
           <a:p>
             <a:pPr lvl="0"/>
             <a:r>
               <a:rPr lang="fr-FR" smtClean="0"/>
-              <a:t>Cliquez pour modifier les styles du texte du masque</a:t>
+              <a:t>Modifiez les styles du texte du masque</a:t>
             </a:r>
           </a:p>
         </p:txBody>
@@ -2494,10 +2355,9 @@
           <a:bodyPr/>
           <a:lstStyle/>
           <a:p>
-            <a:fld id="{1C1C05D9-AF43-423E-A535-1456FBFB6486}" type="datetimeFigureOut">
-              <a:rPr lang="fr-FR" smtClean="0"/>
-              <a:pPr/>
-              <a:t>12/01/2025</a:t>
+            <a:fld id="{33E46DBA-FA3B-4C5F-B700-4671668DAB72}" type="datetimeFigureOut">
+              <a:rPr lang="fr-FR" smtClean="0"/>
+              <a:t>15/01/2025</a:t>
             </a:fld>
             <a:endParaRPr lang="fr-FR"/>
           </a:p>
@@ -2537,9 +2397,8 @@
           <a:bodyPr/>
           <a:lstStyle/>
           <a:p>
-            <a:fld id="{1C6B4844-727D-467B-8934-26551CF16DC6}" type="slidenum">
-              <a:rPr lang="fr-FR" smtClean="0"/>
-              <a:pPr/>
+            <a:fld id="{BB9FB400-9542-4209-8750-C58872F72AA0}" type="slidenum">
+              <a:rPr lang="fr-FR" smtClean="0"/>
               <a:t>‹N°›</a:t>
             </a:fld>
             <a:endParaRPr lang="fr-FR"/>
@@ -2547,6 +2406,11 @@
         </p:txBody>
       </p:sp>
     </p:spTree>
+    <p:extLst>
+      <p:ext uri="{BB962C8B-B14F-4D97-AF65-F5344CB8AC3E}">
+        <p14:creationId xmlns:p14="http://schemas.microsoft.com/office/powerpoint/2010/main" val="3624859994"/>
+      </p:ext>
+    </p:extLst>
   </p:cSld>
   <p:clrMapOvr>
     <a:masterClrMapping/>
@@ -2588,8 +2452,8 @@
         </p:nvSpPr>
         <p:spPr>
           <a:xfrm>
-            <a:off x="457200" y="274638"/>
-            <a:ext cx="8229600" cy="1143000"/>
+            <a:off x="838200" y="365125"/>
+            <a:ext cx="10515600" cy="1325563"/>
           </a:xfrm>
           <a:prstGeom prst="rect">
             <a:avLst/>
@@ -2603,7 +2467,7 @@
           <a:p>
             <a:r>
               <a:rPr lang="fr-FR" smtClean="0"/>
-              <a:t>Cliquez pour modifier le style du titre</a:t>
+              <a:t>Modifiez le style du titre</a:t>
             </a:r>
             <a:endParaRPr lang="fr-FR"/>
           </a:p>
@@ -2621,8 +2485,8 @@
         </p:nvSpPr>
         <p:spPr>
           <a:xfrm>
-            <a:off x="457200" y="1600200"/>
-            <a:ext cx="8229600" cy="4525963"/>
+            <a:off x="838200" y="1825625"/>
+            <a:ext cx="10515600" cy="4351338"/>
           </a:xfrm>
           <a:prstGeom prst="rect">
             <a:avLst/>
@@ -2637,7 +2501,7 @@
             <a:pPr lvl="0"/>
             <a:r>
               <a:rPr lang="fr-FR" smtClean="0"/>
-              <a:t>Cliquez pour modifier les styles du texte du masque</a:t>
+              <a:t>Modifiez les styles du texte du masque</a:t>
             </a:r>
           </a:p>
           <a:p>
@@ -2683,8 +2547,8 @@
         </p:nvSpPr>
         <p:spPr>
           <a:xfrm>
-            <a:off x="457200" y="6356350"/>
-            <a:ext cx="2133600" cy="365125"/>
+            <a:off x="838200" y="6356350"/>
+            <a:ext cx="2743200" cy="365125"/>
           </a:xfrm>
           <a:prstGeom prst="rect">
             <a:avLst/>
@@ -2704,10 +2568,9 @@
             </a:lvl1pPr>
           </a:lstStyle>
           <a:p>
-            <a:fld id="{1C1C05D9-AF43-423E-A535-1456FBFB6486}" type="datetimeFigureOut">
-              <a:rPr lang="fr-FR" smtClean="0"/>
-              <a:pPr/>
-              <a:t>12/01/2025</a:t>
+            <a:fld id="{33E46DBA-FA3B-4C5F-B700-4671668DAB72}" type="datetimeFigureOut">
+              <a:rPr lang="fr-FR" smtClean="0"/>
+              <a:t>15/01/2025</a:t>
             </a:fld>
             <a:endParaRPr lang="fr-FR"/>
           </a:p>
@@ -2725,8 +2588,8 @@
         </p:nvSpPr>
         <p:spPr>
           <a:xfrm>
-            <a:off x="3124200" y="6356350"/>
-            <a:ext cx="2895600" cy="365125"/>
+            <a:off x="4038600" y="6356350"/>
+            <a:ext cx="4114800" cy="365125"/>
           </a:xfrm>
           <a:prstGeom prst="rect">
             <a:avLst/>
@@ -2762,8 +2625,8 @@
         </p:nvSpPr>
         <p:spPr>
           <a:xfrm>
-            <a:off x="6553200" y="6356350"/>
-            <a:ext cx="2133600" cy="365125"/>
+            <a:off x="8610600" y="6356350"/>
+            <a:ext cx="2743200" cy="365125"/>
           </a:xfrm>
           <a:prstGeom prst="rect">
             <a:avLst/>
@@ -2783,9 +2646,8 @@
             </a:lvl1pPr>
           </a:lstStyle>
           <a:p>
-            <a:fld id="{1C6B4844-727D-467B-8934-26551CF16DC6}" type="slidenum">
-              <a:rPr lang="fr-FR" smtClean="0"/>
-              <a:pPr/>
+            <a:fld id="{BB9FB400-9542-4209-8750-C58872F72AA0}" type="slidenum">
+              <a:rPr lang="fr-FR" smtClean="0"/>
               <a:t>‹N°›</a:t>
             </a:fld>
             <a:endParaRPr lang="fr-FR"/>
@@ -2793,6 +2655,11 @@
         </p:txBody>
       </p:sp>
     </p:spTree>
+    <p:extLst>
+      <p:ext uri="{BB962C8B-B14F-4D97-AF65-F5344CB8AC3E}">
+        <p14:creationId xmlns:p14="http://schemas.microsoft.com/office/powerpoint/2010/main" val="1950864033"/>
+      </p:ext>
+    </p:extLst>
   </p:cSld>
   <p:clrMap bg1="lt1" tx1="dk1" bg2="lt2" tx2="dk2" accent1="accent1" accent2="accent2" accent3="accent3" accent4="accent4" accent5="accent5" accent6="accent6" hlink="hlink" folHlink="folHlink"/>
   <p:sldLayoutIdLst>
@@ -2810,7 +2677,10 @@
   </p:sldLayoutIdLst>
   <p:txStyles>
     <p:titleStyle>
-      <a:lvl1pPr algn="ctr" defTabSz="914400" rtl="0" eaLnBrk="1" latinLnBrk="0" hangingPunct="1">
+      <a:lvl1pPr algn="l" defTabSz="914400" rtl="0" eaLnBrk="1" latinLnBrk="0" hangingPunct="1">
+        <a:lnSpc>
+          <a:spcPct val="90000"/>
+        </a:lnSpc>
         <a:spcBef>
           <a:spcPct val="0"/>
         </a:spcBef>
@@ -2826,13 +2696,16 @@
       </a:lvl1pPr>
     </p:titleStyle>
     <p:bodyStyle>
-      <a:lvl1pPr marL="342900" indent="-342900" algn="l" defTabSz="914400" rtl="0" eaLnBrk="1" latinLnBrk="0" hangingPunct="1">
+      <a:lvl1pPr marL="228600" indent="-228600" algn="l" defTabSz="914400" rtl="0" eaLnBrk="1" latinLnBrk="0" hangingPunct="1">
+        <a:lnSpc>
+          <a:spcPct val="90000"/>
+        </a:lnSpc>
         <a:spcBef>
-          <a:spcPct val="20000"/>
+          <a:spcPts val="1000"/>
         </a:spcBef>
-        <a:buFont typeface="Arial" pitchFamily="34" charset="0"/>
+        <a:buFont typeface="Arial" panose="020B0604020202020204" pitchFamily="34" charset="0"/>
         <a:buChar char="•"/>
-        <a:defRPr sz="3200" kern="1200">
+        <a:defRPr sz="2800" kern="1200">
           <a:solidFill>
             <a:schemeClr val="tx1"/>
           </a:solidFill>
@@ -2841,13 +2714,16 @@
           <a:cs typeface="+mn-cs"/>
         </a:defRPr>
       </a:lvl1pPr>
-      <a:lvl2pPr marL="742950" indent="-285750" algn="l" defTabSz="914400" rtl="0" eaLnBrk="1" latinLnBrk="0" hangingPunct="1">
+      <a:lvl2pPr marL="685800" indent="-228600" algn="l" defTabSz="914400" rtl="0" eaLnBrk="1" latinLnBrk="0" hangingPunct="1">
+        <a:lnSpc>
+          <a:spcPct val="90000"/>
+        </a:lnSpc>
         <a:spcBef>
-          <a:spcPct val="20000"/>
+          <a:spcPts val="500"/>
         </a:spcBef>
-        <a:buFont typeface="Arial" pitchFamily="34" charset="0"/>
-        <a:buChar char="–"/>
-        <a:defRPr sz="2800" kern="1200">
+        <a:buFont typeface="Arial" panose="020B0604020202020204" pitchFamily="34" charset="0"/>
+        <a:buChar char="•"/>
+        <a:defRPr sz="2400" kern="1200">
           <a:solidFill>
             <a:schemeClr val="tx1"/>
           </a:solidFill>
@@ -2857,12 +2733,15 @@
         </a:defRPr>
       </a:lvl2pPr>
       <a:lvl3pPr marL="1143000" indent="-228600" algn="l" defTabSz="914400" rtl="0" eaLnBrk="1" latinLnBrk="0" hangingPunct="1">
+        <a:lnSpc>
+          <a:spcPct val="90000"/>
+        </a:lnSpc>
         <a:spcBef>
-          <a:spcPct val="20000"/>
+          <a:spcPts val="500"/>
         </a:spcBef>
-        <a:buFont typeface="Arial" pitchFamily="34" charset="0"/>
+        <a:buFont typeface="Arial" panose="020B0604020202020204" pitchFamily="34" charset="0"/>
         <a:buChar char="•"/>
-        <a:defRPr sz="2400" kern="1200">
+        <a:defRPr sz="2000" kern="1200">
           <a:solidFill>
             <a:schemeClr val="tx1"/>
           </a:solidFill>
@@ -2872,12 +2751,15 @@
         </a:defRPr>
       </a:lvl3pPr>
       <a:lvl4pPr marL="1600200" indent="-228600" algn="l" defTabSz="914400" rtl="0" eaLnBrk="1" latinLnBrk="0" hangingPunct="1">
+        <a:lnSpc>
+          <a:spcPct val="90000"/>
+        </a:lnSpc>
         <a:spcBef>
-          <a:spcPct val="20000"/>
+          <a:spcPts val="500"/>
         </a:spcBef>
-        <a:buFont typeface="Arial" pitchFamily="34" charset="0"/>
-        <a:buChar char="–"/>
-        <a:defRPr sz="2000" kern="1200">
+        <a:buFont typeface="Arial" panose="020B0604020202020204" pitchFamily="34" charset="0"/>
+        <a:buChar char="•"/>
+        <a:defRPr sz="1800" kern="1200">
           <a:solidFill>
             <a:schemeClr val="tx1"/>
           </a:solidFill>
@@ -2887,12 +2769,15 @@
         </a:defRPr>
       </a:lvl4pPr>
       <a:lvl5pPr marL="2057400" indent="-228600" algn="l" defTabSz="914400" rtl="0" eaLnBrk="1" latinLnBrk="0" hangingPunct="1">
+        <a:lnSpc>
+          <a:spcPct val="90000"/>
+        </a:lnSpc>
         <a:spcBef>
-          <a:spcPct val="20000"/>
+          <a:spcPts val="500"/>
         </a:spcBef>
-        <a:buFont typeface="Arial" pitchFamily="34" charset="0"/>
-        <a:buChar char="»"/>
-        <a:defRPr sz="2000" kern="1200">
+        <a:buFont typeface="Arial" panose="020B0604020202020204" pitchFamily="34" charset="0"/>
+        <a:buChar char="•"/>
+        <a:defRPr sz="1800" kern="1200">
           <a:solidFill>
             <a:schemeClr val="tx1"/>
           </a:solidFill>
@@ -2902,12 +2787,15 @@
         </a:defRPr>
       </a:lvl5pPr>
       <a:lvl6pPr marL="2514600" indent="-228600" algn="l" defTabSz="914400" rtl="0" eaLnBrk="1" latinLnBrk="0" hangingPunct="1">
+        <a:lnSpc>
+          <a:spcPct val="90000"/>
+        </a:lnSpc>
         <a:spcBef>
-          <a:spcPct val="20000"/>
+          <a:spcPts val="500"/>
         </a:spcBef>
-        <a:buFont typeface="Arial" pitchFamily="34" charset="0"/>
+        <a:buFont typeface="Arial" panose="020B0604020202020204" pitchFamily="34" charset="0"/>
         <a:buChar char="•"/>
-        <a:defRPr sz="2000" kern="1200">
+        <a:defRPr sz="1800" kern="1200">
           <a:solidFill>
             <a:schemeClr val="tx1"/>
           </a:solidFill>
@@ -2917,12 +2805,15 @@
         </a:defRPr>
       </a:lvl6pPr>
       <a:lvl7pPr marL="2971800" indent="-228600" algn="l" defTabSz="914400" rtl="0" eaLnBrk="1" latinLnBrk="0" hangingPunct="1">
+        <a:lnSpc>
+          <a:spcPct val="90000"/>
+        </a:lnSpc>
         <a:spcBef>
-          <a:spcPct val="20000"/>
+          <a:spcPts val="500"/>
         </a:spcBef>
-        <a:buFont typeface="Arial" pitchFamily="34" charset="0"/>
+        <a:buFont typeface="Arial" panose="020B0604020202020204" pitchFamily="34" charset="0"/>
         <a:buChar char="•"/>
-        <a:defRPr sz="2000" kern="1200">
+        <a:defRPr sz="1800" kern="1200">
           <a:solidFill>
             <a:schemeClr val="tx1"/>
           </a:solidFill>
@@ -2932,12 +2823,15 @@
         </a:defRPr>
       </a:lvl7pPr>
       <a:lvl8pPr marL="3429000" indent="-228600" algn="l" defTabSz="914400" rtl="0" eaLnBrk="1" latinLnBrk="0" hangingPunct="1">
+        <a:lnSpc>
+          <a:spcPct val="90000"/>
+        </a:lnSpc>
         <a:spcBef>
-          <a:spcPct val="20000"/>
+          <a:spcPts val="500"/>
         </a:spcBef>
-        <a:buFont typeface="Arial" pitchFamily="34" charset="0"/>
+        <a:buFont typeface="Arial" panose="020B0604020202020204" pitchFamily="34" charset="0"/>
         <a:buChar char="•"/>
-        <a:defRPr sz="2000" kern="1200">
+        <a:defRPr sz="1800" kern="1200">
           <a:solidFill>
             <a:schemeClr val="tx1"/>
           </a:solidFill>
@@ -2947,12 +2841,15 @@
         </a:defRPr>
       </a:lvl8pPr>
       <a:lvl9pPr marL="3886200" indent="-228600" algn="l" defTabSz="914400" rtl="0" eaLnBrk="1" latinLnBrk="0" hangingPunct="1">
+        <a:lnSpc>
+          <a:spcPct val="90000"/>
+        </a:lnSpc>
         <a:spcBef>
-          <a:spcPct val="20000"/>
+          <a:spcPts val="500"/>
         </a:spcBef>
-        <a:buFont typeface="Arial" pitchFamily="34" charset="0"/>
+        <a:buFont typeface="Arial" panose="020B0604020202020204" pitchFamily="34" charset="0"/>
         <a:buChar char="•"/>
-        <a:defRPr sz="2000" kern="1200">
+        <a:defRPr sz="1800" kern="1200">
           <a:solidFill>
             <a:schemeClr val="tx1"/>
           </a:solidFill>
@@ -3080,122 +2977,534 @@
       </p:grpSpPr>
       <p:sp>
         <p:nvSpPr>
-          <p:cNvPr id="2" name="Titre 1"/>
-          <p:cNvSpPr>
-            <a:spLocks noGrp="1"/>
-          </p:cNvSpPr>
-          <p:nvPr>
-            <p:ph type="ctrTitle"/>
-          </p:nvPr>
+          <p:cNvPr id="5" name="ZoneTexte 4"/>
+          <p:cNvSpPr txBox="1"/>
+          <p:nvPr/>
         </p:nvSpPr>
         <p:spPr>
           <a:xfrm>
-            <a:off x="563833" y="1268760"/>
-            <a:ext cx="7772400" cy="864096"/>
+            <a:off x="1714125" y="1236494"/>
+            <a:ext cx="9877754" cy="646331"/>
           </a:xfrm>
+          <a:prstGeom prst="rect">
+            <a:avLst/>
+          </a:prstGeom>
+          <a:noFill/>
         </p:spPr>
         <p:txBody>
-          <a:bodyPr>
-            <a:normAutofit/>
+          <a:bodyPr wrap="square" rtlCol="0">
+            <a:spAutoFit/>
           </a:bodyPr>
           <a:lstStyle/>
           <a:p>
-            <a:pPr marL="742950" indent="-742950" algn="r" rtl="1">
+            <a:pPr marL="685800" lvl="0" indent="-685800" algn="r" rtl="1">
               <a:buFont typeface="Wingdings" panose="05000000000000000000" pitchFamily="2" charset="2"/>
-              <a:buChar char="Ø"/>
+              <a:buChar char="ü"/>
             </a:pPr>
             <a:r>
-              <a:rPr lang="ar-SA" dirty="0" smtClean="0"/>
-              <a:t>ما </a:t>
-            </a:r>
-            <a:r>
-              <a:rPr lang="ar-SA" dirty="0"/>
-              <a:t>هو نظام تشغيل الحواسيب </a:t>
-            </a:r>
-            <a:r>
-              <a:rPr lang="ar-SA" dirty="0" smtClean="0"/>
-              <a:t>؟</a:t>
-            </a:r>
-            <a:endParaRPr lang="fr-FR" b="1" dirty="0"/>
-          </a:p>
-        </p:txBody>
-      </p:sp>
-      <p:sp>
-        <p:nvSpPr>
-          <p:cNvPr id="9" name="Titre 1"/>
-          <p:cNvSpPr txBox="1">
-            <a:spLocks/>
-          </p:cNvSpPr>
+              <a:rPr lang="ar-SA" sz="3600" dirty="0"/>
+              <a:t>ما هو نظام تشغيل الحواسيب ؟</a:t>
+            </a:r>
+            <a:endParaRPr lang="ar-DZ" sz="3600" dirty="0" smtClean="0"/>
+          </a:p>
+        </p:txBody>
+      </p:sp>
+      <p:sp>
+        <p:nvSpPr>
+          <p:cNvPr id="7" name="ZoneTexte 6"/>
+          <p:cNvSpPr txBox="1"/>
           <p:nvPr/>
         </p:nvSpPr>
         <p:spPr>
           <a:xfrm>
-            <a:off x="563833" y="2857672"/>
-            <a:ext cx="7772400" cy="715344"/>
+            <a:off x="6250486" y="213739"/>
+            <a:ext cx="5341393" cy="750975"/>
+          </a:xfrm>
+          <a:prstGeom prst="rect">
+            <a:avLst/>
+          </a:prstGeom>
+          <a:noFill/>
+        </p:spPr>
+        <p:txBody>
+          <a:bodyPr wrap="square" rtlCol="1">
+            <a:spAutoFit/>
+          </a:bodyPr>
+          <a:lstStyle/>
+          <a:p>
+            <a:pPr algn="r" rtl="1">
+              <a:lnSpc>
+                <a:spcPct val="107000"/>
+              </a:lnSpc>
+              <a:spcAft>
+                <a:spcPts val="800"/>
+              </a:spcAft>
+            </a:pPr>
+            <a:r>
+              <a:rPr lang="ar-SA" sz="4000" b="1" u="sng" dirty="0">
+                <a:solidFill>
+                  <a:srgbClr val="00B0F0"/>
+                </a:solidFill>
+              </a:rPr>
+              <a:t>تغذية راجعة :</a:t>
+            </a:r>
+            <a:endParaRPr lang="en-US" sz="4000" b="1" dirty="0">
+              <a:solidFill>
+                <a:srgbClr val="00B0F0"/>
+              </a:solidFill>
+              <a:latin typeface="Calibri" panose="020F0502020204030204" pitchFamily="34" charset="0"/>
+              <a:ea typeface="Calibri" panose="020F0502020204030204" pitchFamily="34" charset="0"/>
+              <a:cs typeface="Arial" panose="020B0604020202020204" pitchFamily="34" charset="0"/>
+            </a:endParaRPr>
+          </a:p>
+        </p:txBody>
+      </p:sp>
+      <p:sp>
+        <p:nvSpPr>
+          <p:cNvPr id="2" name="ZoneTexte 1"/>
+          <p:cNvSpPr txBox="1"/>
+          <p:nvPr/>
+        </p:nvSpPr>
+        <p:spPr>
+          <a:xfrm>
+            <a:off x="225466" y="1882825"/>
+            <a:ext cx="11366413" cy="523220"/>
+          </a:xfrm>
+          <a:prstGeom prst="rect">
+            <a:avLst/>
+          </a:prstGeom>
+          <a:noFill/>
+        </p:spPr>
+        <p:txBody>
+          <a:bodyPr wrap="square" rtlCol="1">
+            <a:spAutoFit/>
+          </a:bodyPr>
+          <a:lstStyle/>
+          <a:p>
+            <a:pPr lvl="0" algn="r" rtl="1"/>
+            <a:r>
+              <a:rPr lang="ar-DZ" sz="2800" b="1" dirty="0">
+                <a:solidFill>
+                  <a:srgbClr val="FF0000"/>
+                </a:solidFill>
+              </a:rPr>
+              <a:t>هو برنامج يسمح بتشغيل الحاسوب، و التحكم في العتاد، كما يسمح لنا بتشغيل برامج أخرى.</a:t>
+            </a:r>
+          </a:p>
+        </p:txBody>
+      </p:sp>
+      <p:sp>
+        <p:nvSpPr>
+          <p:cNvPr id="3" name="ZoneTexte 2"/>
+          <p:cNvSpPr txBox="1"/>
+          <p:nvPr/>
+        </p:nvSpPr>
+        <p:spPr>
+          <a:xfrm>
+            <a:off x="225466" y="2951142"/>
+            <a:ext cx="11366413" cy="646331"/>
+          </a:xfrm>
+          <a:prstGeom prst="rect">
+            <a:avLst/>
+          </a:prstGeom>
+          <a:noFill/>
+        </p:spPr>
+        <p:txBody>
+          <a:bodyPr wrap="square" rtlCol="1">
+            <a:spAutoFit/>
+          </a:bodyPr>
+          <a:lstStyle/>
+          <a:p>
+            <a:pPr marL="571500" lvl="0" indent="-571500" algn="r" rtl="1">
+              <a:buFont typeface="Wingdings" panose="05000000000000000000" pitchFamily="2" charset="2"/>
+              <a:buChar char="ü"/>
+            </a:pPr>
+            <a:r>
+              <a:rPr lang="ar-DZ" sz="3600" dirty="0">
+                <a:latin typeface="Times New Roman" panose="02020603050405020304" pitchFamily="18" charset="0"/>
+                <a:ea typeface="Calibri" panose="020F0502020204030204" pitchFamily="34" charset="0"/>
+              </a:rPr>
+              <a:t>أذكر أمثلة عن أنظمة التشغيل</a:t>
+            </a:r>
+            <a:endParaRPr lang="ar-DZ" sz="3600" dirty="0"/>
+          </a:p>
+        </p:txBody>
+      </p:sp>
+      <p:sp>
+        <p:nvSpPr>
+          <p:cNvPr id="6" name="Rectangle 5"/>
+          <p:cNvSpPr/>
+          <p:nvPr/>
+        </p:nvSpPr>
+        <p:spPr>
+          <a:xfrm>
+            <a:off x="1954058" y="3597473"/>
+            <a:ext cx="9637821" cy="1384995"/>
           </a:xfrm>
           <a:prstGeom prst="rect">
             <a:avLst/>
           </a:prstGeom>
         </p:spPr>
         <p:txBody>
-          <a:bodyPr vert="horz" lIns="91440" tIns="45720" rIns="91440" bIns="45720" rtlCol="0" anchor="ctr">
-            <a:normAutofit lnSpcReduction="10000"/>
+          <a:bodyPr wrap="square">
+            <a:spAutoFit/>
           </a:bodyPr>
-          <a:lstStyle>
-            <a:lvl1pPr algn="ctr" defTabSz="914400" rtl="0" eaLnBrk="1" latinLnBrk="0" hangingPunct="1">
-              <a:spcBef>
-                <a:spcPct val="0"/>
-              </a:spcBef>
-              <a:buNone/>
-              <a:defRPr sz="4400" kern="1200">
-                <a:solidFill>
-                  <a:schemeClr val="tx1"/>
-                </a:solidFill>
-                <a:latin typeface="+mj-lt"/>
-                <a:ea typeface="+mj-ea"/>
-                <a:cs typeface="+mj-cs"/>
-              </a:defRPr>
-            </a:lvl1pPr>
-          </a:lstStyle>
-          <a:p>
-            <a:pPr marL="571500" indent="-571500" algn="r" rtl="1">
-              <a:buFont typeface="Wingdings" panose="05000000000000000000" pitchFamily="2" charset="2"/>
-              <a:buChar char="Ø"/>
+          <a:lstStyle/>
+          <a:p>
+            <a:pPr marL="457200" indent="-457200" algn="r" rtl="1">
+              <a:buFontTx/>
+              <a:buChar char="-"/>
             </a:pPr>
             <a:r>
-              <a:rPr lang="ar-DZ" dirty="0" smtClean="0">
-                <a:latin typeface="Times New Roman" panose="02020603050405020304" pitchFamily="18" charset="0"/>
-                <a:ea typeface="Calibri" panose="020F0502020204030204" pitchFamily="34" charset="0"/>
-              </a:rPr>
-              <a:t>أذكر أمثلة عن أنظمة التشغيل</a:t>
-            </a:r>
-            <a:r>
-              <a:rPr lang="fr-FR" dirty="0" smtClean="0">
-                <a:latin typeface="Times New Roman" panose="02020603050405020304" pitchFamily="18" charset="0"/>
-                <a:ea typeface="Calibri" panose="020F0502020204030204" pitchFamily="34" charset="0"/>
-                <a:cs typeface="Times New Roman" panose="02020603050405020304" pitchFamily="18" charset="0"/>
-              </a:rPr>
-              <a:t>.</a:t>
-            </a:r>
-            <a:r>
-              <a:rPr lang="en-US" sz="2000" dirty="0" smtClean="0"/>
-              <a:t> </a:t>
-            </a:r>
-            <a:endParaRPr lang="fr-FR" b="1" dirty="0"/>
+              <a:rPr lang="ar-DZ" sz="2800" b="1" dirty="0">
+                <a:solidFill>
+                  <a:srgbClr val="FF0000"/>
+                </a:solidFill>
+              </a:rPr>
+              <a:t>الويندوز </a:t>
+            </a:r>
+            <a:r>
+              <a:rPr lang="fr-FR" sz="2800" b="1" dirty="0" smtClean="0">
+                <a:solidFill>
+                  <a:srgbClr val="FF0000"/>
+                </a:solidFill>
+              </a:rPr>
+              <a:t>WINDOWS     		</a:t>
+            </a:r>
+            <a:endParaRPr lang="fr-FR" sz="2800" b="1" dirty="0">
+              <a:solidFill>
+                <a:srgbClr val="FF0000"/>
+              </a:solidFill>
+            </a:endParaRPr>
+          </a:p>
+          <a:p>
+            <a:pPr marL="457200" indent="-457200" algn="r" rtl="1">
+              <a:buFontTx/>
+              <a:buChar char="-"/>
+            </a:pPr>
+            <a:r>
+              <a:rPr lang="ar-DZ" sz="2800" b="1" dirty="0">
+                <a:solidFill>
+                  <a:srgbClr val="FF0000"/>
+                </a:solidFill>
+              </a:rPr>
+              <a:t>لينكس          </a:t>
+            </a:r>
+            <a:r>
+              <a:rPr lang="ar-DZ" sz="2800" b="1" dirty="0" smtClean="0">
+                <a:solidFill>
+                  <a:srgbClr val="FF0000"/>
+                </a:solidFill>
+              </a:rPr>
+              <a:t>    </a:t>
+            </a:r>
+            <a:r>
+              <a:rPr lang="fr-FR" sz="2800" b="1" dirty="0" smtClean="0">
+                <a:solidFill>
+                  <a:srgbClr val="FF0000"/>
+                </a:solidFill>
+              </a:rPr>
+              <a:t>  LINUX</a:t>
+            </a:r>
+            <a:endParaRPr lang="fr-FR" sz="2800" b="1" dirty="0">
+              <a:solidFill>
+                <a:srgbClr val="FF0000"/>
+              </a:solidFill>
+            </a:endParaRPr>
+          </a:p>
+          <a:p>
+            <a:pPr marL="457200" indent="-457200" algn="r" rtl="1">
+              <a:buFontTx/>
+              <a:buChar char="-"/>
+            </a:pPr>
+            <a:r>
+              <a:rPr lang="ar-DZ" sz="2800" b="1" dirty="0">
+                <a:solidFill>
+                  <a:srgbClr val="FF0000"/>
+                </a:solidFill>
+              </a:rPr>
+              <a:t>ماك </a:t>
+            </a:r>
+            <a:r>
+              <a:rPr lang="fr-FR" sz="2800" b="1" dirty="0" smtClean="0">
+                <a:solidFill>
+                  <a:srgbClr val="FF0000"/>
+                </a:solidFill>
+              </a:rPr>
+              <a:t>MAC                      </a:t>
+            </a:r>
+            <a:endParaRPr lang="ar-DZ" sz="2800" b="1" dirty="0">
+              <a:solidFill>
+                <a:srgbClr val="FF0000"/>
+              </a:solidFill>
+            </a:endParaRPr>
           </a:p>
         </p:txBody>
       </p:sp>
     </p:spTree>
+    <p:extLst>
+      <p:ext uri="{BB962C8B-B14F-4D97-AF65-F5344CB8AC3E}">
+        <p14:creationId xmlns:p14="http://schemas.microsoft.com/office/powerpoint/2010/main" val="1877793641"/>
+      </p:ext>
+    </p:extLst>
   </p:cSld>
   <p:clrMapOvr>
     <a:masterClrMapping/>
   </p:clrMapOvr>
+  <mc:AlternateContent xmlns:mc="http://schemas.openxmlformats.org/markup-compatibility/2006" xmlns:p14="http://schemas.microsoft.com/office/powerpoint/2010/main">
+    <mc:Choice Requires="p14">
+      <p:transition p14:dur="0"/>
+    </mc:Choice>
+    <mc:Fallback xmlns="">
+      <p:transition/>
+    </mc:Fallback>
+  </mc:AlternateContent>
   <p:timing>
     <p:tnLst>
       <p:par>
-        <p:cTn id="1" dur="indefinite" restart="never" nodeType="tmRoot"/>
+        <p:cTn id="1" dur="indefinite" restart="never" nodeType="tmRoot">
+          <p:childTnLst>
+            <p:seq concurrent="1" nextAc="seek">
+              <p:cTn id="2" dur="indefinite" nodeType="mainSeq">
+                <p:childTnLst>
+                  <p:par>
+                    <p:cTn id="3" fill="hold">
+                      <p:stCondLst>
+                        <p:cond delay="indefinite"/>
+                      </p:stCondLst>
+                      <p:childTnLst>
+                        <p:par>
+                          <p:cTn id="4" fill="hold">
+                            <p:stCondLst>
+                              <p:cond delay="0"/>
+                            </p:stCondLst>
+                            <p:childTnLst>
+                              <p:par>
+                                <p:cTn id="5" presetID="10" presetClass="entr" presetSubtype="0" fill="hold" grpId="0" nodeType="clickEffect">
+                                  <p:stCondLst>
+                                    <p:cond delay="0"/>
+                                  </p:stCondLst>
+                                  <p:childTnLst>
+                                    <p:set>
+                                      <p:cBhvr>
+                                        <p:cTn id="6" dur="1" fill="hold">
+                                          <p:stCondLst>
+                                            <p:cond delay="0"/>
+                                          </p:stCondLst>
+                                        </p:cTn>
+                                        <p:tgtEl>
+                                          <p:spTgt spid="5"/>
+                                        </p:tgtEl>
+                                        <p:attrNameLst>
+                                          <p:attrName>style.visibility</p:attrName>
+                                        </p:attrNameLst>
+                                      </p:cBhvr>
+                                      <p:to>
+                                        <p:strVal val="visible"/>
+                                      </p:to>
+                                    </p:set>
+                                    <p:animEffect transition="in" filter="fade">
+                                      <p:cBhvr>
+                                        <p:cTn id="7" dur="500"/>
+                                        <p:tgtEl>
+                                          <p:spTgt spid="5"/>
+                                        </p:tgtEl>
+                                      </p:cBhvr>
+                                    </p:animEffect>
+                                  </p:childTnLst>
+                                </p:cTn>
+                              </p:par>
+                            </p:childTnLst>
+                          </p:cTn>
+                        </p:par>
+                      </p:childTnLst>
+                    </p:cTn>
+                  </p:par>
+                  <p:par>
+                    <p:cTn id="8" fill="hold">
+                      <p:stCondLst>
+                        <p:cond delay="indefinite"/>
+                      </p:stCondLst>
+                      <p:childTnLst>
+                        <p:par>
+                          <p:cTn id="9" fill="hold">
+                            <p:stCondLst>
+                              <p:cond delay="0"/>
+                            </p:stCondLst>
+                            <p:childTnLst>
+                              <p:par>
+                                <p:cTn id="10" presetID="10" presetClass="entr" presetSubtype="0" fill="hold" grpId="0" nodeType="clickEffect">
+                                  <p:stCondLst>
+                                    <p:cond delay="0"/>
+                                  </p:stCondLst>
+                                  <p:childTnLst>
+                                    <p:set>
+                                      <p:cBhvr>
+                                        <p:cTn id="11" dur="1" fill="hold">
+                                          <p:stCondLst>
+                                            <p:cond delay="0"/>
+                                          </p:stCondLst>
+                                        </p:cTn>
+                                        <p:tgtEl>
+                                          <p:spTgt spid="2"/>
+                                        </p:tgtEl>
+                                        <p:attrNameLst>
+                                          <p:attrName>style.visibility</p:attrName>
+                                        </p:attrNameLst>
+                                      </p:cBhvr>
+                                      <p:to>
+                                        <p:strVal val="visible"/>
+                                      </p:to>
+                                    </p:set>
+                                    <p:animEffect transition="in" filter="fade">
+                                      <p:cBhvr>
+                                        <p:cTn id="12" dur="500"/>
+                                        <p:tgtEl>
+                                          <p:spTgt spid="2"/>
+                                        </p:tgtEl>
+                                      </p:cBhvr>
+                                    </p:animEffect>
+                                  </p:childTnLst>
+                                </p:cTn>
+                              </p:par>
+                            </p:childTnLst>
+                          </p:cTn>
+                        </p:par>
+                      </p:childTnLst>
+                    </p:cTn>
+                  </p:par>
+                  <p:par>
+                    <p:cTn id="13" fill="hold">
+                      <p:stCondLst>
+                        <p:cond delay="indefinite"/>
+                      </p:stCondLst>
+                      <p:childTnLst>
+                        <p:par>
+                          <p:cTn id="14" fill="hold">
+                            <p:stCondLst>
+                              <p:cond delay="0"/>
+                            </p:stCondLst>
+                            <p:childTnLst>
+                              <p:par>
+                                <p:cTn id="15" presetID="10" presetClass="entr" presetSubtype="0" fill="hold" grpId="0" nodeType="clickEffect">
+                                  <p:stCondLst>
+                                    <p:cond delay="0"/>
+                                  </p:stCondLst>
+                                  <p:childTnLst>
+                                    <p:set>
+                                      <p:cBhvr>
+                                        <p:cTn id="16" dur="1" fill="hold">
+                                          <p:stCondLst>
+                                            <p:cond delay="0"/>
+                                          </p:stCondLst>
+                                        </p:cTn>
+                                        <p:tgtEl>
+                                          <p:spTgt spid="3"/>
+                                        </p:tgtEl>
+                                        <p:attrNameLst>
+                                          <p:attrName>style.visibility</p:attrName>
+                                        </p:attrNameLst>
+                                      </p:cBhvr>
+                                      <p:to>
+                                        <p:strVal val="visible"/>
+                                      </p:to>
+                                    </p:set>
+                                    <p:animEffect transition="in" filter="fade">
+                                      <p:cBhvr>
+                                        <p:cTn id="17" dur="500"/>
+                                        <p:tgtEl>
+                                          <p:spTgt spid="3"/>
+                                        </p:tgtEl>
+                                      </p:cBhvr>
+                                    </p:animEffect>
+                                  </p:childTnLst>
+                                </p:cTn>
+                              </p:par>
+                            </p:childTnLst>
+                          </p:cTn>
+                        </p:par>
+                      </p:childTnLst>
+                    </p:cTn>
+                  </p:par>
+                  <p:par>
+                    <p:cTn id="18" fill="hold">
+                      <p:stCondLst>
+                        <p:cond delay="indefinite"/>
+                      </p:stCondLst>
+                      <p:childTnLst>
+                        <p:par>
+                          <p:cTn id="19" fill="hold">
+                            <p:stCondLst>
+                              <p:cond delay="0"/>
+                            </p:stCondLst>
+                            <p:childTnLst>
+                              <p:par>
+                                <p:cTn id="20" presetID="10" presetClass="entr" presetSubtype="0" fill="hold" grpId="0" nodeType="clickEffect">
+                                  <p:stCondLst>
+                                    <p:cond delay="0"/>
+                                  </p:stCondLst>
+                                  <p:childTnLst>
+                                    <p:set>
+                                      <p:cBhvr>
+                                        <p:cTn id="21" dur="1" fill="hold">
+                                          <p:stCondLst>
+                                            <p:cond delay="0"/>
+                                          </p:stCondLst>
+                                        </p:cTn>
+                                        <p:tgtEl>
+                                          <p:spTgt spid="6"/>
+                                        </p:tgtEl>
+                                        <p:attrNameLst>
+                                          <p:attrName>style.visibility</p:attrName>
+                                        </p:attrNameLst>
+                                      </p:cBhvr>
+                                      <p:to>
+                                        <p:strVal val="visible"/>
+                                      </p:to>
+                                    </p:set>
+                                    <p:animEffect transition="in" filter="fade">
+                                      <p:cBhvr>
+                                        <p:cTn id="22" dur="500"/>
+                                        <p:tgtEl>
+                                          <p:spTgt spid="6"/>
+                                        </p:tgtEl>
+                                      </p:cBhvr>
+                                    </p:animEffect>
+                                  </p:childTnLst>
+                                </p:cTn>
+                              </p:par>
+                            </p:childTnLst>
+                          </p:cTn>
+                        </p:par>
+                      </p:childTnLst>
+                    </p:cTn>
+                  </p:par>
+                </p:childTnLst>
+              </p:cTn>
+              <p:prevCondLst>
+                <p:cond evt="onPrev" delay="0">
+                  <p:tgtEl>
+                    <p:sldTgt/>
+                  </p:tgtEl>
+                </p:cond>
+              </p:prevCondLst>
+              <p:nextCondLst>
+                <p:cond evt="onNext" delay="0">
+                  <p:tgtEl>
+                    <p:sldTgt/>
+                  </p:tgtEl>
+                </p:cond>
+              </p:nextCondLst>
+            </p:seq>
+          </p:childTnLst>
+        </p:cTn>
       </p:par>
     </p:tnLst>
+    <p:bldLst>
+      <p:bldP spid="5" grpId="0"/>
+      <p:bldP spid="2" grpId="0"/>
+      <p:bldP spid="3" grpId="0"/>
+      <p:bldP spid="6" grpId="0"/>
+    </p:bldLst>
   </p:timing>
 </p:sld>
 </file>
@@ -3229,19 +3538,19 @@
         </p:nvSpPr>
         <p:spPr>
           <a:xfrm>
-            <a:off x="395536" y="142853"/>
-            <a:ext cx="8172400" cy="837876"/>
+            <a:off x="2082373" y="1047326"/>
+            <a:ext cx="9717143" cy="738936"/>
           </a:xfrm>
         </p:spPr>
         <p:txBody>
           <a:bodyPr>
-            <a:normAutofit fontScale="90000"/>
+            <a:noAutofit/>
           </a:bodyPr>
           <a:lstStyle/>
           <a:p>
-            <a:pPr rtl="1"/>
-            <a:r>
-              <a:rPr lang="ar-SA" b="1" u="sng" dirty="0" smtClean="0">
+            <a:pPr algn="r" rtl="1"/>
+            <a:r>
+              <a:rPr lang="ar-SA" sz="4000" b="1" u="sng" dirty="0" smtClean="0">
                 <a:solidFill>
                   <a:srgbClr val="FF0000"/>
                 </a:solidFill>
@@ -3249,36 +3558,20 @@
               <a:t> </a:t>
             </a:r>
             <a:r>
-              <a:rPr lang="fr-FR" dirty="0"/>
+              <a:rPr lang="fr-FR" sz="4000" dirty="0"/>
               <a:t/>
             </a:r>
             <a:br>
-              <a:rPr lang="fr-FR" dirty="0"/>
+              <a:rPr lang="fr-FR" sz="4000" dirty="0"/>
             </a:br>
             <a:r>
-              <a:rPr lang="ar-SA" b="1" dirty="0"/>
-              <a:t>بعد تشغيل الحاسوب تظهر هذه </a:t>
-            </a:r>
-            <a:r>
-              <a:rPr lang="ar-SA" b="1" dirty="0" smtClean="0"/>
-              <a:t>الصورة</a:t>
-            </a:r>
-            <a:r>
-              <a:rPr lang="ar-DZ" b="1" dirty="0" smtClean="0"/>
-              <a:t> </a:t>
-            </a:r>
-            <a:r>
-              <a:rPr lang="ar-SA" b="1" dirty="0" smtClean="0"/>
-              <a:t> </a:t>
-            </a:r>
-            <a:r>
-              <a:rPr lang="fr-FR" b="1" dirty="0"/>
+              <a:rPr lang="fr-FR" sz="4000" b="1" dirty="0"/>
               <a:t/>
             </a:r>
             <a:br>
-              <a:rPr lang="fr-FR" b="1" dirty="0"/>
+              <a:rPr lang="fr-FR" sz="4000" b="1" dirty="0"/>
             </a:br>
-            <a:endParaRPr lang="fr-FR" b="1" dirty="0"/>
+            <a:endParaRPr lang="fr-FR" sz="4000" b="1" dirty="0"/>
           </a:p>
         </p:txBody>
       </p:sp>
@@ -3292,8 +3585,8 @@
         </p:nvSpPr>
         <p:spPr bwMode="auto">
           <a:xfrm>
-            <a:off x="395536" y="5530382"/>
-            <a:ext cx="8172400" cy="1200329"/>
+            <a:off x="1919536" y="5957010"/>
+            <a:ext cx="9879980" cy="646331"/>
           </a:xfrm>
           <a:prstGeom prst="rect">
             <a:avLst/>
@@ -3316,94 +3609,58 @@
           </a:bodyPr>
           <a:lstStyle/>
           <a:p>
-            <a:pPr marL="0" marR="0" lvl="0" indent="0" algn="ctr" defTabSz="914400" rtl="1" eaLnBrk="1" fontAlgn="base" latinLnBrk="0" hangingPunct="1">
-              <a:lnSpc>
-                <a:spcPct val="100000"/>
-              </a:lnSpc>
+            <a:pPr algn="r" rtl="1" fontAlgn="base">
               <a:spcBef>
                 <a:spcPct val="0"/>
               </a:spcBef>
               <a:spcAft>
                 <a:spcPct val="0"/>
               </a:spcAft>
-              <a:buClrTx/>
-              <a:buSzTx/>
-              <a:buFontTx/>
-              <a:buNone/>
-              <a:tabLst/>
             </a:pPr>
             <a:r>
-              <a:rPr kumimoji="0" lang="ar-SA" sz="3600" b="1" i="0" u="none" strike="noStrike" cap="none" normalizeH="0" baseline="0" dirty="0" smtClean="0">
-                <a:ln>
-                  <a:noFill/>
-                </a:ln>
-                <a:solidFill>
-                  <a:schemeClr val="tx1"/>
-                </a:solidFill>
-                <a:effectLst/>
+              <a:rPr lang="ar-SA" sz="3600" b="1" dirty="0">
                 <a:latin typeface="Times New Roman" pitchFamily="18" charset="0"/>
                 <a:ea typeface="Times New Roman" pitchFamily="18" charset="0"/>
-                <a:cs typeface="Times New Roman" pitchFamily="18" charset="0"/>
-              </a:rPr>
-              <a:t>نسمي هذه الصورة بالواجهة</a:t>
-            </a:r>
-            <a:endParaRPr kumimoji="0" lang="en-US" sz="3600" b="1" i="0" u="none" strike="noStrike" cap="none" normalizeH="0" baseline="0" dirty="0" smtClean="0">
-              <a:ln>
-                <a:noFill/>
-              </a:ln>
-              <a:solidFill>
-                <a:schemeClr val="tx1"/>
-              </a:solidFill>
-              <a:effectLst/>
-              <a:latin typeface="Arial" pitchFamily="34" charset="0"/>
-              <a:ea typeface="Times New Roman" pitchFamily="18" charset="0"/>
-              <a:cs typeface="Arial" pitchFamily="34" charset="0"/>
-            </a:endParaRPr>
-          </a:p>
-          <a:p>
-            <a:pPr marL="0" marR="0" lvl="0" indent="0" algn="ctr" defTabSz="914400" rtl="0" eaLnBrk="0" fontAlgn="base" latinLnBrk="0" hangingPunct="0">
-              <a:lnSpc>
-                <a:spcPct val="100000"/>
-              </a:lnSpc>
-              <a:spcBef>
-                <a:spcPct val="0"/>
-              </a:spcBef>
-              <a:spcAft>
-                <a:spcPct val="0"/>
-              </a:spcAft>
-              <a:buClrTx/>
-              <a:buSzTx/>
-              <a:tabLst/>
-            </a:pPr>
-            <a:r>
-              <a:rPr kumimoji="0" lang="ar-SA" sz="3600" b="1" i="0" u="none" strike="noStrike" cap="none" normalizeH="0" baseline="0" dirty="0" smtClean="0">
-                <a:ln>
-                  <a:noFill/>
-                </a:ln>
-                <a:solidFill>
-                  <a:schemeClr val="tx1"/>
-                </a:solidFill>
-                <a:effectLst/>
+                <a:cs typeface="+mj-cs"/>
+              </a:rPr>
+              <a:t>نسمي هذه الصورة </a:t>
+            </a:r>
+            <a:r>
+              <a:rPr lang="ar-SA" sz="3600" b="1" dirty="0" smtClean="0">
+                <a:latin typeface="Times New Roman" pitchFamily="18" charset="0"/>
+                <a:ea typeface="Times New Roman" pitchFamily="18" charset="0"/>
+                <a:cs typeface="+mj-cs"/>
+              </a:rPr>
+              <a:t>بالواجهة</a:t>
+            </a:r>
+            <a:r>
+              <a:rPr lang="ar-DZ" sz="3600" b="1" dirty="0" smtClean="0">
+                <a:latin typeface="Times New Roman" pitchFamily="18" charset="0"/>
+                <a:ea typeface="Times New Roman" pitchFamily="18" charset="0"/>
+                <a:cs typeface="+mj-cs"/>
+              </a:rPr>
+              <a:t>، </a:t>
+            </a:r>
+            <a:r>
+              <a:rPr lang="ar-SA" sz="3600" b="1" dirty="0" smtClean="0">
                 <a:latin typeface="Arial" pitchFamily="34" charset="0"/>
                 <a:ea typeface="Times New Roman" pitchFamily="18" charset="0"/>
-                <a:cs typeface="Arial" pitchFamily="34" charset="0"/>
-              </a:rPr>
-              <a:t>ممّا تتكون هذه الواجهة ؟</a:t>
-            </a:r>
-            <a:r>
-              <a:rPr kumimoji="0" lang="fr-FR" sz="3600" b="1" i="0" u="none" strike="noStrike" cap="none" normalizeH="0" baseline="0" dirty="0" smtClean="0">
-                <a:ln>
-                  <a:noFill/>
-                </a:ln>
-                <a:solidFill>
-                  <a:schemeClr val="tx1"/>
-                </a:solidFill>
-                <a:effectLst/>
+                <a:cs typeface="+mj-cs"/>
+              </a:rPr>
+              <a:t>ممّا تتكون </a:t>
+            </a:r>
+            <a:r>
+              <a:rPr lang="ar-DZ" sz="3600" b="1" dirty="0">
                 <a:latin typeface="Arial" pitchFamily="34" charset="0"/>
-                <a:cs typeface="Arial" pitchFamily="34" charset="0"/>
-              </a:rPr>
-              <a:t> </a:t>
-            </a:r>
+                <a:ea typeface="Times New Roman" pitchFamily="18" charset="0"/>
+                <a:cs typeface="+mj-cs"/>
+              </a:rPr>
+              <a:t>؟</a:t>
+            </a:r>
+            <a:endParaRPr lang="fr-FR" sz="3600" b="1" dirty="0">
+              <a:latin typeface="Arial" pitchFamily="34" charset="0"/>
+              <a:cs typeface="+mj-cs"/>
+            </a:endParaRPr>
           </a:p>
         </p:txBody>
       </p:sp>
@@ -3429,18 +3686,113 @@
         </p:blipFill>
         <p:spPr>
           <a:xfrm>
-            <a:off x="411179" y="908720"/>
-            <a:ext cx="8172400" cy="4594732"/>
+            <a:off x="1902899" y="1070054"/>
+            <a:ext cx="8394548" cy="4719629"/>
           </a:xfrm>
           <a:prstGeom prst="rect">
             <a:avLst/>
           </a:prstGeom>
         </p:spPr>
       </p:pic>
+      <p:sp>
+        <p:nvSpPr>
+          <p:cNvPr id="5" name="ZoneTexte 4"/>
+          <p:cNvSpPr txBox="1"/>
+          <p:nvPr/>
+        </p:nvSpPr>
+        <p:spPr>
+          <a:xfrm>
+            <a:off x="400831" y="133286"/>
+            <a:ext cx="11398685" cy="769441"/>
+          </a:xfrm>
+          <a:prstGeom prst="rect">
+            <a:avLst/>
+          </a:prstGeom>
+          <a:noFill/>
+        </p:spPr>
+        <p:txBody>
+          <a:bodyPr wrap="square" rtlCol="1">
+            <a:spAutoFit/>
+          </a:bodyPr>
+          <a:lstStyle/>
+          <a:p>
+            <a:pPr algn="r"/>
+            <a:r>
+              <a:rPr lang="ar-DZ" sz="4000" b="1" u="sng" dirty="0" smtClean="0">
+                <a:solidFill>
+                  <a:srgbClr val="00B050"/>
+                </a:solidFill>
+                <a:cs typeface="+mj-cs"/>
+              </a:rPr>
+              <a:t>الوضعية</a:t>
+            </a:r>
+            <a:r>
+              <a:rPr lang="ar-DZ" sz="4000" u="sng" dirty="0" smtClean="0">
+                <a:solidFill>
+                  <a:srgbClr val="00B050"/>
+                </a:solidFill>
+                <a:cs typeface="+mj-cs"/>
+              </a:rPr>
+              <a:t> </a:t>
+            </a:r>
+            <a:r>
+              <a:rPr lang="ar-DZ" sz="4000" b="1" u="sng" dirty="0" err="1" smtClean="0">
+                <a:solidFill>
+                  <a:srgbClr val="00B050"/>
+                </a:solidFill>
+                <a:cs typeface="+mj-cs"/>
+              </a:rPr>
+              <a:t>الإنطلاقية</a:t>
+            </a:r>
+            <a:r>
+              <a:rPr lang="ar-DZ" sz="4000" b="1" u="sng" dirty="0" smtClean="0">
+                <a:solidFill>
+                  <a:srgbClr val="00B050"/>
+                </a:solidFill>
+                <a:cs typeface="+mj-cs"/>
+              </a:rPr>
+              <a:t> :</a:t>
+            </a:r>
+            <a:r>
+              <a:rPr lang="ar-DZ" sz="4400" b="1" dirty="0" smtClean="0">
+                <a:solidFill>
+                  <a:srgbClr val="00B050"/>
+                </a:solidFill>
+                <a:cs typeface="+mj-cs"/>
+              </a:rPr>
+              <a:t> </a:t>
+            </a:r>
+            <a:r>
+              <a:rPr lang="ar-SA" sz="3600" b="1" dirty="0" smtClean="0">
+                <a:cs typeface="+mj-cs"/>
+              </a:rPr>
+              <a:t>بعد </a:t>
+            </a:r>
+            <a:r>
+              <a:rPr lang="ar-SA" sz="3600" b="1" dirty="0">
+                <a:cs typeface="+mj-cs"/>
+              </a:rPr>
+              <a:t>تشغيل الحاسوب تظهر هذه الصورة</a:t>
+            </a:r>
+            <a:r>
+              <a:rPr lang="ar-DZ" sz="3600" b="1" dirty="0">
+                <a:cs typeface="+mj-cs"/>
+              </a:rPr>
+              <a:t> </a:t>
+            </a:r>
+            <a:endParaRPr lang="ar-DZ" sz="4400" b="1" u="sng" dirty="0">
+              <a:solidFill>
+                <a:srgbClr val="00B050"/>
+              </a:solidFill>
+              <a:cs typeface="+mj-cs"/>
+            </a:endParaRPr>
+          </a:p>
+        </p:txBody>
+      </p:sp>
     </p:spTree>
     <p:extLst>
       <p:ext uri="{BB962C8B-B14F-4D97-AF65-F5344CB8AC3E}">
-        <p14:creationId xmlns:p14="http://schemas.microsoft.com/office/powerpoint/2010/main" val="1507631024"/>
+        <p14:creationId xmlns:p14="http://schemas.microsoft.com/office/powerpoint/2010/main" val="2603666848"/>
       </p:ext>
     </p:extLst>
   </p:cSld>
@@ -3479,397 +3831,243 @@
       </p:grpSpPr>
       <p:sp>
         <p:nvSpPr>
-          <p:cNvPr id="2" name="ZoneTexte 1"/>
-          <p:cNvSpPr txBox="1"/>
+          <p:cNvPr id="13" name="Rectangle 12"/>
+          <p:cNvSpPr/>
           <p:nvPr/>
         </p:nvSpPr>
         <p:spPr>
           <a:xfrm>
-            <a:off x="395536" y="260648"/>
-            <a:ext cx="8280920" cy="523220"/>
+            <a:off x="1" y="78747"/>
+            <a:ext cx="11887200" cy="6203750"/>
           </a:xfrm>
           <a:prstGeom prst="rect">
             <a:avLst/>
           </a:prstGeom>
-          <a:noFill/>
         </p:spPr>
         <p:txBody>
-          <a:bodyPr wrap="square" rtlCol="1">
+          <a:bodyPr wrap="square">
             <a:spAutoFit/>
           </a:bodyPr>
           <a:lstStyle/>
           <a:p>
-            <a:pPr algn="ctr"/>
-            <a:r>
-              <a:rPr lang="ar-DZ" sz="2800" b="1" dirty="0" smtClean="0">
+            <a:pPr algn="r" rtl="1">
+              <a:lnSpc>
+                <a:spcPct val="115000"/>
+              </a:lnSpc>
+              <a:spcAft>
+                <a:spcPts val="1000"/>
+              </a:spcAft>
+            </a:pPr>
+            <a:r>
+              <a:rPr lang="ar-DZ" sz="3200" b="1" u="sng" dirty="0" smtClean="0">
                 <a:solidFill>
                   <a:srgbClr val="FF0000"/>
                 </a:solidFill>
-                <a:cs typeface="+mj-cs"/>
-              </a:rPr>
-              <a:t>النشاط 01</a:t>
-            </a:r>
-            <a:endParaRPr lang="ar-DZ" sz="2800" b="1" dirty="0">
+                <a:effectLst/>
+                <a:latin typeface="Calibri" panose="020F0502020204030204" pitchFamily="34" charset="0"/>
+                <a:ea typeface="Times New Roman" panose="02020603050405020304" pitchFamily="18" charset="0"/>
+                <a:cs typeface="Times New Roman" panose="02020603050405020304" pitchFamily="18" charset="0"/>
+              </a:rPr>
+              <a:t>نشاط 01 :</a:t>
+            </a:r>
+            <a:r>
+              <a:rPr lang="ar-DZ" sz="3200" b="1" u="sng" dirty="0">
+                <a:solidFill>
+                  <a:srgbClr val="FF0000"/>
+                </a:solidFill>
+                <a:latin typeface="Calibri" panose="020F0502020204030204" pitchFamily="34" charset="0"/>
+                <a:ea typeface="Times New Roman" panose="02020603050405020304" pitchFamily="18" charset="0"/>
+                <a:cs typeface="Times New Roman" panose="02020603050405020304" pitchFamily="18" charset="0"/>
+              </a:rPr>
+              <a:t> </a:t>
+            </a:r>
+            <a:endParaRPr lang="ar-DZ" sz="3200" b="1" u="sng" dirty="0" smtClean="0">
               <a:solidFill>
                 <a:srgbClr val="FF0000"/>
               </a:solidFill>
-              <a:cs typeface="+mj-cs"/>
+              <a:latin typeface="Calibri" panose="020F0502020204030204" pitchFamily="34" charset="0"/>
+              <a:ea typeface="Times New Roman" panose="02020603050405020304" pitchFamily="18" charset="0"/>
+              <a:cs typeface="Times New Roman" panose="02020603050405020304" pitchFamily="18" charset="0"/>
             </a:endParaRPr>
           </a:p>
-        </p:txBody>
-      </p:sp>
-      <p:graphicFrame>
-        <p:nvGraphicFramePr>
-          <p:cNvPr id="3" name="Tableau 2"/>
-          <p:cNvGraphicFramePr>
-            <a:graphicFrameLocks noGrp="1"/>
-          </p:cNvGraphicFramePr>
-          <p:nvPr>
-            <p:extLst>
-              <p:ext uri="{D42A27DB-BD31-4B8C-83A1-F6EECF244321}">
-                <p14:modId xmlns:p14="http://schemas.microsoft.com/office/powerpoint/2010/main" val="1713986338"/>
-              </p:ext>
-            </p:extLst>
-          </p:nvPr>
-        </p:nvGraphicFramePr>
-        <p:xfrm>
-          <a:off x="899592" y="1556792"/>
-          <a:ext cx="7488832" cy="4824536"/>
-        </p:xfrm>
-        <a:graphic>
-          <a:graphicData uri="http://schemas.openxmlformats.org/drawingml/2006/table">
-            <a:tbl>
-              <a:tblPr rtl="1" firstRow="1" firstCol="1" bandRow="1">
-                <a:tableStyleId>{5C22544A-7EE6-4342-B048-85BDC9FD1C3A}</a:tableStyleId>
-              </a:tblPr>
-              <a:tblGrid>
-                <a:gridCol w="7488832"/>
-              </a:tblGrid>
-              <a:tr h="1593140">
-                <a:tc>
-                  <a:txBody>
-                    <a:bodyPr/>
-                    <a:lstStyle/>
-                    <a:p>
-                      <a:pPr marL="342900" lvl="0" indent="-342900" algn="r" rtl="1">
-                        <a:lnSpc>
-                          <a:spcPct val="107000"/>
-                        </a:lnSpc>
-                        <a:spcAft>
-                          <a:spcPts val="0"/>
-                        </a:spcAft>
-                        <a:buSzPts val="1400"/>
-                        <a:buFont typeface="Symbol" panose="05050102010706020507" pitchFamily="18" charset="2"/>
-                        <a:buChar char=""/>
-                      </a:pPr>
-                      <a:r>
-                        <a:rPr lang="ar-DZ" sz="2400" u="sng" strike="noStrike" dirty="0">
-                          <a:solidFill>
-                            <a:srgbClr val="00B050"/>
-                          </a:solidFill>
-                          <a:effectLst/>
-                        </a:rPr>
-                        <a:t>سطح المكتب </a:t>
-                      </a:r>
-                      <a:r>
-                        <a:rPr lang="fr-FR" sz="2400" u="sng" strike="noStrike" dirty="0">
-                          <a:solidFill>
-                            <a:srgbClr val="00B050"/>
-                          </a:solidFill>
-                          <a:effectLst/>
-                        </a:rPr>
-                        <a:t>Bureau</a:t>
-                      </a:r>
-                      <a:r>
-                        <a:rPr lang="ar-DZ" sz="2400" u="sng" strike="noStrike" dirty="0">
-                          <a:solidFill>
-                            <a:srgbClr val="00B050"/>
-                          </a:solidFill>
-                          <a:effectLst/>
-                        </a:rPr>
-                        <a:t> </a:t>
-                      </a:r>
-                      <a:r>
-                        <a:rPr lang="fr-FR" sz="2400" u="sng" strike="noStrike" dirty="0">
-                          <a:solidFill>
-                            <a:srgbClr val="00B050"/>
-                          </a:solidFill>
-                          <a:effectLst/>
-                        </a:rPr>
-                        <a:t>:</a:t>
-                      </a:r>
-                      <a:endParaRPr lang="en-US" sz="1800" u="none" strike="noStrike" dirty="0">
-                        <a:solidFill>
-                          <a:srgbClr val="00B050"/>
-                        </a:solidFill>
-                        <a:effectLst/>
-                      </a:endParaRPr>
-                    </a:p>
-                    <a:p>
-                      <a:pPr marL="342900" lvl="0" indent="-342900" algn="r" rtl="1">
-                        <a:lnSpc>
-                          <a:spcPct val="107000"/>
-                        </a:lnSpc>
-                        <a:spcAft>
-                          <a:spcPts val="0"/>
-                        </a:spcAft>
-                        <a:buSzPts val="1400"/>
-                        <a:buFont typeface="Symbol" panose="05050102010706020507" pitchFamily="18" charset="2"/>
-                        <a:buChar char=""/>
-                      </a:pPr>
-                      <a:r>
-                        <a:rPr lang="ar-DZ" sz="2400" u="sng" strike="noStrike" dirty="0">
-                          <a:solidFill>
-                            <a:srgbClr val="00B050"/>
-                          </a:solidFill>
-                          <a:effectLst/>
-                        </a:rPr>
-                        <a:t>الأيقونات </a:t>
-                      </a:r>
-                      <a:r>
-                        <a:rPr lang="fr-FR" sz="2400" u="sng" strike="noStrike" dirty="0">
-                          <a:solidFill>
-                            <a:srgbClr val="00B050"/>
-                          </a:solidFill>
-                          <a:effectLst/>
-                        </a:rPr>
-                        <a:t> Icônes</a:t>
-                      </a:r>
-                      <a:r>
-                        <a:rPr lang="ar-DZ" sz="2400" u="sng" strike="noStrike" dirty="0">
-                          <a:solidFill>
-                            <a:srgbClr val="00B050"/>
-                          </a:solidFill>
-                          <a:effectLst/>
-                        </a:rPr>
-                        <a:t>:</a:t>
-                      </a:r>
-                      <a:endParaRPr lang="en-US" sz="1800" u="none" strike="noStrike" dirty="0">
-                        <a:solidFill>
-                          <a:srgbClr val="00B050"/>
-                        </a:solidFill>
-                        <a:effectLst/>
-                      </a:endParaRPr>
-                    </a:p>
-                    <a:p>
-                      <a:pPr marL="342900" lvl="0" indent="-342900" algn="r" rtl="1">
-                        <a:lnSpc>
-                          <a:spcPct val="107000"/>
-                        </a:lnSpc>
-                        <a:spcAft>
-                          <a:spcPts val="0"/>
-                        </a:spcAft>
-                        <a:buSzPts val="1400"/>
-                        <a:buFont typeface="Symbol" panose="05050102010706020507" pitchFamily="18" charset="2"/>
-                        <a:buChar char=""/>
-                      </a:pPr>
-                      <a:r>
-                        <a:rPr lang="ar-DZ" sz="2400" u="sng" strike="noStrike" dirty="0">
-                          <a:solidFill>
-                            <a:srgbClr val="00B050"/>
-                          </a:solidFill>
-                          <a:effectLst/>
-                        </a:rPr>
-                        <a:t>شريط المهام </a:t>
-                      </a:r>
-                      <a:r>
-                        <a:rPr lang="fr-FR" sz="2400" u="sng" strike="noStrike" dirty="0">
-                          <a:solidFill>
-                            <a:srgbClr val="00B050"/>
-                          </a:solidFill>
-                          <a:effectLst/>
-                        </a:rPr>
-                        <a:t>Barre des taches</a:t>
-                      </a:r>
-                      <a:r>
-                        <a:rPr lang="ar-DZ" sz="2400" u="sng" strike="noStrike" dirty="0">
-                          <a:solidFill>
-                            <a:srgbClr val="00B050"/>
-                          </a:solidFill>
-                          <a:effectLst/>
-                        </a:rPr>
-                        <a:t> :</a:t>
-                      </a:r>
-                      <a:endParaRPr lang="en-US" sz="1800" u="none" strike="noStrike" dirty="0">
-                        <a:solidFill>
-                          <a:srgbClr val="00B050"/>
-                        </a:solidFill>
-                        <a:effectLst/>
-                      </a:endParaRPr>
-                    </a:p>
-                    <a:p>
-                      <a:pPr marL="457200" algn="r" rtl="1">
-                        <a:lnSpc>
-                          <a:spcPct val="107000"/>
-                        </a:lnSpc>
-                        <a:spcAft>
-                          <a:spcPts val="0"/>
-                        </a:spcAft>
-                      </a:pPr>
-                      <a:r>
-                        <a:rPr lang="ar-DZ" sz="1800" dirty="0">
-                          <a:solidFill>
-                            <a:schemeClr val="tx1"/>
-                          </a:solidFill>
-                          <a:effectLst/>
-                        </a:rPr>
-                        <a:t> </a:t>
-                      </a:r>
-                      <a:endParaRPr lang="en-US" sz="1800" dirty="0">
-                        <a:solidFill>
-                          <a:schemeClr val="tx1"/>
-                        </a:solidFill>
-                        <a:effectLst/>
-                        <a:latin typeface="Calibri" panose="020F0502020204030204" pitchFamily="34" charset="0"/>
-                        <a:ea typeface="Calibri" panose="020F0502020204030204" pitchFamily="34" charset="0"/>
-                        <a:cs typeface="Arial" panose="020B0604020202020204" pitchFamily="34" charset="0"/>
-                      </a:endParaRPr>
-                    </a:p>
-                  </a:txBody>
-                  <a:tcPr marL="68580" marR="68580" marT="0" marB="0" anchor="ctr">
-                    <a:noFill/>
-                  </a:tcPr>
-                </a:tc>
-              </a:tr>
-              <a:tr h="3231396">
-                <a:tc>
-                  <a:txBody>
-                    <a:bodyPr/>
-                    <a:lstStyle/>
-                    <a:p>
-                      <a:pPr marL="342900" lvl="0" indent="-342900" algn="r" rtl="1">
-                        <a:lnSpc>
-                          <a:spcPct val="107000"/>
-                        </a:lnSpc>
-                        <a:spcAft>
-                          <a:spcPts val="0"/>
-                        </a:spcAft>
-                        <a:buSzPts val="1400"/>
-                        <a:buFont typeface="Symbol" panose="05050102010706020507" pitchFamily="18" charset="2"/>
-                        <a:buChar char=""/>
-                      </a:pPr>
-                      <a:r>
-                        <a:rPr lang="ar-SA" sz="2400" u="none" strike="noStrike" dirty="0">
-                          <a:solidFill>
-                            <a:schemeClr val="tx1"/>
-                          </a:solidFill>
-                          <a:effectLst/>
-                        </a:rPr>
-                        <a:t>هي رموز صغيرة تمثل البرامج، الملفات، المجلدات أو الأدوات في نظام التشغيل، وتظهر على شاشة الحاسوب (على سطح المكتب أو في شريط المهام أو داخل النوافذ) لتسهيل التفاعل مع النظام</a:t>
-                      </a:r>
-                      <a:r>
-                        <a:rPr lang="fr-FR" sz="2400" u="none" strike="noStrike" dirty="0">
-                          <a:solidFill>
-                            <a:schemeClr val="tx1"/>
-                          </a:solidFill>
-                          <a:effectLst/>
-                        </a:rPr>
-                        <a:t>.</a:t>
-                      </a:r>
-                      <a:endParaRPr lang="en-US" sz="1800" u="none" strike="noStrike" dirty="0">
-                        <a:solidFill>
-                          <a:schemeClr val="tx1"/>
-                        </a:solidFill>
-                        <a:effectLst/>
-                      </a:endParaRPr>
-                    </a:p>
-                    <a:p>
-                      <a:pPr marL="342900" lvl="0" indent="-342900" algn="r" rtl="1">
-                        <a:lnSpc>
-                          <a:spcPct val="107000"/>
-                        </a:lnSpc>
-                        <a:spcAft>
-                          <a:spcPts val="0"/>
-                        </a:spcAft>
-                        <a:buSzPts val="1400"/>
-                        <a:buFont typeface="Symbol" panose="05050102010706020507" pitchFamily="18" charset="2"/>
-                        <a:buChar char=""/>
-                      </a:pPr>
-                      <a:r>
-                        <a:rPr lang="ar-SA" sz="2400" u="none" strike="noStrike" dirty="0">
-                          <a:solidFill>
-                            <a:schemeClr val="tx1"/>
-                          </a:solidFill>
-                          <a:effectLst/>
-                        </a:rPr>
-                        <a:t>هو الشاشة الرئيسية التي تظهر عند تشغيل الكمبيوتر، ويحتوي على أيقونات تمثل البرامج والملفات والمجلدات، كما يمكن تغيير خلفيته حسب الرغبة</a:t>
-                      </a:r>
-                      <a:r>
-                        <a:rPr lang="fr-FR" sz="2400" u="none" strike="noStrike" dirty="0">
-                          <a:solidFill>
-                            <a:schemeClr val="tx1"/>
-                          </a:solidFill>
-                          <a:effectLst/>
-                        </a:rPr>
-                        <a:t>.</a:t>
-                      </a:r>
-                      <a:endParaRPr lang="en-US" sz="1800" u="none" strike="noStrike" dirty="0">
-                        <a:solidFill>
-                          <a:schemeClr val="tx1"/>
-                        </a:solidFill>
-                        <a:effectLst/>
-                      </a:endParaRPr>
-                    </a:p>
-                    <a:p>
-                      <a:pPr marL="342900" lvl="0" indent="-342900" algn="r" rtl="1">
-                        <a:lnSpc>
-                          <a:spcPct val="107000"/>
-                        </a:lnSpc>
-                        <a:spcAft>
-                          <a:spcPts val="0"/>
-                        </a:spcAft>
-                        <a:buSzPts val="1400"/>
-                        <a:buFont typeface="Symbol" panose="05050102010706020507" pitchFamily="18" charset="2"/>
-                        <a:buChar char=""/>
-                      </a:pPr>
-                      <a:r>
-                        <a:rPr lang="ar-DZ" sz="2400" u="none" strike="noStrike" dirty="0">
-                          <a:solidFill>
-                            <a:schemeClr val="tx1"/>
-                          </a:solidFill>
-                          <a:effectLst/>
-                        </a:rPr>
-                        <a:t>يمتد أفقيا أسفل الشاشة، يحتوى على الزر ابدأ </a:t>
-                      </a:r>
-                      <a:r>
-                        <a:rPr lang="fr-FR" sz="2400" u="none" strike="noStrike" dirty="0">
-                          <a:solidFill>
-                            <a:schemeClr val="tx1"/>
-                          </a:solidFill>
-                          <a:effectLst/>
-                        </a:rPr>
-                        <a:t>Démarrer</a:t>
-                      </a:r>
-                      <a:r>
-                        <a:rPr lang="ar-DZ" sz="2400" u="none" strike="noStrike" dirty="0">
-                          <a:solidFill>
-                            <a:schemeClr val="tx1"/>
-                          </a:solidFill>
-                          <a:effectLst/>
-                        </a:rPr>
-                        <a:t> ، الساعة، التاريخ، أداة ضبط اللغة و البرامج المفتوحة.</a:t>
-                      </a:r>
-                      <a:endParaRPr lang="en-US" sz="1800" u="none" strike="noStrike" dirty="0">
-                        <a:solidFill>
-                          <a:schemeClr val="tx1"/>
-                        </a:solidFill>
-                        <a:effectLst/>
-                        <a:latin typeface="Calibri" panose="020F0502020204030204" pitchFamily="34" charset="0"/>
-                        <a:ea typeface="Calibri" panose="020F0502020204030204" pitchFamily="34" charset="0"/>
-                        <a:cs typeface="Arial" panose="020B0604020202020204" pitchFamily="34" charset="0"/>
-                      </a:endParaRPr>
-                    </a:p>
-                  </a:txBody>
-                  <a:tcPr marL="68580" marR="68580" marT="0" marB="0" anchor="ctr">
-                    <a:noFill/>
-                  </a:tcPr>
-                </a:tc>
-              </a:tr>
-            </a:tbl>
-          </a:graphicData>
-        </a:graphic>
-      </p:graphicFrame>
+          <a:p>
+            <a:pPr marL="457200" indent="-457200" algn="r" rtl="1" fontAlgn="ctr">
+              <a:buFont typeface="Wingdings" panose="05000000000000000000" pitchFamily="2" charset="2"/>
+              <a:buChar char="§"/>
+            </a:pPr>
+            <a:r>
+              <a:rPr lang="ar-DZ" sz="3200" b="1" u="sng" dirty="0">
+                <a:solidFill>
+                  <a:srgbClr val="00B050"/>
+                </a:solidFill>
+              </a:rPr>
+              <a:t>سطح المكتب </a:t>
+            </a:r>
+            <a:r>
+              <a:rPr lang="fr-FR" sz="3200" b="1" u="sng" dirty="0">
+                <a:solidFill>
+                  <a:srgbClr val="00B050"/>
+                </a:solidFill>
+              </a:rPr>
+              <a:t>Bureau</a:t>
+            </a:r>
+            <a:r>
+              <a:rPr lang="ar-DZ" sz="3200" b="1" u="sng" dirty="0">
+                <a:solidFill>
+                  <a:srgbClr val="00B050"/>
+                </a:solidFill>
+              </a:rPr>
+              <a:t> </a:t>
+            </a:r>
+            <a:r>
+              <a:rPr lang="fr-FR" sz="3200" b="1" u="sng" dirty="0">
+                <a:solidFill>
+                  <a:srgbClr val="00B050"/>
+                </a:solidFill>
+              </a:rPr>
+              <a:t>:</a:t>
+            </a:r>
+            <a:endParaRPr lang="ar-DZ" sz="3200" dirty="0">
+              <a:solidFill>
+                <a:srgbClr val="00B050"/>
+              </a:solidFill>
+            </a:endParaRPr>
+          </a:p>
+          <a:p>
+            <a:pPr marL="457200" indent="-457200" algn="r" rtl="1" fontAlgn="ctr">
+              <a:buFont typeface="Wingdings" panose="05000000000000000000" pitchFamily="2" charset="2"/>
+              <a:buChar char="§"/>
+            </a:pPr>
+            <a:r>
+              <a:rPr lang="ar-DZ" sz="3200" b="1" u="sng" dirty="0">
+                <a:solidFill>
+                  <a:srgbClr val="00B050"/>
+                </a:solidFill>
+              </a:rPr>
+              <a:t>الأيقونات </a:t>
+            </a:r>
+            <a:r>
+              <a:rPr lang="fr-FR" sz="3200" b="1" u="sng" dirty="0">
+                <a:solidFill>
+                  <a:srgbClr val="00B050"/>
+                </a:solidFill>
+              </a:rPr>
+              <a:t> Icônes</a:t>
+            </a:r>
+            <a:r>
+              <a:rPr lang="ar-DZ" sz="3200" b="1" u="sng" dirty="0">
+                <a:solidFill>
+                  <a:srgbClr val="00B050"/>
+                </a:solidFill>
+              </a:rPr>
+              <a:t>:</a:t>
+            </a:r>
+            <a:endParaRPr lang="ar-DZ" sz="3200" dirty="0">
+              <a:solidFill>
+                <a:srgbClr val="00B050"/>
+              </a:solidFill>
+            </a:endParaRPr>
+          </a:p>
+          <a:p>
+            <a:pPr marL="457200" indent="-457200" algn="r" rtl="1" fontAlgn="ctr">
+              <a:buFont typeface="Wingdings" panose="05000000000000000000" pitchFamily="2" charset="2"/>
+              <a:buChar char="§"/>
+            </a:pPr>
+            <a:r>
+              <a:rPr lang="ar-DZ" sz="3200" b="1" u="sng" dirty="0">
+                <a:solidFill>
+                  <a:srgbClr val="00B050"/>
+                </a:solidFill>
+              </a:rPr>
+              <a:t>شريط المهام </a:t>
+            </a:r>
+            <a:r>
+              <a:rPr lang="fr-FR" sz="3200" b="1" u="sng" dirty="0">
+                <a:solidFill>
+                  <a:srgbClr val="00B050"/>
+                </a:solidFill>
+              </a:rPr>
+              <a:t>Barre des taches</a:t>
+            </a:r>
+            <a:r>
+              <a:rPr lang="ar-DZ" sz="3200" b="1" u="sng" dirty="0">
+                <a:solidFill>
+                  <a:srgbClr val="00B050"/>
+                </a:solidFill>
+              </a:rPr>
+              <a:t> :</a:t>
+            </a:r>
+            <a:endParaRPr lang="ar-DZ" sz="3200" dirty="0">
+              <a:solidFill>
+                <a:srgbClr val="00B050"/>
+              </a:solidFill>
+            </a:endParaRPr>
+          </a:p>
+          <a:p>
+            <a:pPr algn="r" rtl="1" fontAlgn="ctr"/>
+            <a:r>
+              <a:rPr lang="ar-DZ" sz="3200" b="1" dirty="0"/>
+              <a:t> </a:t>
+            </a:r>
+            <a:endParaRPr lang="ar-DZ" sz="3200" dirty="0"/>
+          </a:p>
+          <a:p>
+            <a:pPr marL="457200" indent="-457200" algn="r" rtl="1" fontAlgn="ctr">
+              <a:buFont typeface="Arial" panose="020B0604020202020204" pitchFamily="34" charset="0"/>
+              <a:buChar char="•"/>
+            </a:pPr>
+            <a:r>
+              <a:rPr lang="ar-SA" sz="3200" b="1" dirty="0"/>
+              <a:t>هي رموز صغيرة تمثل البرامج، الملفات، المجلدات أو الأدوات في نظام التشغيل، وتظهر على شاشة الحاسوب (على سطح المكتب أو في شريط المهام أو داخل النوافذ) لتسهيل التفاعل مع النظام</a:t>
+            </a:r>
+            <a:r>
+              <a:rPr lang="fr-FR" sz="3200" b="1" dirty="0"/>
+              <a:t>.</a:t>
+            </a:r>
+            <a:endParaRPr lang="ar-DZ" sz="3200" dirty="0"/>
+          </a:p>
+          <a:p>
+            <a:pPr marL="457200" indent="-457200" algn="r" rtl="1" fontAlgn="ctr">
+              <a:buFont typeface="Arial" panose="020B0604020202020204" pitchFamily="34" charset="0"/>
+              <a:buChar char="•"/>
+            </a:pPr>
+            <a:r>
+              <a:rPr lang="ar-SA" sz="3200" b="1" dirty="0"/>
+              <a:t>هو الشاشة الرئيسية التي تظهر عند تشغيل الكمبيوتر، ويحتوي على أيقونات تمثل البرامج والملفات والمجلدات، كما يمكن تغيير خلفيته حسب الرغبة</a:t>
+            </a:r>
+            <a:r>
+              <a:rPr lang="fr-FR" sz="3200" b="1" dirty="0"/>
+              <a:t>.</a:t>
+            </a:r>
+            <a:endParaRPr lang="ar-DZ" sz="3200" dirty="0"/>
+          </a:p>
+          <a:p>
+            <a:pPr marL="457200" indent="-457200" algn="r" rtl="1" fontAlgn="ctr">
+              <a:buFont typeface="Arial" panose="020B0604020202020204" pitchFamily="34" charset="0"/>
+              <a:buChar char="•"/>
+            </a:pPr>
+            <a:r>
+              <a:rPr lang="ar-DZ" sz="3200" b="1" dirty="0"/>
+              <a:t>يمتد أفقيا أسفل الشاشة، يحتوى على الزر ابدأ </a:t>
+            </a:r>
+            <a:r>
+              <a:rPr lang="fr-FR" sz="3200" b="1" dirty="0"/>
+              <a:t>Démarrer</a:t>
+            </a:r>
+            <a:r>
+              <a:rPr lang="ar-DZ" sz="3200" b="1" dirty="0"/>
+              <a:t> ، الساعة، التاريخ، أداة ضبط اللغة و البرامج المفتوحة.</a:t>
+            </a:r>
+            <a:endParaRPr lang="ar-DZ" sz="3200" dirty="0"/>
+          </a:p>
+        </p:txBody>
+      </p:sp>
     </p:spTree>
+    <p:extLst>
+      <p:ext uri="{BB962C8B-B14F-4D97-AF65-F5344CB8AC3E}">
+        <p14:creationId xmlns:p14="http://schemas.microsoft.com/office/powerpoint/2010/main" val="2217613158"/>
+      </p:ext>
+    </p:extLst>
   </p:cSld>
   <p:clrMapOvr>
     <a:masterClrMapping/>
@@ -3906,149 +4104,1404 @@
       </p:grpSpPr>
       <p:sp>
         <p:nvSpPr>
-          <p:cNvPr id="2" name="Titre 1"/>
-          <p:cNvSpPr>
-            <a:spLocks noGrp="1"/>
-          </p:cNvSpPr>
-          <p:nvPr>
-            <p:ph type="title"/>
-          </p:nvPr>
-        </p:nvSpPr>
+          <p:cNvPr id="6" name="Rectangle 5"/>
+          <p:cNvSpPr>
+            <a:spLocks noChangeArrowheads="1"/>
+          </p:cNvSpPr>
+          <p:nvPr/>
+        </p:nvSpPr>
+        <p:spPr bwMode="auto">
+          <a:xfrm>
+            <a:off x="4829578" y="687878"/>
+            <a:ext cx="184731" cy="369332"/>
+          </a:xfrm>
+          <a:prstGeom prst="rect">
+            <a:avLst/>
+          </a:prstGeom>
+          <a:noFill/>
+          <a:ln>
+            <a:noFill/>
+          </a:ln>
+          <a:effectLst/>
+          <a:extLst>
+            <a:ext uri="{909E8E84-426E-40DD-AFC4-6F175D3DCCD1}">
+              <a14:hiddenFill xmlns:a14="http://schemas.microsoft.com/office/drawing/2010/main">
+                <a:solidFill>
+                  <a:schemeClr val="accent1"/>
+                </a:solidFill>
+              </a14:hiddenFill>
+            </a:ext>
+            <a:ext uri="{91240B29-F687-4F45-9708-019B960494DF}">
+              <a14:hiddenLine xmlns:a14="http://schemas.microsoft.com/office/drawing/2010/main" w="9525">
+                <a:solidFill>
+                  <a:schemeClr val="tx1"/>
+                </a:solidFill>
+                <a:miter lim="800000"/>
+                <a:headEnd/>
+                <a:tailEnd/>
+              </a14:hiddenLine>
+            </a:ext>
+            <a:ext uri="{AF507438-7753-43E0-B8FC-AC1667EBCBE1}">
+              <a14:hiddenEffects xmlns:a14="http://schemas.microsoft.com/office/drawing/2010/main">
+                <a:effectLst>
+                  <a:outerShdw dist="35921" dir="2700000" algn="ctr" rotWithShape="0">
+                    <a:schemeClr val="bg2"/>
+                  </a:outerShdw>
+                </a:effectLst>
+              </a14:hiddenEffects>
+            </a:ext>
+          </a:extLst>
+        </p:spPr>
+        <p:txBody>
+          <a:bodyPr vert="horz" wrap="none" lIns="91440" tIns="45720" rIns="91440" bIns="45720" numCol="1" anchor="ctr" anchorCtr="0" compatLnSpc="1">
+            <a:prstTxWarp prst="textNoShape">
+              <a:avLst/>
+            </a:prstTxWarp>
+            <a:spAutoFit/>
+          </a:bodyPr>
+          <a:lstStyle/>
+          <a:p>
+            <a:pPr marL="0" marR="0" lvl="0" indent="0" algn="l" defTabSz="914400" rtl="0" eaLnBrk="0" fontAlgn="base" latinLnBrk="0" hangingPunct="0">
+              <a:lnSpc>
+                <a:spcPct val="100000"/>
+              </a:lnSpc>
+              <a:spcBef>
+                <a:spcPct val="0"/>
+              </a:spcBef>
+              <a:spcAft>
+                <a:spcPct val="0"/>
+              </a:spcAft>
+              <a:buClrTx/>
+              <a:buSzTx/>
+              <a:buFontTx/>
+              <a:buNone/>
+              <a:tabLst/>
+            </a:pPr>
+            <a:endParaRPr kumimoji="0" lang="fr-FR" sz="1800" b="1" i="0" u="none" strike="noStrike" cap="none" normalizeH="0" baseline="0" dirty="0" smtClean="0">
+              <a:ln>
+                <a:noFill/>
+              </a:ln>
+              <a:solidFill>
+                <a:schemeClr val="tx1"/>
+              </a:solidFill>
+              <a:effectLst/>
+              <a:latin typeface="Arial" panose="020B0604020202020204" pitchFamily="34" charset="0"/>
+              <a:cs typeface="Arial" panose="020B0604020202020204" pitchFamily="34" charset="0"/>
+            </a:endParaRPr>
+          </a:p>
+        </p:txBody>
+      </p:sp>
+      <p:sp>
+        <p:nvSpPr>
+          <p:cNvPr id="8" name="Rectangle 2"/>
+          <p:cNvSpPr>
+            <a:spLocks noChangeArrowheads="1"/>
+          </p:cNvSpPr>
+          <p:nvPr/>
+        </p:nvSpPr>
+        <p:spPr bwMode="auto">
+          <a:xfrm>
+            <a:off x="0" y="272380"/>
+            <a:ext cx="11849623" cy="1569660"/>
+          </a:xfrm>
+          <a:prstGeom prst="rect">
+            <a:avLst/>
+          </a:prstGeom>
+          <a:noFill/>
+          <a:ln>
+            <a:noFill/>
+          </a:ln>
+          <a:effectLst/>
+          <a:extLst>
+            <a:ext uri="{909E8E84-426E-40DD-AFC4-6F175D3DCCD1}">
+              <a14:hiddenFill xmlns:a14="http://schemas.microsoft.com/office/drawing/2010/main">
+                <a:solidFill>
+                  <a:schemeClr val="accent1"/>
+                </a:solidFill>
+              </a14:hiddenFill>
+            </a:ext>
+            <a:ext uri="{91240B29-F687-4F45-9708-019B960494DF}">
+              <a14:hiddenLine xmlns:a14="http://schemas.microsoft.com/office/drawing/2010/main" w="9525">
+                <a:solidFill>
+                  <a:schemeClr val="tx1"/>
+                </a:solidFill>
+                <a:miter lim="800000"/>
+                <a:headEnd/>
+                <a:tailEnd/>
+              </a14:hiddenLine>
+            </a:ext>
+            <a:ext uri="{AF507438-7753-43E0-B8FC-AC1667EBCBE1}">
+              <a14:hiddenEffects xmlns:a14="http://schemas.microsoft.com/office/drawing/2010/main">
+                <a:effectLst>
+                  <a:outerShdw dist="35921" dir="2700000" algn="ctr" rotWithShape="0">
+                    <a:schemeClr val="bg2"/>
+                  </a:outerShdw>
+                </a:effectLst>
+              </a14:hiddenEffects>
+            </a:ext>
+          </a:extLst>
+        </p:spPr>
+        <p:txBody>
+          <a:bodyPr vert="horz" wrap="square" lIns="91440" tIns="45720" rIns="91440" bIns="45720" numCol="1" anchor="ctr" anchorCtr="0" compatLnSpc="1">
+            <a:prstTxWarp prst="textNoShape">
+              <a:avLst/>
+            </a:prstTxWarp>
+            <a:spAutoFit/>
+          </a:bodyPr>
+          <a:lstStyle/>
+          <a:p>
+            <a:pPr marL="571500" lvl="0" indent="-571500" algn="r" rtl="1" eaLnBrk="0" fontAlgn="base" hangingPunct="0">
+              <a:spcBef>
+                <a:spcPct val="0"/>
+              </a:spcBef>
+              <a:spcAft>
+                <a:spcPct val="0"/>
+              </a:spcAft>
+              <a:buFont typeface="+mj-lt"/>
+              <a:buAutoNum type="romanUcPeriod"/>
+            </a:pPr>
+            <a:r>
+              <a:rPr lang="ar-DZ" sz="3200" b="1" u="sng" dirty="0" smtClean="0">
+                <a:solidFill>
+                  <a:srgbClr val="FF0000"/>
+                </a:solidFill>
+              </a:rPr>
+              <a:t>واجهة </a:t>
+            </a:r>
+            <a:r>
+              <a:rPr lang="ar-DZ" sz="3200" b="1" u="sng" dirty="0">
+                <a:solidFill>
+                  <a:srgbClr val="FF0000"/>
+                </a:solidFill>
+              </a:rPr>
+              <a:t>نظام التشغيل :</a:t>
+            </a:r>
+          </a:p>
+          <a:p>
+            <a:pPr lvl="0" algn="r" rtl="1" eaLnBrk="0" fontAlgn="base" hangingPunct="0">
+              <a:spcBef>
+                <a:spcPct val="0"/>
+              </a:spcBef>
+              <a:spcAft>
+                <a:spcPct val="0"/>
+              </a:spcAft>
+            </a:pPr>
+            <a:r>
+              <a:rPr lang="ar-DZ" sz="3200" dirty="0"/>
+              <a:t>هي ما يظهر على شاشة الكمبيوتر عند تشغيله، ونستخدمها لإعطاء الأوامر للحاسوب باستخدام الفأرة ولوحة المفاتيح.</a:t>
+            </a:r>
+            <a:endParaRPr kumimoji="0" lang="en-US" sz="3200" b="0" i="0" u="none" strike="noStrike" cap="none" normalizeH="0" baseline="0" dirty="0" smtClean="0">
+              <a:ln>
+                <a:noFill/>
+              </a:ln>
+              <a:solidFill>
+                <a:schemeClr val="tx1"/>
+              </a:solidFill>
+              <a:effectLst/>
+            </a:endParaRPr>
+          </a:p>
+        </p:txBody>
+      </p:sp>
+      <p:pic>
+        <p:nvPicPr>
+          <p:cNvPr id="3" name="Image 2"/>
+          <p:cNvPicPr>
+            <a:picLocks noChangeAspect="1"/>
+          </p:cNvPicPr>
+          <p:nvPr/>
+        </p:nvPicPr>
+        <p:blipFill>
+          <a:blip r:embed="rId2" cstate="print">
+            <a:extLst>
+              <a:ext uri="{28A0092B-C50C-407E-A947-70E740481C1C}">
+                <a14:useLocalDpi xmlns:a14="http://schemas.microsoft.com/office/drawing/2010/main" val="0"/>
+              </a:ext>
+            </a:extLst>
+          </a:blip>
+          <a:stretch>
+            <a:fillRect/>
+          </a:stretch>
+        </p:blipFill>
         <p:spPr>
           <a:xfrm>
-            <a:off x="323528" y="188640"/>
-            <a:ext cx="8229600" cy="1143000"/>
-          </a:xfrm>
-        </p:spPr>
-        <p:txBody>
-          <a:bodyPr>
-            <a:normAutofit/>
-          </a:bodyPr>
-          <a:lstStyle/>
-          <a:p>
-            <a:r>
-              <a:rPr lang="ar-DZ" b="1" u="sng" dirty="0" smtClean="0">
-                <a:solidFill>
-                  <a:srgbClr val="FF0000"/>
-                </a:solidFill>
-              </a:rPr>
-              <a:t>تدريب :</a:t>
-            </a:r>
-            <a:endParaRPr lang="fr-FR" b="1" dirty="0"/>
-          </a:p>
-        </p:txBody>
-      </p:sp>
-      <p:sp>
-        <p:nvSpPr>
-          <p:cNvPr id="3" name="Titre 1"/>
-          <p:cNvSpPr txBox="1">
-            <a:spLocks/>
-          </p:cNvSpPr>
-          <p:nvPr/>
-        </p:nvSpPr>
-        <p:spPr>
-          <a:xfrm>
-            <a:off x="323528" y="1628800"/>
-            <a:ext cx="8229600" cy="3528392"/>
+            <a:off x="2838711" y="1842040"/>
+            <a:ext cx="6172200" cy="4937760"/>
           </a:xfrm>
           <a:prstGeom prst="rect">
             <a:avLst/>
           </a:prstGeom>
         </p:spPr>
-        <p:txBody>
-          <a:bodyPr vert="horz" lIns="91440" tIns="45720" rIns="91440" bIns="45720" rtlCol="0" anchor="ctr">
-            <a:normAutofit fontScale="90000" lnSpcReduction="20000"/>
+      </p:pic>
+    </p:spTree>
+    <p:extLst>
+      <p:ext uri="{BB962C8B-B14F-4D97-AF65-F5344CB8AC3E}">
+        <p14:creationId xmlns:p14="http://schemas.microsoft.com/office/powerpoint/2010/main" val="4076906244"/>
+      </p:ext>
+    </p:extLst>
+  </p:cSld>
+  <p:clrMapOvr>
+    <a:masterClrMapping/>
+  </p:clrMapOvr>
+  <p:transition spd="slow">
+    <p:push dir="u"/>
+  </p:transition>
+  <p:timing>
+    <p:tnLst>
+      <p:par>
+        <p:cTn id="1" dur="indefinite" restart="never" nodeType="tmRoot"/>
+      </p:par>
+    </p:tnLst>
+  </p:timing>
+</p:sld>
+</file>
+
+<file path=ppt/slides/slide5.xml><?xml version="1.0" encoding="utf-8"?>
+<p:sld xmlns:a="http://schemas.openxmlformats.org/drawingml/2006/main" xmlns:r="http://schemas.openxmlformats.org/officeDocument/2006/relationships" xmlns:p="http://schemas.openxmlformats.org/presentationml/2006/main">
+  <p:cSld>
+    <p:spTree>
+      <p:nvGrpSpPr>
+        <p:cNvPr id="1" name=""/>
+        <p:cNvGrpSpPr/>
+        <p:nvPr/>
+      </p:nvGrpSpPr>
+      <p:grpSpPr>
+        <a:xfrm>
+          <a:off x="0" y="0"/>
+          <a:ext cx="0" cy="0"/>
+          <a:chOff x="0" y="0"/>
+          <a:chExt cx="0" cy="0"/>
+        </a:xfrm>
+      </p:grpSpPr>
+      <p:pic>
+        <p:nvPicPr>
+          <p:cNvPr id="3073" name="Image 8"/>
+          <p:cNvPicPr>
+            <a:picLocks noChangeAspect="1" noChangeArrowheads="1"/>
+          </p:cNvPicPr>
+          <p:nvPr/>
+        </p:nvPicPr>
+        <p:blipFill>
+          <a:blip r:embed="rId2" cstate="print">
+            <a:extLst>
+              <a:ext uri="{28A0092B-C50C-407E-A947-70E740481C1C}">
+                <a14:useLocalDpi xmlns:a14="http://schemas.microsoft.com/office/drawing/2010/main" val="0"/>
+              </a:ext>
+            </a:extLst>
+          </a:blip>
+          <a:srcRect/>
+          <a:stretch>
+            <a:fillRect/>
+          </a:stretch>
+        </p:blipFill>
+        <p:spPr bwMode="auto">
+          <a:xfrm>
+            <a:off x="3786389" y="3474714"/>
+            <a:ext cx="1971675" cy="45719"/>
+          </a:xfrm>
+          <a:prstGeom prst="rect">
+            <a:avLst/>
+          </a:prstGeom>
+          <a:noFill/>
+          <a:extLst>
+            <a:ext uri="{909E8E84-426E-40DD-AFC4-6F175D3DCCD1}">
+              <a14:hiddenFill xmlns:a14="http://schemas.microsoft.com/office/drawing/2010/main">
+                <a:solidFill>
+                  <a:srgbClr val="FFFFFF"/>
+                </a:solidFill>
+              </a14:hiddenFill>
+            </a:ext>
+          </a:extLst>
+        </p:spPr>
+      </p:pic>
+      <p:sp>
+        <p:nvSpPr>
+          <p:cNvPr id="3" name="Zone de texte 6"/>
+          <p:cNvSpPr txBox="1"/>
+          <p:nvPr/>
+        </p:nvSpPr>
+        <p:spPr>
+          <a:xfrm>
+            <a:off x="3830204" y="3122924"/>
+            <a:ext cx="2080895" cy="45719"/>
+          </a:xfrm>
+          <a:prstGeom prst="rect">
+            <a:avLst/>
+          </a:prstGeom>
+          <a:noFill/>
+          <a:ln w="6350">
+            <a:noFill/>
+          </a:ln>
+          <a:effectLst/>
+        </p:spPr>
+        <p:style>
+          <a:lnRef idx="0">
+            <a:schemeClr val="accent1"/>
+          </a:lnRef>
+          <a:fillRef idx="0">
+            <a:schemeClr val="accent1"/>
+          </a:fillRef>
+          <a:effectRef idx="0">
+            <a:schemeClr val="accent1"/>
+          </a:effectRef>
+          <a:fontRef idx="minor">
+            <a:schemeClr val="dk1"/>
+          </a:fontRef>
+        </p:style>
+        <p:txBody>
+          <a:bodyPr rot="0" spcFirstLastPara="0" vert="horz" wrap="square" lIns="91440" tIns="45720" rIns="91440" bIns="45720" numCol="1" spcCol="0" rtlCol="0" fromWordArt="0" anchor="t" anchorCtr="0" forceAA="0" compatLnSpc="1">
+            <a:prstTxWarp prst="textNoShape">
+              <a:avLst/>
+            </a:prstTxWarp>
+            <a:noAutofit/>
+          </a:bodyPr>
+          <a:lstStyle/>
+          <a:p>
+            <a:pPr>
+              <a:lnSpc>
+                <a:spcPct val="115000"/>
+              </a:lnSpc>
+              <a:spcAft>
+                <a:spcPts val="1000"/>
+              </a:spcAft>
+            </a:pPr>
+            <a:endParaRPr lang="fr-FR" sz="1600">
+              <a:effectLst/>
+              <a:ea typeface="Calibri" panose="020F0502020204030204" pitchFamily="34" charset="0"/>
+              <a:cs typeface="Arial" panose="020B0604020202020204" pitchFamily="34" charset="0"/>
+            </a:endParaRPr>
+          </a:p>
+        </p:txBody>
+      </p:sp>
+      <p:sp>
+        <p:nvSpPr>
+          <p:cNvPr id="2" name="Rectangle 3"/>
+          <p:cNvSpPr>
+            <a:spLocks noChangeArrowheads="1"/>
+          </p:cNvSpPr>
+          <p:nvPr/>
+        </p:nvSpPr>
+        <p:spPr bwMode="auto">
+          <a:xfrm>
+            <a:off x="3786389" y="2864737"/>
+            <a:ext cx="184731" cy="523220"/>
+          </a:xfrm>
+          <a:prstGeom prst="rect">
+            <a:avLst/>
+          </a:prstGeom>
+          <a:noFill/>
+          <a:ln>
+            <a:noFill/>
+          </a:ln>
+          <a:effectLst/>
+          <a:extLst>
+            <a:ext uri="{909E8E84-426E-40DD-AFC4-6F175D3DCCD1}">
+              <a14:hiddenFill xmlns:a14="http://schemas.microsoft.com/office/drawing/2010/main">
+                <a:solidFill>
+                  <a:schemeClr val="accent1"/>
+                </a:solidFill>
+              </a14:hiddenFill>
+            </a:ext>
+            <a:ext uri="{91240B29-F687-4F45-9708-019B960494DF}">
+              <a14:hiddenLine xmlns:a14="http://schemas.microsoft.com/office/drawing/2010/main" w="9525">
+                <a:solidFill>
+                  <a:schemeClr val="tx1"/>
+                </a:solidFill>
+                <a:miter lim="800000"/>
+                <a:headEnd/>
+                <a:tailEnd/>
+              </a14:hiddenLine>
+            </a:ext>
+            <a:ext uri="{AF507438-7753-43E0-B8FC-AC1667EBCBE1}">
+              <a14:hiddenEffects xmlns:a14="http://schemas.microsoft.com/office/drawing/2010/main">
+                <a:effectLst>
+                  <a:outerShdw dist="35921" dir="2700000" algn="ctr" rotWithShape="0">
+                    <a:schemeClr val="bg2"/>
+                  </a:outerShdw>
+                </a:effectLst>
+              </a14:hiddenEffects>
+            </a:ext>
+          </a:extLst>
+        </p:spPr>
+        <p:txBody>
+          <a:bodyPr vert="horz" wrap="none" lIns="91440" tIns="45720" rIns="91440" bIns="45720" numCol="1" anchor="ctr" anchorCtr="0" compatLnSpc="1">
+            <a:prstTxWarp prst="textNoShape">
+              <a:avLst/>
+            </a:prstTxWarp>
+            <a:spAutoFit/>
+          </a:bodyPr>
+          <a:lstStyle/>
+          <a:p>
+            <a:endParaRPr lang="fr-FR" sz="2800"/>
+          </a:p>
+        </p:txBody>
+      </p:sp>
+      <p:sp>
+        <p:nvSpPr>
+          <p:cNvPr id="4" name="Rectangle 4"/>
+          <p:cNvSpPr>
+            <a:spLocks noChangeArrowheads="1"/>
+          </p:cNvSpPr>
+          <p:nvPr/>
+        </p:nvSpPr>
+        <p:spPr bwMode="auto">
+          <a:xfrm>
+            <a:off x="266700" y="352487"/>
+            <a:ext cx="11626851" cy="5632311"/>
+          </a:xfrm>
+          <a:prstGeom prst="rect">
+            <a:avLst/>
+          </a:prstGeom>
+          <a:noFill/>
+          <a:ln>
+            <a:noFill/>
+          </a:ln>
+          <a:effectLst/>
+          <a:extLst>
+            <a:ext uri="{909E8E84-426E-40DD-AFC4-6F175D3DCCD1}">
+              <a14:hiddenFill xmlns:a14="http://schemas.microsoft.com/office/drawing/2010/main">
+                <a:solidFill>
+                  <a:schemeClr val="accent1"/>
+                </a:solidFill>
+              </a14:hiddenFill>
+            </a:ext>
+            <a:ext uri="{91240B29-F687-4F45-9708-019B960494DF}">
+              <a14:hiddenLine xmlns:a14="http://schemas.microsoft.com/office/drawing/2010/main" w="9525">
+                <a:solidFill>
+                  <a:schemeClr val="tx1"/>
+                </a:solidFill>
+                <a:miter lim="800000"/>
+                <a:headEnd/>
+                <a:tailEnd/>
+              </a14:hiddenLine>
+            </a:ext>
+            <a:ext uri="{AF507438-7753-43E0-B8FC-AC1667EBCBE1}">
+              <a14:hiddenEffects xmlns:a14="http://schemas.microsoft.com/office/drawing/2010/main">
+                <a:effectLst>
+                  <a:outerShdw dist="35921" dir="2700000" algn="ctr" rotWithShape="0">
+                    <a:schemeClr val="bg2"/>
+                  </a:outerShdw>
+                </a:effectLst>
+              </a14:hiddenEffects>
+            </a:ext>
+          </a:extLst>
+        </p:spPr>
+        <p:txBody>
+          <a:bodyPr vert="horz" wrap="square" lIns="91440" tIns="45720" rIns="91440" bIns="45720" numCol="1" anchor="ctr" anchorCtr="0" compatLnSpc="1">
+            <a:prstTxWarp prst="textNoShape">
+              <a:avLst/>
+            </a:prstTxWarp>
+            <a:spAutoFit/>
+          </a:bodyPr>
+          <a:lstStyle/>
+          <a:p>
+            <a:pPr marL="571500" lvl="0" indent="-571500" algn="r" rtl="1">
+              <a:buFont typeface="+mj-lt"/>
+              <a:buAutoNum type="romanUcPeriod" startAt="2"/>
+            </a:pPr>
+            <a:r>
+              <a:rPr lang="ar-DZ" sz="3600" b="1" u="sng" dirty="0" smtClean="0">
+                <a:solidFill>
+                  <a:srgbClr val="FF0000"/>
+                </a:solidFill>
+              </a:rPr>
+              <a:t>مكونات </a:t>
+            </a:r>
+            <a:r>
+              <a:rPr lang="ar-DZ" sz="3600" b="1" u="sng" dirty="0">
+                <a:solidFill>
+                  <a:srgbClr val="FF0000"/>
+                </a:solidFill>
+              </a:rPr>
+              <a:t>واجهة </a:t>
+            </a:r>
+            <a:r>
+              <a:rPr lang="ar-DZ" sz="3600" b="1" u="sng" dirty="0" smtClean="0">
+                <a:solidFill>
+                  <a:srgbClr val="FF0000"/>
+                </a:solidFill>
+              </a:rPr>
+              <a:t>ويندوز</a:t>
+            </a:r>
+            <a:r>
+              <a:rPr lang="fr-FR" sz="3600" b="1" u="sng" dirty="0" smtClean="0">
+                <a:solidFill>
+                  <a:srgbClr val="FF0000"/>
+                </a:solidFill>
+              </a:rPr>
+              <a:t>:</a:t>
+            </a:r>
+            <a:r>
+              <a:rPr lang="fr-FR" sz="3600" b="1" u="sng" dirty="0" smtClean="0">
+                <a:solidFill>
+                  <a:srgbClr val="FF0000"/>
+                </a:solidFill>
+              </a:rPr>
+              <a:t> </a:t>
+            </a:r>
+            <a:r>
+              <a:rPr lang="fr-FR" sz="3600" b="1" u="sng" dirty="0" smtClean="0">
+                <a:solidFill>
+                  <a:srgbClr val="FF0000"/>
+                </a:solidFill>
+              </a:rPr>
+              <a:t>Windows </a:t>
+            </a:r>
+            <a:endParaRPr lang="fr-FR" sz="3600" b="1" u="sng" dirty="0">
+              <a:solidFill>
+                <a:srgbClr val="FF0000"/>
+              </a:solidFill>
+            </a:endParaRPr>
+          </a:p>
+          <a:p>
+            <a:pPr lvl="0" algn="r" rtl="1"/>
+            <a:endParaRPr lang="fr-FR" sz="3600" b="1" u="sng" dirty="0">
+              <a:solidFill>
+                <a:srgbClr val="FF0000"/>
+              </a:solidFill>
+            </a:endParaRPr>
+          </a:p>
+          <a:p>
+            <a:pPr marL="971550" lvl="1" indent="-514350" algn="r" rtl="1">
+              <a:buFont typeface="+mj-lt"/>
+              <a:buAutoNum type="arabicPeriod"/>
+            </a:pPr>
+            <a:r>
+              <a:rPr lang="ar-DZ" sz="3600" b="1" u="sng" dirty="0" smtClean="0">
+                <a:solidFill>
+                  <a:srgbClr val="00B050"/>
+                </a:solidFill>
+              </a:rPr>
+              <a:t>سطح </a:t>
+            </a:r>
+            <a:r>
+              <a:rPr lang="ar-DZ" sz="3600" b="1" u="sng" dirty="0">
+                <a:solidFill>
+                  <a:srgbClr val="00B050"/>
+                </a:solidFill>
+              </a:rPr>
+              <a:t>المكتب </a:t>
+            </a:r>
+            <a:r>
+              <a:rPr lang="fr-FR" sz="3600" b="1" u="sng" dirty="0" smtClean="0">
+                <a:solidFill>
+                  <a:srgbClr val="00B050"/>
+                </a:solidFill>
+              </a:rPr>
+              <a:t>: Bureau</a:t>
+            </a:r>
+          </a:p>
+          <a:p>
+            <a:pPr lvl="1" algn="r" rtl="1"/>
+            <a:r>
+              <a:rPr lang="ar-DZ" sz="3600" dirty="0" smtClean="0"/>
+              <a:t>هو الشاشة الرئيسية التي تظهر عند تشغيل الكمبيوتر، ويحتوي على أيقونات تمثل البرامج والملفات والمجلدات، كما يمكن تغيير خلفيته حسب الرغبة.</a:t>
+            </a:r>
+          </a:p>
+          <a:p>
+            <a:pPr lvl="1" algn="r" rtl="1"/>
+            <a:endParaRPr lang="ar-DZ" sz="3600" b="1" dirty="0">
+              <a:solidFill>
+                <a:srgbClr val="FF0000"/>
+              </a:solidFill>
+            </a:endParaRPr>
+          </a:p>
+          <a:p>
+            <a:pPr lvl="1" algn="r" rtl="1"/>
+            <a:r>
+              <a:rPr lang="ar-DZ" sz="3600" b="1" u="sng" dirty="0" smtClean="0">
+                <a:solidFill>
+                  <a:srgbClr val="00B050"/>
+                </a:solidFill>
+              </a:rPr>
+              <a:t>2. </a:t>
+            </a:r>
+            <a:r>
+              <a:rPr lang="ar-DZ" sz="3600" b="1" u="sng" dirty="0" smtClean="0">
+                <a:solidFill>
+                  <a:srgbClr val="00B050"/>
+                </a:solidFill>
+              </a:rPr>
+              <a:t>الأيقونات </a:t>
+            </a:r>
+            <a:r>
+              <a:rPr lang="fr-FR" sz="3600" b="1" u="sng" dirty="0" smtClean="0">
+                <a:solidFill>
+                  <a:srgbClr val="00B050"/>
+                </a:solidFill>
+              </a:rPr>
+              <a:t>: Icônes</a:t>
+            </a:r>
+          </a:p>
+          <a:p>
+            <a:pPr lvl="1" algn="r" rtl="1"/>
+            <a:r>
+              <a:rPr lang="ar-DZ" sz="3600" dirty="0" smtClean="0"/>
+              <a:t>ي </a:t>
+            </a:r>
+            <a:r>
+              <a:rPr lang="ar-DZ" sz="3600" dirty="0"/>
+              <a:t>رموز صغيرة تمثل البرامج، الملفات، المجلدات أو الأدوات في نظام التشغيل، وتظهر على شاشة الحاسوب (على سطح المكتب أو في شريط المهام أو داخل النوافذ) لتسهيل التفاعل مع النظام</a:t>
+            </a:r>
+            <a:r>
+              <a:rPr lang="ar-DZ" sz="3600" dirty="0" smtClean="0"/>
+              <a:t>.</a:t>
+            </a:r>
+            <a:endParaRPr lang="ar-DZ" sz="3600" dirty="0"/>
+          </a:p>
+        </p:txBody>
+      </p:sp>
+    </p:spTree>
+    <p:extLst>
+      <p:ext uri="{BB962C8B-B14F-4D97-AF65-F5344CB8AC3E}">
+        <p14:creationId xmlns:p14="http://schemas.microsoft.com/office/powerpoint/2010/main" val="816850053"/>
+      </p:ext>
+    </p:extLst>
+  </p:cSld>
+  <p:clrMapOvr>
+    <a:masterClrMapping/>
+  </p:clrMapOvr>
+  <p:transition spd="slow">
+    <p:push dir="u"/>
+  </p:transition>
+  <p:timing>
+    <p:tnLst>
+      <p:par>
+        <p:cTn id="1" dur="indefinite" restart="never" nodeType="tmRoot"/>
+      </p:par>
+    </p:tnLst>
+  </p:timing>
+</p:sld>
+</file>
+
+<file path=ppt/slides/slide6.xml><?xml version="1.0" encoding="utf-8"?>
+<p:sld xmlns:a="http://schemas.openxmlformats.org/drawingml/2006/main" xmlns:r="http://schemas.openxmlformats.org/officeDocument/2006/relationships" xmlns:p="http://schemas.openxmlformats.org/presentationml/2006/main">
+  <p:cSld>
+    <p:spTree>
+      <p:nvGrpSpPr>
+        <p:cNvPr id="1" name=""/>
+        <p:cNvGrpSpPr/>
+        <p:nvPr/>
+      </p:nvGrpSpPr>
+      <p:grpSpPr>
+        <a:xfrm>
+          <a:off x="0" y="0"/>
+          <a:ext cx="0" cy="0"/>
+          <a:chOff x="0" y="0"/>
+          <a:chExt cx="0" cy="0"/>
+        </a:xfrm>
+      </p:grpSpPr>
+      <p:sp>
+        <p:nvSpPr>
+          <p:cNvPr id="2" name="Rectangle 2"/>
+          <p:cNvSpPr>
+            <a:spLocks noChangeArrowheads="1"/>
+          </p:cNvSpPr>
+          <p:nvPr/>
+        </p:nvSpPr>
+        <p:spPr bwMode="auto">
+          <a:xfrm>
+            <a:off x="0" y="0"/>
+            <a:ext cx="12192000" cy="6186309"/>
+          </a:xfrm>
+          <a:prstGeom prst="rect">
+            <a:avLst/>
+          </a:prstGeom>
+          <a:noFill/>
+          <a:ln>
+            <a:noFill/>
+          </a:ln>
+          <a:effectLst/>
+          <a:extLst>
+            <a:ext uri="{909E8E84-426E-40DD-AFC4-6F175D3DCCD1}">
+              <a14:hiddenFill xmlns:a14="http://schemas.microsoft.com/office/drawing/2010/main">
+                <a:solidFill>
+                  <a:schemeClr val="accent1"/>
+                </a:solidFill>
+              </a14:hiddenFill>
+            </a:ext>
+            <a:ext uri="{91240B29-F687-4F45-9708-019B960494DF}">
+              <a14:hiddenLine xmlns:a14="http://schemas.microsoft.com/office/drawing/2010/main" w="9525">
+                <a:solidFill>
+                  <a:schemeClr val="tx1"/>
+                </a:solidFill>
+                <a:miter lim="800000"/>
+                <a:headEnd/>
+                <a:tailEnd/>
+              </a14:hiddenLine>
+            </a:ext>
+            <a:ext uri="{AF507438-7753-43E0-B8FC-AC1667EBCBE1}">
+              <a14:hiddenEffects xmlns:a14="http://schemas.microsoft.com/office/drawing/2010/main">
+                <a:effectLst>
+                  <a:outerShdw dist="35921" dir="2700000" algn="ctr" rotWithShape="0">
+                    <a:schemeClr val="bg2"/>
+                  </a:outerShdw>
+                </a:effectLst>
+              </a14:hiddenEffects>
+            </a:ext>
+          </a:extLst>
+        </p:spPr>
+        <p:txBody>
+          <a:bodyPr vert="horz" wrap="square" lIns="91440" tIns="45720" rIns="91440" bIns="45720" numCol="1" anchor="ctr" anchorCtr="0" compatLnSpc="1">
+            <a:prstTxWarp prst="textNoShape">
+              <a:avLst/>
+            </a:prstTxWarp>
+            <a:spAutoFit/>
           </a:bodyPr>
           <a:lstStyle>
-            <a:lvl1pPr algn="ctr" defTabSz="914400" rtl="0" eaLnBrk="1" latinLnBrk="0" hangingPunct="1">
+            <a:lvl1pPr eaLnBrk="0" fontAlgn="base" hangingPunct="0">
               <a:spcBef>
                 <a:spcPct val="0"/>
               </a:spcBef>
-              <a:buNone/>
-              <a:defRPr sz="4400" kern="1200">
+              <a:spcAft>
+                <a:spcPct val="0"/>
+              </a:spcAft>
+              <a:tabLst>
+                <a:tab pos="2838450" algn="l"/>
+              </a:tabLst>
+              <a:defRPr>
                 <a:solidFill>
                   <a:schemeClr val="tx1"/>
                 </a:solidFill>
-                <a:latin typeface="+mj-lt"/>
-                <a:ea typeface="+mj-ea"/>
-                <a:cs typeface="+mj-cs"/>
+                <a:latin typeface="Arial" panose="020B0604020202020204" pitchFamily="34" charset="0"/>
               </a:defRPr>
             </a:lvl1pPr>
+            <a:lvl2pPr eaLnBrk="0" fontAlgn="base" hangingPunct="0">
+              <a:spcBef>
+                <a:spcPct val="0"/>
+              </a:spcBef>
+              <a:spcAft>
+                <a:spcPct val="0"/>
+              </a:spcAft>
+              <a:tabLst>
+                <a:tab pos="2838450" algn="l"/>
+              </a:tabLst>
+              <a:defRPr>
+                <a:solidFill>
+                  <a:schemeClr val="tx1"/>
+                </a:solidFill>
+                <a:latin typeface="Arial" panose="020B0604020202020204" pitchFamily="34" charset="0"/>
+              </a:defRPr>
+            </a:lvl2pPr>
+            <a:lvl3pPr eaLnBrk="0" fontAlgn="base" hangingPunct="0">
+              <a:spcBef>
+                <a:spcPct val="0"/>
+              </a:spcBef>
+              <a:spcAft>
+                <a:spcPct val="0"/>
+              </a:spcAft>
+              <a:tabLst>
+                <a:tab pos="2838450" algn="l"/>
+              </a:tabLst>
+              <a:defRPr>
+                <a:solidFill>
+                  <a:schemeClr val="tx1"/>
+                </a:solidFill>
+                <a:latin typeface="Arial" panose="020B0604020202020204" pitchFamily="34" charset="0"/>
+              </a:defRPr>
+            </a:lvl3pPr>
+            <a:lvl4pPr eaLnBrk="0" fontAlgn="base" hangingPunct="0">
+              <a:spcBef>
+                <a:spcPct val="0"/>
+              </a:spcBef>
+              <a:spcAft>
+                <a:spcPct val="0"/>
+              </a:spcAft>
+              <a:tabLst>
+                <a:tab pos="2838450" algn="l"/>
+              </a:tabLst>
+              <a:defRPr>
+                <a:solidFill>
+                  <a:schemeClr val="tx1"/>
+                </a:solidFill>
+                <a:latin typeface="Arial" panose="020B0604020202020204" pitchFamily="34" charset="0"/>
+              </a:defRPr>
+            </a:lvl4pPr>
+            <a:lvl5pPr eaLnBrk="0" fontAlgn="base" hangingPunct="0">
+              <a:spcBef>
+                <a:spcPct val="0"/>
+              </a:spcBef>
+              <a:spcAft>
+                <a:spcPct val="0"/>
+              </a:spcAft>
+              <a:tabLst>
+                <a:tab pos="2838450" algn="l"/>
+              </a:tabLst>
+              <a:defRPr>
+                <a:solidFill>
+                  <a:schemeClr val="tx1"/>
+                </a:solidFill>
+                <a:latin typeface="Arial" panose="020B0604020202020204" pitchFamily="34" charset="0"/>
+              </a:defRPr>
+            </a:lvl5pPr>
+            <a:lvl6pPr eaLnBrk="0" fontAlgn="base" hangingPunct="0">
+              <a:spcBef>
+                <a:spcPct val="0"/>
+              </a:spcBef>
+              <a:spcAft>
+                <a:spcPct val="0"/>
+              </a:spcAft>
+              <a:tabLst>
+                <a:tab pos="2838450" algn="l"/>
+              </a:tabLst>
+              <a:defRPr>
+                <a:solidFill>
+                  <a:schemeClr val="tx1"/>
+                </a:solidFill>
+                <a:latin typeface="Arial" panose="020B0604020202020204" pitchFamily="34" charset="0"/>
+              </a:defRPr>
+            </a:lvl6pPr>
+            <a:lvl7pPr eaLnBrk="0" fontAlgn="base" hangingPunct="0">
+              <a:spcBef>
+                <a:spcPct val="0"/>
+              </a:spcBef>
+              <a:spcAft>
+                <a:spcPct val="0"/>
+              </a:spcAft>
+              <a:tabLst>
+                <a:tab pos="2838450" algn="l"/>
+              </a:tabLst>
+              <a:defRPr>
+                <a:solidFill>
+                  <a:schemeClr val="tx1"/>
+                </a:solidFill>
+                <a:latin typeface="Arial" panose="020B0604020202020204" pitchFamily="34" charset="0"/>
+              </a:defRPr>
+            </a:lvl7pPr>
+            <a:lvl8pPr eaLnBrk="0" fontAlgn="base" hangingPunct="0">
+              <a:spcBef>
+                <a:spcPct val="0"/>
+              </a:spcBef>
+              <a:spcAft>
+                <a:spcPct val="0"/>
+              </a:spcAft>
+              <a:tabLst>
+                <a:tab pos="2838450" algn="l"/>
+              </a:tabLst>
+              <a:defRPr>
+                <a:solidFill>
+                  <a:schemeClr val="tx1"/>
+                </a:solidFill>
+                <a:latin typeface="Arial" panose="020B0604020202020204" pitchFamily="34" charset="0"/>
+              </a:defRPr>
+            </a:lvl8pPr>
+            <a:lvl9pPr eaLnBrk="0" fontAlgn="base" hangingPunct="0">
+              <a:spcBef>
+                <a:spcPct val="0"/>
+              </a:spcBef>
+              <a:spcAft>
+                <a:spcPct val="0"/>
+              </a:spcAft>
+              <a:tabLst>
+                <a:tab pos="2838450" algn="l"/>
+              </a:tabLst>
+              <a:defRPr>
+                <a:solidFill>
+                  <a:schemeClr val="tx1"/>
+                </a:solidFill>
+                <a:latin typeface="Arial" panose="020B0604020202020204" pitchFamily="34" charset="0"/>
+              </a:defRPr>
+            </a:lvl9pPr>
           </a:lstStyle>
           <a:p>
+            <a:pPr marL="914400" lvl="1" indent="-457200" algn="r" rtl="1">
+              <a:buFont typeface="Wingdings" panose="05000000000000000000" pitchFamily="2" charset="2"/>
+              <a:buChar char="v"/>
+            </a:pPr>
+            <a:r>
+              <a:rPr lang="ar-DZ" sz="3600" b="1" u="sng" dirty="0" smtClean="0">
+                <a:solidFill>
+                  <a:srgbClr val="00B0F0"/>
+                </a:solidFill>
+                <a:cs typeface="+mj-cs"/>
+              </a:rPr>
+              <a:t>أنواع </a:t>
+            </a:r>
+            <a:r>
+              <a:rPr lang="ar-DZ" sz="3600" b="1" u="sng" dirty="0">
+                <a:solidFill>
+                  <a:srgbClr val="00B0F0"/>
+                </a:solidFill>
+                <a:cs typeface="+mj-cs"/>
+              </a:rPr>
+              <a:t>الأيقونات :</a:t>
+            </a:r>
+          </a:p>
+          <a:p>
+            <a:pPr lvl="2" algn="r" rtl="1"/>
+            <a:r>
+              <a:rPr lang="ar-DZ" sz="3600" b="1" u="sng" dirty="0" smtClean="0">
+                <a:solidFill>
+                  <a:srgbClr val="00B0F0"/>
+                </a:solidFill>
+                <a:cs typeface="+mj-cs"/>
+              </a:rPr>
+              <a:t>• أيقونات </a:t>
+            </a:r>
+            <a:r>
+              <a:rPr lang="ar-DZ" sz="3600" b="1" u="sng" dirty="0">
+                <a:solidFill>
+                  <a:srgbClr val="00B0F0"/>
+                </a:solidFill>
+                <a:cs typeface="+mj-cs"/>
+              </a:rPr>
+              <a:t>النظام:</a:t>
+            </a:r>
+            <a:r>
+              <a:rPr lang="ar-DZ" sz="3600" b="1" dirty="0">
+                <a:solidFill>
+                  <a:srgbClr val="00B0F0"/>
+                </a:solidFill>
+                <a:cs typeface="+mj-cs"/>
+              </a:rPr>
+              <a:t>  </a:t>
+            </a:r>
+            <a:r>
+              <a:rPr lang="ar-DZ" sz="3600" dirty="0">
+                <a:cs typeface="+mj-cs"/>
+              </a:rPr>
+              <a:t>تمثل أدوات النظام مثل سلة المهملات .</a:t>
+            </a:r>
+            <a:r>
+              <a:rPr lang="fr-FR" sz="3600" dirty="0">
+                <a:cs typeface="+mj-cs"/>
+              </a:rPr>
+              <a:t>Corbeille</a:t>
+            </a:r>
+          </a:p>
+          <a:p>
+            <a:pPr lvl="2" algn="r" rtl="1"/>
+            <a:r>
+              <a:rPr lang="fr-FR" sz="3600" b="1" u="sng" dirty="0">
+                <a:solidFill>
+                  <a:srgbClr val="00B0F0"/>
+                </a:solidFill>
+                <a:cs typeface="+mj-cs"/>
+              </a:rPr>
+              <a:t>•	</a:t>
+            </a:r>
+            <a:r>
+              <a:rPr lang="ar-DZ" sz="3600" b="1" u="sng" dirty="0" smtClean="0">
+                <a:solidFill>
+                  <a:srgbClr val="00B0F0"/>
+                </a:solidFill>
+                <a:cs typeface="+mj-cs"/>
+              </a:rPr>
+              <a:t> أيقونات </a:t>
+            </a:r>
+            <a:r>
+              <a:rPr lang="ar-DZ" sz="3600" b="1" u="sng" dirty="0">
+                <a:solidFill>
+                  <a:srgbClr val="00B0F0"/>
+                </a:solidFill>
+                <a:cs typeface="+mj-cs"/>
+              </a:rPr>
+              <a:t>البرامج:</a:t>
+            </a:r>
+            <a:r>
+              <a:rPr lang="ar-DZ" sz="3600" b="1" dirty="0">
+                <a:solidFill>
+                  <a:srgbClr val="00B0F0"/>
+                </a:solidFill>
+                <a:cs typeface="+mj-cs"/>
+              </a:rPr>
+              <a:t>  </a:t>
+            </a:r>
+            <a:r>
+              <a:rPr lang="ar-DZ" sz="3600" dirty="0">
+                <a:cs typeface="+mj-cs"/>
+              </a:rPr>
+              <a:t>تمثل البرامج المثبتة مثل برنامج الرسام </a:t>
+            </a:r>
+            <a:r>
+              <a:rPr lang="fr-FR" sz="3600" dirty="0" err="1" smtClean="0">
+                <a:cs typeface="+mj-cs"/>
+              </a:rPr>
+              <a:t>Paint</a:t>
+            </a:r>
+            <a:endParaRPr lang="fr-FR" sz="3600" dirty="0">
+              <a:cs typeface="+mj-cs"/>
+            </a:endParaRPr>
+          </a:p>
+          <a:p>
+            <a:pPr lvl="2" algn="r" rtl="1"/>
+            <a:r>
+              <a:rPr lang="fr-FR" sz="3600" b="1" u="sng" dirty="0">
+                <a:solidFill>
+                  <a:srgbClr val="00B0F0"/>
+                </a:solidFill>
+                <a:cs typeface="+mj-cs"/>
+              </a:rPr>
+              <a:t>•	</a:t>
+            </a:r>
+            <a:r>
+              <a:rPr lang="ar-DZ" sz="3600" b="1" u="sng" dirty="0" smtClean="0">
+                <a:solidFill>
+                  <a:srgbClr val="00B0F0"/>
+                </a:solidFill>
+                <a:cs typeface="+mj-cs"/>
+              </a:rPr>
+              <a:t> أيقونات </a:t>
+            </a:r>
+            <a:r>
+              <a:rPr lang="ar-DZ" sz="3600" b="1" u="sng" dirty="0">
+                <a:solidFill>
+                  <a:srgbClr val="00B0F0"/>
+                </a:solidFill>
+                <a:cs typeface="+mj-cs"/>
+              </a:rPr>
+              <a:t>الاختصارات:</a:t>
+            </a:r>
+            <a:r>
+              <a:rPr lang="ar-DZ" sz="3600" b="1" dirty="0">
+                <a:solidFill>
+                  <a:srgbClr val="00B0F0"/>
+                </a:solidFill>
+                <a:cs typeface="+mj-cs"/>
+              </a:rPr>
+              <a:t>  </a:t>
+            </a:r>
+            <a:r>
+              <a:rPr lang="ar-DZ" sz="3600" dirty="0">
+                <a:cs typeface="+mj-cs"/>
+              </a:rPr>
+              <a:t>تمثل اختصارات للوصول السريع و تتميز بوجود سهم صغير في أسفلها مثل اختصار لبرنامج.</a:t>
+            </a:r>
+          </a:p>
+          <a:p>
+            <a:pPr lvl="2" algn="r" rtl="1"/>
+            <a:r>
+              <a:rPr lang="ar-DZ" sz="3600" b="1" u="sng" dirty="0" smtClean="0">
+                <a:solidFill>
+                  <a:srgbClr val="00B0F0"/>
+                </a:solidFill>
+                <a:cs typeface="+mj-cs"/>
+              </a:rPr>
+              <a:t>• </a:t>
+            </a:r>
+            <a:r>
+              <a:rPr lang="ar-DZ" sz="3600" b="1" u="sng" dirty="0">
+                <a:solidFill>
+                  <a:srgbClr val="00B0F0"/>
+                </a:solidFill>
+                <a:cs typeface="+mj-cs"/>
+              </a:rPr>
+              <a:t>	أيقونات الملفات:</a:t>
+            </a:r>
+            <a:r>
+              <a:rPr lang="ar-DZ" sz="3600" b="1" dirty="0">
+                <a:solidFill>
+                  <a:srgbClr val="00B0F0"/>
+                </a:solidFill>
+                <a:cs typeface="+mj-cs"/>
+              </a:rPr>
+              <a:t>  </a:t>
+            </a:r>
+            <a:r>
+              <a:rPr lang="ar-DZ" sz="3600" dirty="0">
+                <a:cs typeface="+mj-cs"/>
+              </a:rPr>
+              <a:t>تمثل الملفات مثل صورة أو فيديو.</a:t>
+            </a:r>
+          </a:p>
+          <a:p>
+            <a:pPr lvl="2" algn="r" rtl="1"/>
+            <a:r>
+              <a:rPr lang="ar-DZ" sz="3600" b="1" u="sng" dirty="0" smtClean="0">
+                <a:solidFill>
+                  <a:srgbClr val="00B0F0"/>
+                </a:solidFill>
+                <a:cs typeface="+mj-cs"/>
+              </a:rPr>
+              <a:t>• </a:t>
+            </a:r>
+            <a:r>
+              <a:rPr lang="ar-DZ" sz="3600" b="1" u="sng" dirty="0">
+                <a:solidFill>
+                  <a:srgbClr val="00B0F0"/>
+                </a:solidFill>
+                <a:cs typeface="+mj-cs"/>
+              </a:rPr>
+              <a:t>	أيقونات المجلدات:</a:t>
+            </a:r>
+            <a:r>
+              <a:rPr lang="ar-DZ" sz="3600" b="1" dirty="0">
+                <a:solidFill>
+                  <a:srgbClr val="00B0F0"/>
+                </a:solidFill>
+                <a:cs typeface="+mj-cs"/>
+              </a:rPr>
+              <a:t>  </a:t>
+            </a:r>
+            <a:r>
+              <a:rPr lang="ar-DZ" sz="3600" dirty="0">
+                <a:cs typeface="+mj-cs"/>
+              </a:rPr>
+              <a:t>تمثل المجلدات.</a:t>
+            </a:r>
+          </a:p>
+          <a:p>
+            <a:pPr lvl="2" algn="r" rtl="1"/>
+            <a:endParaRPr lang="ar-DZ" sz="3600" b="1" dirty="0">
+              <a:cs typeface="+mj-cs"/>
+            </a:endParaRPr>
+          </a:p>
+          <a:p>
+            <a:pPr marL="1657350" lvl="2" indent="-742950" algn="r" rtl="1">
+              <a:buAutoNum type="arabicPeriod" startAt="3"/>
+            </a:pPr>
+            <a:r>
+              <a:rPr lang="ar-DZ" sz="3600" b="1" u="sng" dirty="0" smtClean="0">
+                <a:solidFill>
+                  <a:srgbClr val="00B050"/>
+                </a:solidFill>
+                <a:cs typeface="+mj-cs"/>
+              </a:rPr>
+              <a:t>شريط </a:t>
+            </a:r>
+            <a:r>
+              <a:rPr lang="ar-DZ" sz="3600" b="1" u="sng" dirty="0">
+                <a:solidFill>
+                  <a:srgbClr val="00B050"/>
+                </a:solidFill>
+                <a:cs typeface="+mj-cs"/>
+              </a:rPr>
+              <a:t>المهام </a:t>
+            </a:r>
+            <a:r>
+              <a:rPr lang="fr-FR" sz="3600" b="1" u="sng" dirty="0" smtClean="0">
+                <a:solidFill>
+                  <a:srgbClr val="00B050"/>
+                </a:solidFill>
+                <a:cs typeface="+mj-cs"/>
+              </a:rPr>
+              <a:t>: Barre </a:t>
+            </a:r>
+            <a:r>
+              <a:rPr lang="fr-FR" sz="3600" b="1" u="sng" dirty="0">
+                <a:solidFill>
+                  <a:srgbClr val="00B050"/>
+                </a:solidFill>
+                <a:cs typeface="+mj-cs"/>
+              </a:rPr>
+              <a:t>des </a:t>
+            </a:r>
+            <a:r>
+              <a:rPr lang="fr-FR" sz="3600" b="1" u="sng" dirty="0" smtClean="0">
+                <a:solidFill>
+                  <a:srgbClr val="00B050"/>
+                </a:solidFill>
+                <a:cs typeface="+mj-cs"/>
+              </a:rPr>
+              <a:t>taches</a:t>
+            </a:r>
+            <a:endParaRPr lang="fr-FR" sz="3600" b="1" u="sng" dirty="0">
+              <a:solidFill>
+                <a:srgbClr val="00B050"/>
+              </a:solidFill>
+              <a:cs typeface="+mj-cs"/>
+            </a:endParaRPr>
+          </a:p>
+          <a:p>
+            <a:pPr lvl="2" algn="r" rtl="1"/>
+            <a:r>
+              <a:rPr lang="ar-DZ" sz="3600" dirty="0" smtClean="0">
+                <a:cs typeface="+mj-cs"/>
+              </a:rPr>
+              <a:t>يمتد </a:t>
+            </a:r>
+            <a:r>
+              <a:rPr lang="ar-DZ" sz="3600" dirty="0">
+                <a:cs typeface="+mj-cs"/>
+              </a:rPr>
+              <a:t>أفقيا أسفل الشاشة، يحتوى على الزر ابدأ </a:t>
+            </a:r>
+            <a:r>
+              <a:rPr lang="fr-FR" sz="3600" dirty="0">
+                <a:cs typeface="+mj-cs"/>
+              </a:rPr>
+              <a:t>Démarrer ، </a:t>
+            </a:r>
+            <a:r>
+              <a:rPr lang="ar-DZ" sz="3600" dirty="0">
+                <a:cs typeface="+mj-cs"/>
+              </a:rPr>
+              <a:t>الساعة، التاريخ، أداة ضبط اللغة و البرامج </a:t>
+            </a:r>
+            <a:r>
+              <a:rPr lang="ar-DZ" sz="3600" dirty="0" smtClean="0">
+                <a:cs typeface="+mj-cs"/>
+              </a:rPr>
+              <a:t>المفتوحة</a:t>
+            </a:r>
+            <a:r>
+              <a:rPr lang="ar-DZ" sz="3600" dirty="0">
+                <a:cs typeface="+mj-cs"/>
+              </a:rPr>
+              <a:t>.</a:t>
+            </a:r>
+            <a:endParaRPr lang="en-US" sz="4000" dirty="0">
+              <a:cs typeface="+mj-cs"/>
+            </a:endParaRPr>
+          </a:p>
+        </p:txBody>
+      </p:sp>
+    </p:spTree>
+    <p:extLst>
+      <p:ext uri="{BB962C8B-B14F-4D97-AF65-F5344CB8AC3E}">
+        <p14:creationId xmlns:p14="http://schemas.microsoft.com/office/powerpoint/2010/main" val="1603209517"/>
+      </p:ext>
+    </p:extLst>
+  </p:cSld>
+  <p:clrMapOvr>
+    <a:masterClrMapping/>
+  </p:clrMapOvr>
+  <p:transition spd="slow">
+    <p:push dir="u"/>
+  </p:transition>
+  <p:timing>
+    <p:tnLst>
+      <p:par>
+        <p:cTn id="1" dur="indefinite" restart="never" nodeType="tmRoot"/>
+      </p:par>
+    </p:tnLst>
+  </p:timing>
+</p:sld>
+</file>
+
+<file path=ppt/slides/slide7.xml><?xml version="1.0" encoding="utf-8"?>
+<p:sld xmlns:a="http://schemas.openxmlformats.org/drawingml/2006/main" xmlns:r="http://schemas.openxmlformats.org/officeDocument/2006/relationships" xmlns:p="http://schemas.openxmlformats.org/presentationml/2006/main">
+  <p:cSld>
+    <p:spTree>
+      <p:nvGrpSpPr>
+        <p:cNvPr id="1" name=""/>
+        <p:cNvGrpSpPr/>
+        <p:nvPr/>
+      </p:nvGrpSpPr>
+      <p:grpSpPr>
+        <a:xfrm>
+          <a:off x="0" y="0"/>
+          <a:ext cx="0" cy="0"/>
+          <a:chOff x="0" y="0"/>
+          <a:chExt cx="0" cy="0"/>
+        </a:xfrm>
+      </p:grpSpPr>
+      <p:sp>
+        <p:nvSpPr>
+          <p:cNvPr id="2" name="Rectangle 1"/>
+          <p:cNvSpPr/>
+          <p:nvPr/>
+        </p:nvSpPr>
+        <p:spPr>
+          <a:xfrm>
+            <a:off x="361950" y="209551"/>
+            <a:ext cx="11620500" cy="3662541"/>
+          </a:xfrm>
+          <a:prstGeom prst="rect">
+            <a:avLst/>
+          </a:prstGeom>
+        </p:spPr>
+        <p:txBody>
+          <a:bodyPr wrap="square">
+            <a:spAutoFit/>
+          </a:bodyPr>
+          <a:lstStyle/>
+          <a:p>
+            <a:pPr algn="ctr" rtl="1"/>
+            <a:r>
+              <a:rPr lang="ar-DZ" sz="4400" b="1" u="sng" dirty="0" smtClean="0">
+                <a:solidFill>
+                  <a:srgbClr val="FF0000"/>
+                </a:solidFill>
+                <a:effectLst>
+                  <a:outerShdw blurRad="38100" dist="38100" dir="2700000" algn="tl">
+                    <a:srgbClr val="000000">
+                      <a:alpha val="43137"/>
+                    </a:srgbClr>
+                  </a:outerShdw>
+                </a:effectLst>
+                <a:cs typeface="+mj-cs"/>
+              </a:rPr>
+              <a:t>تدريب</a:t>
+            </a:r>
+          </a:p>
+          <a:p>
+            <a:pPr algn="r" rtl="1"/>
+            <a:endParaRPr lang="ar-DZ" sz="4400" b="1" u="sng" dirty="0" smtClean="0">
+              <a:solidFill>
+                <a:srgbClr val="FF0000"/>
+              </a:solidFill>
+              <a:effectLst>
+                <a:outerShdw blurRad="38100" dist="38100" dir="2700000" algn="tl">
+                  <a:srgbClr val="000000">
+                    <a:alpha val="43137"/>
+                  </a:srgbClr>
+                </a:outerShdw>
+              </a:effectLst>
+              <a:cs typeface="+mj-cs"/>
+            </a:endParaRPr>
+          </a:p>
+          <a:p>
             <a:pPr marL="571500" indent="-571500" algn="r" rtl="1">
-              <a:buFontTx/>
-              <a:buChar char="-"/>
+              <a:buFont typeface="Wingdings" panose="05000000000000000000" pitchFamily="2" charset="2"/>
+              <a:buChar char="Ø"/>
             </a:pPr>
             <a:r>
-              <a:rPr lang="ar-DZ" b="1" dirty="0" smtClean="0"/>
-              <a:t>برأيك كيف يمكن فتح الأيقونة </a:t>
-            </a:r>
-            <a:r>
-              <a:rPr lang="fr-FR" b="1" dirty="0" smtClean="0"/>
-              <a:t>Corbeille</a:t>
-            </a:r>
-            <a:r>
-              <a:rPr lang="ar-DZ" b="1" dirty="0" smtClean="0"/>
-              <a:t> ؟</a:t>
-            </a:r>
-          </a:p>
-          <a:p>
-            <a:pPr algn="r" rtl="1"/>
-            <a:endParaRPr lang="ar-DZ" b="1" dirty="0" smtClean="0"/>
+              <a:rPr lang="ar-DZ" sz="3600" dirty="0" smtClean="0">
+                <a:cs typeface="+mj-cs"/>
+              </a:rPr>
+              <a:t>قم </a:t>
+            </a:r>
+            <a:r>
+              <a:rPr lang="ar-DZ" sz="3600" dirty="0">
+                <a:cs typeface="+mj-cs"/>
+              </a:rPr>
+              <a:t>بتشغيل الحاسوب.</a:t>
+            </a:r>
           </a:p>
           <a:p>
             <a:pPr marL="571500" indent="-571500" algn="r" rtl="1">
-              <a:buFontTx/>
-              <a:buChar char="-"/>
+              <a:buFont typeface="Wingdings" panose="05000000000000000000" pitchFamily="2" charset="2"/>
+              <a:buChar char="Ø"/>
             </a:pPr>
             <a:r>
-              <a:rPr lang="ar-DZ" b="1" dirty="0" smtClean="0"/>
-              <a:t>كيف </a:t>
-            </a:r>
-            <a:r>
-              <a:rPr lang="ar-DZ" b="1" dirty="0"/>
-              <a:t>يمكن تغيير مكانها على سطح </a:t>
-            </a:r>
-            <a:r>
-              <a:rPr lang="ar-DZ" b="1" dirty="0" smtClean="0"/>
-              <a:t>المكتب ؟</a:t>
-            </a:r>
-          </a:p>
-          <a:p>
-            <a:pPr algn="r" rtl="1"/>
-            <a:endParaRPr lang="ar-DZ" b="1" dirty="0" smtClean="0"/>
+              <a:rPr lang="ar-DZ" sz="3600" dirty="0" smtClean="0">
+                <a:cs typeface="+mj-cs"/>
+              </a:rPr>
+              <a:t>حاول </a:t>
+            </a:r>
+            <a:r>
+              <a:rPr lang="ar-DZ" sz="3600" dirty="0">
+                <a:cs typeface="+mj-cs"/>
+              </a:rPr>
+              <a:t>التعرف على عناصر الواجهة المدروسة في هذه الحصة.</a:t>
+            </a:r>
           </a:p>
           <a:p>
             <a:pPr marL="571500" indent="-571500" algn="r" rtl="1">
-              <a:buFontTx/>
-              <a:buChar char="-"/>
+              <a:buFont typeface="Wingdings" panose="05000000000000000000" pitchFamily="2" charset="2"/>
+              <a:buChar char="Ø"/>
             </a:pPr>
             <a:r>
-              <a:rPr lang="ar-DZ" b="1" dirty="0" smtClean="0"/>
-              <a:t>قم </a:t>
-            </a:r>
-            <a:r>
-              <a:rPr lang="ar-DZ" b="1" dirty="0"/>
-              <a:t>بالضغط بالزر الأيمن للفأرة عليها </a:t>
-            </a:r>
-            <a:r>
-              <a:rPr lang="ar-DZ" b="1" dirty="0" smtClean="0"/>
-              <a:t>لاكتشاف </a:t>
-            </a:r>
-            <a:r>
-              <a:rPr lang="ar-DZ" b="1" dirty="0"/>
-              <a:t>مختلف العمليات الأخرى الممكن إجراؤها على </a:t>
-            </a:r>
-            <a:r>
-              <a:rPr lang="ar-DZ" b="1" dirty="0" smtClean="0"/>
-              <a:t>الأيقونة.</a:t>
-            </a:r>
-            <a:endParaRPr lang="fr-FR" b="1" dirty="0"/>
+              <a:rPr lang="ar-DZ" sz="3600" dirty="0" smtClean="0">
+                <a:cs typeface="+mj-cs"/>
+              </a:rPr>
+              <a:t>القيام </a:t>
+            </a:r>
+            <a:r>
+              <a:rPr lang="ar-DZ" sz="3600" dirty="0">
+                <a:cs typeface="+mj-cs"/>
+              </a:rPr>
+              <a:t>ببعض العمليات على الأيقونة ليتمكن المتعلم من التحكم بالفأرة (فتح أيقونة بالضغط مرتين، سحب أيقونة، استعمال الزر الأيمن للفأرة ....)</a:t>
+            </a:r>
           </a:p>
         </p:txBody>
       </p:sp>
     </p:spTree>
+    <p:extLst>
+      <p:ext uri="{BB962C8B-B14F-4D97-AF65-F5344CB8AC3E}">
+        <p14:creationId xmlns:p14="http://schemas.microsoft.com/office/powerpoint/2010/main" val="73917598"/>
+      </p:ext>
+    </p:extLst>
   </p:cSld>
   <p:clrMapOvr>
     <a:masterClrMapping/>
@@ -4077,39 +5530,39 @@
         <a:sysClr val="window" lastClr="FFFFFF"/>
       </a:lt1>
       <a:dk2>
-        <a:srgbClr val="1F497D"/>
+        <a:srgbClr val="44546A"/>
       </a:dk2>
       <a:lt2>
-        <a:srgbClr val="EEECE1"/>
+        <a:srgbClr val="E7E6E6"/>
       </a:lt2>
       <a:accent1>
-        <a:srgbClr val="4F81BD"/>
+        <a:srgbClr val="5B9BD5"/>
       </a:accent1>
       <a:accent2>
-        <a:srgbClr val="C0504D"/>
+        <a:srgbClr val="ED7D31"/>
       </a:accent2>
       <a:accent3>
-        <a:srgbClr val="9BBB59"/>
+        <a:srgbClr val="A5A5A5"/>
       </a:accent3>
       <a:accent4>
-        <a:srgbClr val="8064A2"/>
+        <a:srgbClr val="FFC000"/>
       </a:accent4>
       <a:accent5>
-        <a:srgbClr val="4BACC6"/>
+        <a:srgbClr val="4472C4"/>
       </a:accent5>
       <a:accent6>
-        <a:srgbClr val="F79646"/>
+        <a:srgbClr val="70AD47"/>
       </a:accent6>
       <a:hlink>
-        <a:srgbClr val="0000FF"/>
+        <a:srgbClr val="0563C1"/>
       </a:hlink>
       <a:folHlink>
-        <a:srgbClr val="800080"/>
+        <a:srgbClr val="954F72"/>
       </a:folHlink>
     </a:clrScheme>
     <a:fontScheme name="Office">
       <a:majorFont>
-        <a:latin typeface="Calibri"/>
+        <a:latin typeface="Calibri Light" panose="020F0302020204030204"/>
         <a:ea typeface=""/>
         <a:cs typeface=""/>
         <a:font script="Jpan" typeface="ＭＳ Ｐゴシック"/>
@@ -4141,9 +5594,10 @@
         <a:font script="Mong" typeface="Mongolian Baiti"/>
         <a:font script="Viet" typeface="Times New Roman"/>
         <a:font script="Uigh" typeface="Microsoft Uighur"/>
+        <a:font script="Geor" typeface="Sylfaen"/>
       </a:majorFont>
       <a:minorFont>
-        <a:latin typeface="Calibri"/>
+        <a:latin typeface="Calibri" panose="020F0502020204030204"/>
         <a:ea typeface=""/>
         <a:cs typeface=""/>
         <a:font script="Jpan" typeface="ＭＳ Ｐゴシック"/>
@@ -4175,6 +5629,7 @@
         <a:font script="Mong" typeface="Mongolian Baiti"/>
         <a:font script="Viet" typeface="Arial"/>
         <a:font script="Uigh" typeface="Microsoft Uighur"/>
+        <a:font script="Geor" typeface="Sylfaen"/>
       </a:minorFont>
     </a:fontScheme>
     <a:fmtScheme name="Office">
@@ -4186,165 +5641,141 @@
           <a:gsLst>
             <a:gs pos="0">
               <a:schemeClr val="phClr">
-                <a:tint val="50000"/>
-                <a:satMod val="300000"/>
+                <a:lumMod val="110000"/>
+                <a:satMod val="105000"/>
+                <a:tint val="67000"/>
               </a:schemeClr>
             </a:gs>
-            <a:gs pos="35000">
+            <a:gs pos="50000">
               <a:schemeClr val="phClr">
-                <a:tint val="37000"/>
-                <a:satMod val="300000"/>
+                <a:lumMod val="105000"/>
+                <a:satMod val="103000"/>
+                <a:tint val="73000"/>
               </a:schemeClr>
             </a:gs>
             <a:gs pos="100000">
               <a:schemeClr val="phClr">
-                <a:tint val="15000"/>
-                <a:satMod val="350000"/>
+                <a:lumMod val="105000"/>
+                <a:satMod val="109000"/>
+                <a:tint val="81000"/>
               </a:schemeClr>
             </a:gs>
           </a:gsLst>
-          <a:lin ang="16200000" scaled="1"/>
+          <a:lin ang="5400000" scaled="0"/>
         </a:gradFill>
         <a:gradFill rotWithShape="1">
           <a:gsLst>
             <a:gs pos="0">
               <a:schemeClr val="phClr">
-                <a:shade val="51000"/>
-                <a:satMod val="130000"/>
+                <a:satMod val="103000"/>
+                <a:lumMod val="102000"/>
+                <a:tint val="94000"/>
               </a:schemeClr>
             </a:gs>
-            <a:gs pos="80000">
+            <a:gs pos="50000">
               <a:schemeClr val="phClr">
-                <a:shade val="93000"/>
-                <a:satMod val="130000"/>
+                <a:satMod val="110000"/>
+                <a:lumMod val="100000"/>
+                <a:shade val="100000"/>
               </a:schemeClr>
             </a:gs>
             <a:gs pos="100000">
               <a:schemeClr val="phClr">
-                <a:shade val="94000"/>
-                <a:satMod val="135000"/>
+                <a:lumMod val="99000"/>
+                <a:satMod val="120000"/>
+                <a:shade val="78000"/>
               </a:schemeClr>
             </a:gs>
           </a:gsLst>
-          <a:lin ang="16200000" scaled="0"/>
+          <a:lin ang="5400000" scaled="0"/>
         </a:gradFill>
       </a:fillStyleLst>
       <a:lnStyleLst>
-        <a:ln w="9525" cap="flat" cmpd="sng" algn="ctr">
-          <a:solidFill>
-            <a:schemeClr val="phClr">
-              <a:shade val="95000"/>
-              <a:satMod val="105000"/>
-            </a:schemeClr>
-          </a:solidFill>
-          <a:prstDash val="solid"/>
-        </a:ln>
-        <a:ln w="25400" cap="flat" cmpd="sng" algn="ctr">
+        <a:ln w="6350" cap="flat" cmpd="sng" algn="ctr">
           <a:solidFill>
             <a:schemeClr val="phClr"/>
           </a:solidFill>
           <a:prstDash val="solid"/>
+          <a:miter lim="800000"/>
         </a:ln>
-        <a:ln w="38100" cap="flat" cmpd="sng" algn="ctr">
+        <a:ln w="12700" cap="flat" cmpd="sng" algn="ctr">
           <a:solidFill>
             <a:schemeClr val="phClr"/>
           </a:solidFill>
           <a:prstDash val="solid"/>
+          <a:miter lim="800000"/>
+        </a:ln>
+        <a:ln w="19050" cap="flat" cmpd="sng" algn="ctr">
+          <a:solidFill>
+            <a:schemeClr val="phClr"/>
+          </a:solidFill>
+          <a:prstDash val="solid"/>
+          <a:miter lim="800000"/>
         </a:ln>
       </a:lnStyleLst>
       <a:effectStyleLst>
         <a:effectStyle>
+          <a:effectLst/>
+        </a:effectStyle>
+        <a:effectStyle>
+          <a:effectLst/>
+        </a:effectStyle>
+        <a:effectStyle>
           <a:effectLst>
-            <a:outerShdw blurRad="40000" dist="20000" dir="5400000" rotWithShape="0">
+            <a:outerShdw blurRad="57150" dist="19050" dir="5400000" algn="ctr" rotWithShape="0">
               <a:srgbClr val="000000">
-                <a:alpha val="38000"/>
+                <a:alpha val="63000"/>
               </a:srgbClr>
             </a:outerShdw>
           </a:effectLst>
-        </a:effectStyle>
-        <a:effectStyle>
-          <a:effectLst>
-            <a:outerShdw blurRad="40000" dist="23000" dir="5400000" rotWithShape="0">
-              <a:srgbClr val="000000">
-                <a:alpha val="35000"/>
-              </a:srgbClr>
-            </a:outerShdw>
-          </a:effectLst>
-        </a:effectStyle>
-        <a:effectStyle>
-          <a:effectLst>
-            <a:outerShdw blurRad="40000" dist="23000" dir="5400000" rotWithShape="0">
-              <a:srgbClr val="000000">
-                <a:alpha val="35000"/>
-              </a:srgbClr>
-            </a:outerShdw>
-          </a:effectLst>
-          <a:scene3d>
-            <a:camera prst="orthographicFront">
-              <a:rot lat="0" lon="0" rev="0"/>
-            </a:camera>
-            <a:lightRig rig="threePt" dir="t">
-              <a:rot lat="0" lon="0" rev="1200000"/>
-            </a:lightRig>
-          </a:scene3d>
-          <a:sp3d>
-            <a:bevelT w="63500" h="25400"/>
-          </a:sp3d>
         </a:effectStyle>
       </a:effectStyleLst>
       <a:bgFillStyleLst>
         <a:solidFill>
           <a:schemeClr val="phClr"/>
         </a:solidFill>
+        <a:solidFill>
+          <a:schemeClr val="phClr">
+            <a:tint val="95000"/>
+            <a:satMod val="170000"/>
+          </a:schemeClr>
+        </a:solidFill>
         <a:gradFill rotWithShape="1">
           <a:gsLst>
             <a:gs pos="0">
               <a:schemeClr val="phClr">
-                <a:tint val="40000"/>
-                <a:satMod val="350000"/>
+                <a:tint val="93000"/>
+                <a:satMod val="150000"/>
+                <a:shade val="98000"/>
+                <a:lumMod val="102000"/>
               </a:schemeClr>
             </a:gs>
-            <a:gs pos="40000">
+            <a:gs pos="50000">
               <a:schemeClr val="phClr">
-                <a:tint val="45000"/>
-                <a:shade val="99000"/>
-                <a:satMod val="350000"/>
+                <a:tint val="98000"/>
+                <a:satMod val="130000"/>
+                <a:shade val="90000"/>
+                <a:lumMod val="103000"/>
               </a:schemeClr>
             </a:gs>
             <a:gs pos="100000">
               <a:schemeClr val="phClr">
-                <a:shade val="20000"/>
-                <a:satMod val="255000"/>
+                <a:shade val="63000"/>
+                <a:satMod val="120000"/>
               </a:schemeClr>
             </a:gs>
           </a:gsLst>
-          <a:path path="circle">
-            <a:fillToRect l="50000" t="-80000" r="50000" b="180000"/>
-          </a:path>
-        </a:gradFill>
-        <a:gradFill rotWithShape="1">
-          <a:gsLst>
-            <a:gs pos="0">
-              <a:schemeClr val="phClr">
-                <a:tint val="80000"/>
-                <a:satMod val="300000"/>
-              </a:schemeClr>
-            </a:gs>
-            <a:gs pos="100000">
-              <a:schemeClr val="phClr">
-                <a:shade val="30000"/>
-                <a:satMod val="200000"/>
-              </a:schemeClr>
-            </a:gs>
-          </a:gsLst>
-          <a:path path="circle">
-            <a:fillToRect l="50000" t="50000" r="50000" b="50000"/>
-          </a:path>
+          <a:lin ang="5400000" scaled="0"/>
         </a:gradFill>
       </a:bgFillStyleLst>
     </a:fmtScheme>
   </a:themeElements>
   <a:objectDefaults/>
   <a:extraClrSchemeLst/>
+  <a:extLst>
+    <a:ext uri="{05A4C25C-085E-4340-85A3-A5531E510DB2}">
+      <thm15:themeFamily xmlns:thm15="http://schemas.microsoft.com/office/thememl/2012/main" name="Office Theme" id="{62F939B6-93AF-4DB8-9C6B-D6C7DFDC589F}" vid="{4A3C46E8-61CC-4603-A589-7422A47A8E4A}"/>
+    </a:ext>
+  </a:extLst>
 </a:theme>
 </file>
--- a/1 am/2 نظام التشغيل/cours 5/عرض الدرس.pptx
+++ b/1 am/2 نظام التشغيل/cours 5/عرض الدرس.pptx
@@ -249,7 +249,7 @@
           <a:p>
             <a:fld id="{33E46DBA-FA3B-4C5F-B700-4671668DAB72}" type="datetimeFigureOut">
               <a:rPr lang="fr-FR" smtClean="0"/>
-              <a:t>15/01/2025</a:t>
+              <a:t>20/01/2025</a:t>
             </a:fld>
             <a:endParaRPr lang="fr-FR"/>
           </a:p>
@@ -419,7 +419,7 @@
           <a:p>
             <a:fld id="{33E46DBA-FA3B-4C5F-B700-4671668DAB72}" type="datetimeFigureOut">
               <a:rPr lang="fr-FR" smtClean="0"/>
-              <a:t>15/01/2025</a:t>
+              <a:t>20/01/2025</a:t>
             </a:fld>
             <a:endParaRPr lang="fr-FR"/>
           </a:p>
@@ -599,7 +599,7 @@
           <a:p>
             <a:fld id="{33E46DBA-FA3B-4C5F-B700-4671668DAB72}" type="datetimeFigureOut">
               <a:rPr lang="fr-FR" smtClean="0"/>
-              <a:t>15/01/2025</a:t>
+              <a:t>20/01/2025</a:t>
             </a:fld>
             <a:endParaRPr lang="fr-FR"/>
           </a:p>
@@ -769,7 +769,7 @@
           <a:p>
             <a:fld id="{33E46DBA-FA3B-4C5F-B700-4671668DAB72}" type="datetimeFigureOut">
               <a:rPr lang="fr-FR" smtClean="0"/>
-              <a:t>15/01/2025</a:t>
+              <a:t>20/01/2025</a:t>
             </a:fld>
             <a:endParaRPr lang="fr-FR"/>
           </a:p>
@@ -1015,7 +1015,7 @@
           <a:p>
             <a:fld id="{33E46DBA-FA3B-4C5F-B700-4671668DAB72}" type="datetimeFigureOut">
               <a:rPr lang="fr-FR" smtClean="0"/>
-              <a:t>15/01/2025</a:t>
+              <a:t>20/01/2025</a:t>
             </a:fld>
             <a:endParaRPr lang="fr-FR"/>
           </a:p>
@@ -1247,7 +1247,7 @@
           <a:p>
             <a:fld id="{33E46DBA-FA3B-4C5F-B700-4671668DAB72}" type="datetimeFigureOut">
               <a:rPr lang="fr-FR" smtClean="0"/>
-              <a:t>15/01/2025</a:t>
+              <a:t>20/01/2025</a:t>
             </a:fld>
             <a:endParaRPr lang="fr-FR"/>
           </a:p>
@@ -1614,7 +1614,7 @@
           <a:p>
             <a:fld id="{33E46DBA-FA3B-4C5F-B700-4671668DAB72}" type="datetimeFigureOut">
               <a:rPr lang="fr-FR" smtClean="0"/>
-              <a:t>15/01/2025</a:t>
+              <a:t>20/01/2025</a:t>
             </a:fld>
             <a:endParaRPr lang="fr-FR"/>
           </a:p>
@@ -1732,7 +1732,7 @@
           <a:p>
             <a:fld id="{33E46DBA-FA3B-4C5F-B700-4671668DAB72}" type="datetimeFigureOut">
               <a:rPr lang="fr-FR" smtClean="0"/>
-              <a:t>15/01/2025</a:t>
+              <a:t>20/01/2025</a:t>
             </a:fld>
             <a:endParaRPr lang="fr-FR"/>
           </a:p>
@@ -1827,7 +1827,7 @@
           <a:p>
             <a:fld id="{33E46DBA-FA3B-4C5F-B700-4671668DAB72}" type="datetimeFigureOut">
               <a:rPr lang="fr-FR" smtClean="0"/>
-              <a:t>15/01/2025</a:t>
+              <a:t>20/01/2025</a:t>
             </a:fld>
             <a:endParaRPr lang="fr-FR"/>
           </a:p>
@@ -2104,7 +2104,7 @@
           <a:p>
             <a:fld id="{33E46DBA-FA3B-4C5F-B700-4671668DAB72}" type="datetimeFigureOut">
               <a:rPr lang="fr-FR" smtClean="0"/>
-              <a:t>15/01/2025</a:t>
+              <a:t>20/01/2025</a:t>
             </a:fld>
             <a:endParaRPr lang="fr-FR"/>
           </a:p>
@@ -2357,7 +2357,7 @@
           <a:p>
             <a:fld id="{33E46DBA-FA3B-4C5F-B700-4671668DAB72}" type="datetimeFigureOut">
               <a:rPr lang="fr-FR" smtClean="0"/>
-              <a:t>15/01/2025</a:t>
+              <a:t>20/01/2025</a:t>
             </a:fld>
             <a:endParaRPr lang="fr-FR"/>
           </a:p>
@@ -2570,7 +2570,7 @@
           <a:p>
             <a:fld id="{33E46DBA-FA3B-4C5F-B700-4671668DAB72}" type="datetimeFigureOut">
               <a:rPr lang="fr-FR" smtClean="0"/>
-              <a:t>15/01/2025</a:t>
+              <a:t>20/01/2025</a:t>
             </a:fld>
             <a:endParaRPr lang="fr-FR"/>
           </a:p>
@@ -4088,6 +4088,28 @@
 <file path=ppt/slides/slide4.xml><?xml version="1.0" encoding="utf-8"?>
 <p:sld xmlns:a="http://schemas.openxmlformats.org/drawingml/2006/main" xmlns:r="http://schemas.openxmlformats.org/officeDocument/2006/relationships" xmlns:p="http://schemas.openxmlformats.org/presentationml/2006/main">
   <p:cSld>
+    <p:bg>
+      <p:bgPr>
+        <a:gradFill>
+          <a:gsLst>
+            <a:gs pos="0">
+              <a:schemeClr val="accent1">
+                <a:lumMod val="5000"/>
+                <a:lumOff val="95000"/>
+              </a:schemeClr>
+            </a:gs>
+            <a:gs pos="100000">
+              <a:schemeClr val="accent1">
+                <a:lumMod val="40000"/>
+                <a:lumOff val="60000"/>
+              </a:schemeClr>
+            </a:gs>
+          </a:gsLst>
+          <a:lin ang="5400000" scaled="1"/>
+        </a:gradFill>
+        <a:effectLst/>
+      </p:bgPr>
+    </p:bg>
     <p:spTree>
       <p:nvGrpSpPr>
         <p:cNvPr id="1" name=""/>
@@ -4358,6 +4380,28 @@
 <file path=ppt/slides/slide5.xml><?xml version="1.0" encoding="utf-8"?>
 <p:sld xmlns:a="http://schemas.openxmlformats.org/drawingml/2006/main" xmlns:r="http://schemas.openxmlformats.org/officeDocument/2006/relationships" xmlns:p="http://schemas.openxmlformats.org/presentationml/2006/main">
   <p:cSld>
+    <p:bg>
+      <p:bgPr>
+        <a:gradFill>
+          <a:gsLst>
+            <a:gs pos="0">
+              <a:schemeClr val="accent1">
+                <a:lumMod val="5000"/>
+                <a:lumOff val="95000"/>
+              </a:schemeClr>
+            </a:gs>
+            <a:gs pos="100000">
+              <a:schemeClr val="accent1">
+                <a:lumMod val="40000"/>
+                <a:lumOff val="60000"/>
+              </a:schemeClr>
+            </a:gs>
+          </a:gsLst>
+          <a:lin ang="5400000" scaled="1"/>
+        </a:gradFill>
+        <a:effectLst/>
+      </p:bgPr>
+    </p:bg>
     <p:spTree>
       <p:nvGrpSpPr>
         <p:cNvPr id="1" name=""/>
@@ -4628,23 +4672,7 @@
                   <a:srgbClr val="FF0000"/>
                 </a:solidFill>
               </a:rPr>
-              <a:t>:</a:t>
-            </a:r>
-            <a:r>
-              <a:rPr lang="fr-FR" sz="3600" b="1" u="sng" dirty="0" smtClean="0">
-                <a:solidFill>
-                  <a:srgbClr val="FF0000"/>
-                </a:solidFill>
-              </a:rPr>
-              <a:t> </a:t>
-            </a:r>
-            <a:r>
-              <a:rPr lang="fr-FR" sz="3600" b="1" u="sng" dirty="0" smtClean="0">
-                <a:solidFill>
-                  <a:srgbClr val="FF0000"/>
-                </a:solidFill>
-              </a:rPr>
-              <a:t>Windows </a:t>
+              <a:t>: Windows </a:t>
             </a:r>
             <a:endParaRPr lang="fr-FR" sz="3600" b="1" u="sng" dirty="0">
               <a:solidFill>
@@ -4713,15 +4741,7 @@
                   <a:srgbClr val="00B050"/>
                 </a:solidFill>
               </a:rPr>
-              <a:t>2. </a:t>
-            </a:r>
-            <a:r>
-              <a:rPr lang="ar-DZ" sz="3600" b="1" u="sng" dirty="0" smtClean="0">
-                <a:solidFill>
-                  <a:srgbClr val="00B050"/>
-                </a:solidFill>
-              </a:rPr>
-              <a:t>الأيقونات </a:t>
+              <a:t>2. الأيقونات </a:t>
             </a:r>
             <a:r>
               <a:rPr lang="fr-FR" sz="3600" b="1" u="sng" dirty="0" smtClean="0">
@@ -4776,6 +4796,28 @@
 <file path=ppt/slides/slide6.xml><?xml version="1.0" encoding="utf-8"?>
 <p:sld xmlns:a="http://schemas.openxmlformats.org/drawingml/2006/main" xmlns:r="http://schemas.openxmlformats.org/officeDocument/2006/relationships" xmlns:p="http://schemas.openxmlformats.org/presentationml/2006/main">
   <p:cSld>
+    <p:bg>
+      <p:bgPr>
+        <a:gradFill>
+          <a:gsLst>
+            <a:gs pos="0">
+              <a:schemeClr val="accent1">
+                <a:lumMod val="5000"/>
+                <a:lumOff val="95000"/>
+              </a:schemeClr>
+            </a:gs>
+            <a:gs pos="100000">
+              <a:schemeClr val="accent1">
+                <a:lumMod val="40000"/>
+                <a:lumOff val="60000"/>
+              </a:schemeClr>
+            </a:gs>
+          </a:gsLst>
+          <a:lin ang="5400000" scaled="1"/>
+        </a:gradFill>
+        <a:effectLst/>
+      </p:bgPr>
+    </p:bg>
     <p:spTree>
       <p:nvGrpSpPr>
         <p:cNvPr id="1" name=""/>
